--- a/仕様書/Ninja.pptx
+++ b/仕様書/Ninja.pptx
@@ -6,6 +6,9 @@
   </p:sldMasterIdLst>
   <p:sldIdLst>
     <p:sldId id="256" r:id="rId2"/>
+    <p:sldId id="258" r:id="rId3"/>
+    <p:sldId id="259" r:id="rId4"/>
+    <p:sldId id="257" r:id="rId5"/>
   </p:sldIdLst>
   <p:sldSz cx="12192000" cy="6858000"/>
   <p:notesSz cx="6858000" cy="9144000"/>
@@ -104,6 +107,11 @@
       </a:defRPr>
     </a:lvl9pPr>
   </p:defaultTextStyle>
+  <p:extLst>
+    <p:ext uri="{EFAFB233-063F-42B5-8137-9DF3F51BA10A}">
+      <p15:sldGuideLst xmlns:p15="http://schemas.microsoft.com/office/powerpoint/2012/main"/>
+    </p:ext>
+  </p:extLst>
 </p:presentation>
 </file>
 
@@ -254,7 +262,7 @@
           <a:p>
             <a:fld id="{A56489B6-1740-4A5C-B8C9-33805F9AA650}" type="datetimeFigureOut">
               <a:rPr kumimoji="1" lang="ja-JP" altLang="en-US" smtClean="0"/>
-              <a:t>2026/6/2</a:t>
+              <a:t>2026/6/3</a:t>
             </a:fld>
             <a:endParaRPr kumimoji="1" lang="ja-JP" altLang="en-US"/>
           </a:p>
@@ -484,7 +492,7 @@
           <a:p>
             <a:fld id="{A56489B6-1740-4A5C-B8C9-33805F9AA650}" type="datetimeFigureOut">
               <a:rPr kumimoji="1" lang="ja-JP" altLang="en-US" smtClean="0"/>
-              <a:t>2026/6/2</a:t>
+              <a:t>2026/6/3</a:t>
             </a:fld>
             <a:endParaRPr kumimoji="1" lang="ja-JP" altLang="en-US"/>
           </a:p>
@@ -724,7 +732,7 @@
           <a:p>
             <a:fld id="{A56489B6-1740-4A5C-B8C9-33805F9AA650}" type="datetimeFigureOut">
               <a:rPr kumimoji="1" lang="ja-JP" altLang="en-US" smtClean="0"/>
-              <a:t>2026/6/2</a:t>
+              <a:t>2026/6/3</a:t>
             </a:fld>
             <a:endParaRPr kumimoji="1" lang="ja-JP" altLang="en-US"/>
           </a:p>
@@ -954,7 +962,7 @@
           <a:p>
             <a:fld id="{A56489B6-1740-4A5C-B8C9-33805F9AA650}" type="datetimeFigureOut">
               <a:rPr kumimoji="1" lang="ja-JP" altLang="en-US" smtClean="0"/>
-              <a:t>2026/6/2</a:t>
+              <a:t>2026/6/3</a:t>
             </a:fld>
             <a:endParaRPr kumimoji="1" lang="ja-JP" altLang="en-US"/>
           </a:p>
@@ -1229,7 +1237,7 @@
           <a:p>
             <a:fld id="{A56489B6-1740-4A5C-B8C9-33805F9AA650}" type="datetimeFigureOut">
               <a:rPr kumimoji="1" lang="ja-JP" altLang="en-US" smtClean="0"/>
-              <a:t>2026/6/2</a:t>
+              <a:t>2026/6/3</a:t>
             </a:fld>
             <a:endParaRPr kumimoji="1" lang="ja-JP" altLang="en-US"/>
           </a:p>
@@ -1558,7 +1566,7 @@
           <a:p>
             <a:fld id="{A56489B6-1740-4A5C-B8C9-33805F9AA650}" type="datetimeFigureOut">
               <a:rPr kumimoji="1" lang="ja-JP" altLang="en-US" smtClean="0"/>
-              <a:t>2026/6/2</a:t>
+              <a:t>2026/6/3</a:t>
             </a:fld>
             <a:endParaRPr kumimoji="1" lang="ja-JP" altLang="en-US"/>
           </a:p>
@@ -2034,7 +2042,7 @@
           <a:p>
             <a:fld id="{A56489B6-1740-4A5C-B8C9-33805F9AA650}" type="datetimeFigureOut">
               <a:rPr kumimoji="1" lang="ja-JP" altLang="en-US" smtClean="0"/>
-              <a:t>2026/6/2</a:t>
+              <a:t>2026/6/3</a:t>
             </a:fld>
             <a:endParaRPr kumimoji="1" lang="ja-JP" altLang="en-US"/>
           </a:p>
@@ -2175,7 +2183,7 @@
           <a:p>
             <a:fld id="{A56489B6-1740-4A5C-B8C9-33805F9AA650}" type="datetimeFigureOut">
               <a:rPr kumimoji="1" lang="ja-JP" altLang="en-US" smtClean="0"/>
-              <a:t>2026/6/2</a:t>
+              <a:t>2026/6/3</a:t>
             </a:fld>
             <a:endParaRPr kumimoji="1" lang="ja-JP" altLang="en-US"/>
           </a:p>
@@ -2288,7 +2296,7 @@
           <a:p>
             <a:fld id="{A56489B6-1740-4A5C-B8C9-33805F9AA650}" type="datetimeFigureOut">
               <a:rPr kumimoji="1" lang="ja-JP" altLang="en-US" smtClean="0"/>
-              <a:t>2026/6/2</a:t>
+              <a:t>2026/6/3</a:t>
             </a:fld>
             <a:endParaRPr kumimoji="1" lang="ja-JP" altLang="en-US"/>
           </a:p>
@@ -2631,7 +2639,7 @@
           <a:p>
             <a:fld id="{A56489B6-1740-4A5C-B8C9-33805F9AA650}" type="datetimeFigureOut">
               <a:rPr kumimoji="1" lang="ja-JP" altLang="en-US" smtClean="0"/>
-              <a:t>2026/6/2</a:t>
+              <a:t>2026/6/3</a:t>
             </a:fld>
             <a:endParaRPr kumimoji="1" lang="ja-JP" altLang="en-US"/>
           </a:p>
@@ -2919,7 +2927,7 @@
           <a:p>
             <a:fld id="{A56489B6-1740-4A5C-B8C9-33805F9AA650}" type="datetimeFigureOut">
               <a:rPr kumimoji="1" lang="ja-JP" altLang="en-US" smtClean="0"/>
-              <a:t>2026/6/2</a:t>
+              <a:t>2026/6/3</a:t>
             </a:fld>
             <a:endParaRPr kumimoji="1" lang="ja-JP" altLang="en-US"/>
           </a:p>
@@ -3192,7 +3200,7 @@
           <a:p>
             <a:fld id="{A56489B6-1740-4A5C-B8C9-33805F9AA650}" type="datetimeFigureOut">
               <a:rPr kumimoji="1" lang="ja-JP" altLang="en-US" smtClean="0"/>
-              <a:t>2026/6/2</a:t>
+              <a:t>2026/6/3</a:t>
             </a:fld>
             <a:endParaRPr kumimoji="1" lang="ja-JP" altLang="en-US"/>
           </a:p>
@@ -4337,6 +4345,1614 @@
 </p:sld>
 </file>
 
+<file path=ppt/slides/slide2.xml><?xml version="1.0" encoding="utf-8"?>
+<p:sld xmlns:a="http://schemas.openxmlformats.org/drawingml/2006/main" xmlns:r="http://schemas.openxmlformats.org/officeDocument/2006/relationships" xmlns:p="http://schemas.openxmlformats.org/presentationml/2006/main">
+  <p:cSld>
+    <p:spTree>
+      <p:nvGrpSpPr>
+        <p:cNvPr id="1" name=""/>
+        <p:cNvGrpSpPr/>
+        <p:nvPr/>
+      </p:nvGrpSpPr>
+      <p:grpSpPr>
+        <a:xfrm>
+          <a:off x="0" y="0"/>
+          <a:ext cx="0" cy="0"/>
+          <a:chOff x="0" y="0"/>
+          <a:chExt cx="0" cy="0"/>
+        </a:xfrm>
+      </p:grpSpPr>
+      <p:sp>
+        <p:nvSpPr>
+          <p:cNvPr id="4" name="テキスト ボックス 3">
+            <a:extLst>
+              <a:ext uri="{FF2B5EF4-FFF2-40B4-BE49-F238E27FC236}">
+                <a16:creationId xmlns:a16="http://schemas.microsoft.com/office/drawing/2014/main" id="{A4B526FF-7581-4EF9-ADEB-C92A82E941D6}"/>
+              </a:ext>
+            </a:extLst>
+          </p:cNvPr>
+          <p:cNvSpPr txBox="1"/>
+          <p:nvPr/>
+        </p:nvSpPr>
+        <p:spPr>
+          <a:xfrm>
+            <a:off x="0" y="0"/>
+            <a:ext cx="3570208" cy="769441"/>
+          </a:xfrm>
+          <a:prstGeom prst="rect">
+            <a:avLst/>
+          </a:prstGeom>
+          <a:noFill/>
+        </p:spPr>
+        <p:txBody>
+          <a:bodyPr wrap="none" rtlCol="0">
+            <a:spAutoFit/>
+          </a:bodyPr>
+          <a:lstStyle/>
+          <a:p>
+            <a:r>
+              <a:rPr kumimoji="1" lang="ja-JP" altLang="en-US" sz="4400" dirty="0"/>
+              <a:t>ースタミナー</a:t>
+            </a:r>
+          </a:p>
+        </p:txBody>
+      </p:sp>
+      <p:sp>
+        <p:nvSpPr>
+          <p:cNvPr id="5" name="テキスト ボックス 4">
+            <a:extLst>
+              <a:ext uri="{FF2B5EF4-FFF2-40B4-BE49-F238E27FC236}">
+                <a16:creationId xmlns:a16="http://schemas.microsoft.com/office/drawing/2014/main" id="{E6D857F2-3196-42AA-962B-6AF62357A746}"/>
+              </a:ext>
+            </a:extLst>
+          </p:cNvPr>
+          <p:cNvSpPr txBox="1"/>
+          <p:nvPr/>
+        </p:nvSpPr>
+        <p:spPr>
+          <a:xfrm>
+            <a:off x="0" y="769441"/>
+            <a:ext cx="6878806" cy="1754326"/>
+          </a:xfrm>
+          <a:prstGeom prst="rect">
+            <a:avLst/>
+          </a:prstGeom>
+          <a:noFill/>
+        </p:spPr>
+        <p:txBody>
+          <a:bodyPr wrap="none" rtlCol="0">
+            <a:spAutoFit/>
+          </a:bodyPr>
+          <a:lstStyle/>
+          <a:p>
+            <a:r>
+              <a:rPr kumimoji="1" lang="ja-JP" altLang="en-US" dirty="0"/>
+              <a:t>ダッシュをするのに必要</a:t>
+            </a:r>
+            <a:endParaRPr kumimoji="1" lang="en-US" altLang="ja-JP" dirty="0"/>
+          </a:p>
+          <a:p>
+            <a:r>
+              <a:rPr lang="ja-JP" altLang="en-US" dirty="0"/>
+              <a:t>一回ですべて消費される、スタミナは画面右上に常に表示される</a:t>
+            </a:r>
+            <a:endParaRPr lang="en-US" altLang="ja-JP" dirty="0"/>
+          </a:p>
+          <a:p>
+            <a:r>
+              <a:rPr kumimoji="1" lang="ja-JP" altLang="en-US" dirty="0"/>
+              <a:t>押していないときはむいている方向にダッシュ、</a:t>
+            </a:r>
+            <a:endParaRPr kumimoji="1" lang="en-US" altLang="ja-JP" dirty="0"/>
+          </a:p>
+          <a:p>
+            <a:r>
+              <a:rPr kumimoji="1" lang="ja-JP" altLang="en-US" dirty="0"/>
+              <a:t>移動方向を押しているときはその方向にダッシュされる</a:t>
+            </a:r>
+            <a:endParaRPr kumimoji="1" lang="en-US" altLang="ja-JP" dirty="0"/>
+          </a:p>
+          <a:p>
+            <a:r>
+              <a:rPr kumimoji="1" lang="ja-JP" altLang="en-US" dirty="0"/>
+              <a:t>スタミナは地面に着地・色玉を経由・敵を倒すと回復される</a:t>
+            </a:r>
+            <a:endParaRPr kumimoji="1" lang="en-US" altLang="ja-JP" dirty="0"/>
+          </a:p>
+          <a:p>
+            <a:r>
+              <a:rPr lang="ja-JP" altLang="en-US" dirty="0"/>
+              <a:t>ダッシュできない状態はプレイヤーが灰色になる</a:t>
+            </a:r>
+            <a:endParaRPr kumimoji="1" lang="ja-JP" altLang="en-US" dirty="0"/>
+          </a:p>
+        </p:txBody>
+      </p:sp>
+      <p:pic>
+        <p:nvPicPr>
+          <p:cNvPr id="3" name="図 2">
+            <a:extLst>
+              <a:ext uri="{FF2B5EF4-FFF2-40B4-BE49-F238E27FC236}">
+                <a16:creationId xmlns:a16="http://schemas.microsoft.com/office/drawing/2014/main" id="{74D37D8F-D081-4D70-AE02-00EF45571C7D}"/>
+              </a:ext>
+            </a:extLst>
+          </p:cNvPr>
+          <p:cNvPicPr>
+            <a:picLocks noChangeAspect="1"/>
+          </p:cNvPicPr>
+          <p:nvPr/>
+        </p:nvPicPr>
+        <p:blipFill>
+          <a:blip r:embed="rId2">
+            <a:extLst>
+              <a:ext uri="{28A0092B-C50C-407E-A947-70E740481C1C}">
+                <a14:useLocalDpi xmlns:a14="http://schemas.microsoft.com/office/drawing/2010/main" val="0"/>
+              </a:ext>
+            </a:extLst>
+          </a:blip>
+          <a:stretch>
+            <a:fillRect/>
+          </a:stretch>
+        </p:blipFill>
+        <p:spPr>
+          <a:xfrm>
+            <a:off x="7748952" y="997684"/>
+            <a:ext cx="1228571" cy="495238"/>
+          </a:xfrm>
+          <a:prstGeom prst="rect">
+            <a:avLst/>
+          </a:prstGeom>
+        </p:spPr>
+      </p:pic>
+      <p:pic>
+        <p:nvPicPr>
+          <p:cNvPr id="7" name="図 6">
+            <a:extLst>
+              <a:ext uri="{FF2B5EF4-FFF2-40B4-BE49-F238E27FC236}">
+                <a16:creationId xmlns:a16="http://schemas.microsoft.com/office/drawing/2014/main" id="{F87F4546-94AE-4EA3-A448-8BA88E008160}"/>
+              </a:ext>
+            </a:extLst>
+          </p:cNvPr>
+          <p:cNvPicPr>
+            <a:picLocks noChangeAspect="1"/>
+          </p:cNvPicPr>
+          <p:nvPr/>
+        </p:nvPicPr>
+        <p:blipFill>
+          <a:blip r:embed="rId3">
+            <a:extLst>
+              <a:ext uri="{28A0092B-C50C-407E-A947-70E740481C1C}">
+                <a14:useLocalDpi xmlns:a14="http://schemas.microsoft.com/office/drawing/2010/main" val="0"/>
+              </a:ext>
+            </a:extLst>
+          </a:blip>
+          <a:stretch>
+            <a:fillRect/>
+          </a:stretch>
+        </p:blipFill>
+        <p:spPr>
+          <a:xfrm>
+            <a:off x="8872734" y="969112"/>
+            <a:ext cx="1219048" cy="523810"/>
+          </a:xfrm>
+          <a:prstGeom prst="rect">
+            <a:avLst/>
+          </a:prstGeom>
+        </p:spPr>
+      </p:pic>
+      <p:sp>
+        <p:nvSpPr>
+          <p:cNvPr id="8" name="テキスト ボックス 7">
+            <a:extLst>
+              <a:ext uri="{FF2B5EF4-FFF2-40B4-BE49-F238E27FC236}">
+                <a16:creationId xmlns:a16="http://schemas.microsoft.com/office/drawing/2014/main" id="{4A637F12-D70C-492B-979F-97B8ECD0B088}"/>
+              </a:ext>
+            </a:extLst>
+          </p:cNvPr>
+          <p:cNvSpPr txBox="1"/>
+          <p:nvPr/>
+        </p:nvSpPr>
+        <p:spPr>
+          <a:xfrm>
+            <a:off x="6878806" y="704759"/>
+            <a:ext cx="3185487" cy="369332"/>
+          </a:xfrm>
+          <a:prstGeom prst="rect">
+            <a:avLst/>
+          </a:prstGeom>
+          <a:noFill/>
+        </p:spPr>
+        <p:txBody>
+          <a:bodyPr wrap="none" rtlCol="0">
+            <a:spAutoFit/>
+          </a:bodyPr>
+          <a:lstStyle/>
+          <a:p>
+            <a:r>
+              <a:rPr kumimoji="1" lang="ja-JP" altLang="en-US" dirty="0"/>
+              <a:t>スタミナあるとき／ないとき</a:t>
+            </a:r>
+          </a:p>
+        </p:txBody>
+      </p:sp>
+      <p:grpSp>
+        <p:nvGrpSpPr>
+          <p:cNvPr id="14" name="グループ化 13">
+            <a:extLst>
+              <a:ext uri="{FF2B5EF4-FFF2-40B4-BE49-F238E27FC236}">
+                <a16:creationId xmlns:a16="http://schemas.microsoft.com/office/drawing/2014/main" id="{2BCB168E-DE27-4BB8-A887-8E088B6543B6}"/>
+              </a:ext>
+            </a:extLst>
+          </p:cNvPr>
+          <p:cNvGrpSpPr/>
+          <p:nvPr/>
+        </p:nvGrpSpPr>
+        <p:grpSpPr>
+          <a:xfrm>
+            <a:off x="-351515" y="2539186"/>
+            <a:ext cx="6648264" cy="2460813"/>
+            <a:chOff x="-308653" y="1724043"/>
+            <a:chExt cx="6648264" cy="2460813"/>
+          </a:xfrm>
+        </p:grpSpPr>
+        <p:pic>
+          <p:nvPicPr>
+            <p:cNvPr id="9" name="図 8">
+              <a:extLst>
+                <a:ext uri="{FF2B5EF4-FFF2-40B4-BE49-F238E27FC236}">
+                  <a16:creationId xmlns:a16="http://schemas.microsoft.com/office/drawing/2014/main" id="{A41A6285-97E3-4F77-A08B-8CA102959998}"/>
+                </a:ext>
+              </a:extLst>
+            </p:cNvPr>
+            <p:cNvPicPr>
+              <a:picLocks noChangeAspect="1"/>
+            </p:cNvPicPr>
+            <p:nvPr/>
+          </p:nvPicPr>
+          <p:blipFill>
+            <a:blip r:embed="rId4">
+              <a:extLst>
+                <a:ext uri="{28A0092B-C50C-407E-A947-70E740481C1C}">
+                  <a14:useLocalDpi xmlns:a14="http://schemas.microsoft.com/office/drawing/2010/main" val="0"/>
+                </a:ext>
+              </a:extLst>
+            </a:blip>
+            <a:stretch>
+              <a:fillRect/>
+            </a:stretch>
+          </p:blipFill>
+          <p:spPr>
+            <a:xfrm>
+              <a:off x="-308653" y="1724045"/>
+              <a:ext cx="2460811" cy="2460811"/>
+            </a:xfrm>
+            <a:prstGeom prst="rect">
+              <a:avLst/>
+            </a:prstGeom>
+          </p:spPr>
+        </p:pic>
+        <p:pic>
+          <p:nvPicPr>
+            <p:cNvPr id="10" name="図 9">
+              <a:extLst>
+                <a:ext uri="{FF2B5EF4-FFF2-40B4-BE49-F238E27FC236}">
+                  <a16:creationId xmlns:a16="http://schemas.microsoft.com/office/drawing/2014/main" id="{4D9456EE-1A8B-42B2-B6FF-5E53AF5137A5}"/>
+                </a:ext>
+              </a:extLst>
+            </p:cNvPr>
+            <p:cNvPicPr>
+              <a:picLocks noChangeAspect="1"/>
+            </p:cNvPicPr>
+            <p:nvPr/>
+          </p:nvPicPr>
+          <p:blipFill>
+            <a:blip r:embed="rId5">
+              <a:extLst>
+                <a:ext uri="{28A0092B-C50C-407E-A947-70E740481C1C}">
+                  <a14:useLocalDpi xmlns:a14="http://schemas.microsoft.com/office/drawing/2010/main" val="0"/>
+                </a:ext>
+              </a:extLst>
+            </a:blip>
+            <a:stretch>
+              <a:fillRect/>
+            </a:stretch>
+          </p:blipFill>
+          <p:spPr>
+            <a:xfrm>
+              <a:off x="2018064" y="2177065"/>
+              <a:ext cx="1728692" cy="1554769"/>
+            </a:xfrm>
+            <a:prstGeom prst="rect">
+              <a:avLst/>
+            </a:prstGeom>
+          </p:spPr>
+        </p:pic>
+        <p:pic>
+          <p:nvPicPr>
+            <p:cNvPr id="11" name="図 10">
+              <a:extLst>
+                <a:ext uri="{FF2B5EF4-FFF2-40B4-BE49-F238E27FC236}">
+                  <a16:creationId xmlns:a16="http://schemas.microsoft.com/office/drawing/2014/main" id="{934B27B6-8070-44E0-8611-7F15255EA080}"/>
+                </a:ext>
+              </a:extLst>
+            </p:cNvPr>
+            <p:cNvPicPr>
+              <a:picLocks noChangeAspect="1"/>
+            </p:cNvPicPr>
+            <p:nvPr/>
+          </p:nvPicPr>
+          <p:blipFill>
+            <a:blip r:embed="rId4">
+              <a:extLst>
+                <a:ext uri="{28A0092B-C50C-407E-A947-70E740481C1C}">
+                  <a14:useLocalDpi xmlns:a14="http://schemas.microsoft.com/office/drawing/2010/main" val="0"/>
+                </a:ext>
+              </a:extLst>
+            </a:blip>
+            <a:stretch>
+              <a:fillRect/>
+            </a:stretch>
+          </p:blipFill>
+          <p:spPr>
+            <a:xfrm>
+              <a:off x="3878800" y="1724043"/>
+              <a:ext cx="2460811" cy="2460811"/>
+            </a:xfrm>
+            <a:prstGeom prst="rect">
+              <a:avLst/>
+            </a:prstGeom>
+          </p:spPr>
+        </p:pic>
+        <p:sp>
+          <p:nvSpPr>
+            <p:cNvPr id="12" name="矢印: 右 11">
+              <a:extLst>
+                <a:ext uri="{FF2B5EF4-FFF2-40B4-BE49-F238E27FC236}">
+                  <a16:creationId xmlns:a16="http://schemas.microsoft.com/office/drawing/2014/main" id="{C105C307-6F7B-4CFB-8DD1-574E7B37D3E8}"/>
+                </a:ext>
+              </a:extLst>
+            </p:cNvPr>
+            <p:cNvSpPr/>
+            <p:nvPr/>
+          </p:nvSpPr>
+          <p:spPr>
+            <a:xfrm>
+              <a:off x="1478869" y="2820372"/>
+              <a:ext cx="446439" cy="185163"/>
+            </a:xfrm>
+            <a:prstGeom prst="rightArrow">
+              <a:avLst/>
+            </a:prstGeom>
+          </p:spPr>
+          <p:style>
+            <a:lnRef idx="2">
+              <a:schemeClr val="accent1">
+                <a:shade val="50000"/>
+              </a:schemeClr>
+            </a:lnRef>
+            <a:fillRef idx="1">
+              <a:schemeClr val="accent1"/>
+            </a:fillRef>
+            <a:effectRef idx="0">
+              <a:schemeClr val="accent1"/>
+            </a:effectRef>
+            <a:fontRef idx="minor">
+              <a:schemeClr val="lt1"/>
+            </a:fontRef>
+          </p:style>
+          <p:txBody>
+            <a:bodyPr rtlCol="0" anchor="ctr"/>
+            <a:lstStyle/>
+            <a:p>
+              <a:pPr algn="ctr"/>
+              <a:endParaRPr kumimoji="1" lang="ja-JP" altLang="en-US"/>
+            </a:p>
+          </p:txBody>
+        </p:sp>
+        <p:sp>
+          <p:nvSpPr>
+            <p:cNvPr id="13" name="矢印: 右 12">
+              <a:extLst>
+                <a:ext uri="{FF2B5EF4-FFF2-40B4-BE49-F238E27FC236}">
+                  <a16:creationId xmlns:a16="http://schemas.microsoft.com/office/drawing/2014/main" id="{75BB0C3B-838B-4F02-A742-3CA2B1AABE64}"/>
+                </a:ext>
+              </a:extLst>
+            </p:cNvPr>
+            <p:cNvSpPr/>
+            <p:nvPr/>
+          </p:nvSpPr>
+          <p:spPr>
+            <a:xfrm>
+              <a:off x="3878800" y="2820371"/>
+              <a:ext cx="446439" cy="185163"/>
+            </a:xfrm>
+            <a:prstGeom prst="rightArrow">
+              <a:avLst/>
+            </a:prstGeom>
+          </p:spPr>
+          <p:style>
+            <a:lnRef idx="2">
+              <a:schemeClr val="accent1">
+                <a:shade val="50000"/>
+              </a:schemeClr>
+            </a:lnRef>
+            <a:fillRef idx="1">
+              <a:schemeClr val="accent1"/>
+            </a:fillRef>
+            <a:effectRef idx="0">
+              <a:schemeClr val="accent1"/>
+            </a:effectRef>
+            <a:fontRef idx="minor">
+              <a:schemeClr val="lt1"/>
+            </a:fontRef>
+          </p:style>
+          <p:txBody>
+            <a:bodyPr rtlCol="0" anchor="ctr"/>
+            <a:lstStyle/>
+            <a:p>
+              <a:pPr algn="ctr"/>
+              <a:endParaRPr kumimoji="1" lang="ja-JP" altLang="en-US"/>
+            </a:p>
+          </p:txBody>
+        </p:sp>
+      </p:grpSp>
+      <p:pic>
+        <p:nvPicPr>
+          <p:cNvPr id="16" name="図 15">
+            <a:extLst>
+              <a:ext uri="{FF2B5EF4-FFF2-40B4-BE49-F238E27FC236}">
+                <a16:creationId xmlns:a16="http://schemas.microsoft.com/office/drawing/2014/main" id="{9BB359BF-9048-4470-8F1A-333242EAC6EB}"/>
+              </a:ext>
+            </a:extLst>
+          </p:cNvPr>
+          <p:cNvPicPr>
+            <a:picLocks noChangeAspect="1"/>
+          </p:cNvPicPr>
+          <p:nvPr/>
+        </p:nvPicPr>
+        <p:blipFill>
+          <a:blip r:embed="rId4">
+            <a:extLst>
+              <a:ext uri="{28A0092B-C50C-407E-A947-70E740481C1C}">
+                <a14:useLocalDpi xmlns:a14="http://schemas.microsoft.com/office/drawing/2010/main" val="0"/>
+              </a:ext>
+            </a:extLst>
+          </a:blip>
+          <a:stretch>
+            <a:fillRect/>
+          </a:stretch>
+        </p:blipFill>
+        <p:spPr>
+          <a:xfrm>
+            <a:off x="-351516" y="4917005"/>
+            <a:ext cx="2460811" cy="2460811"/>
+          </a:xfrm>
+          <a:prstGeom prst="rect">
+            <a:avLst/>
+          </a:prstGeom>
+        </p:spPr>
+      </p:pic>
+      <p:sp>
+        <p:nvSpPr>
+          <p:cNvPr id="17" name="矢印: 右 16">
+            <a:extLst>
+              <a:ext uri="{FF2B5EF4-FFF2-40B4-BE49-F238E27FC236}">
+                <a16:creationId xmlns:a16="http://schemas.microsoft.com/office/drawing/2014/main" id="{C1C00A26-9374-4066-B532-78E88B8D4467}"/>
+              </a:ext>
+            </a:extLst>
+          </p:cNvPr>
+          <p:cNvSpPr/>
+          <p:nvPr/>
+        </p:nvSpPr>
+        <p:spPr>
+          <a:xfrm rot="19022054">
+            <a:off x="1436006" y="5886029"/>
+            <a:ext cx="446439" cy="185163"/>
+          </a:xfrm>
+          <a:prstGeom prst="rightArrow">
+            <a:avLst/>
+          </a:prstGeom>
+        </p:spPr>
+        <p:style>
+          <a:lnRef idx="2">
+            <a:schemeClr val="accent1">
+              <a:shade val="50000"/>
+            </a:schemeClr>
+          </a:lnRef>
+          <a:fillRef idx="1">
+            <a:schemeClr val="accent1"/>
+          </a:fillRef>
+          <a:effectRef idx="0">
+            <a:schemeClr val="accent1"/>
+          </a:effectRef>
+          <a:fontRef idx="minor">
+            <a:schemeClr val="lt1"/>
+          </a:fontRef>
+        </p:style>
+        <p:txBody>
+          <a:bodyPr rtlCol="0" anchor="ctr"/>
+          <a:lstStyle/>
+          <a:p>
+            <a:pPr algn="ctr"/>
+            <a:endParaRPr kumimoji="1" lang="ja-JP" altLang="en-US"/>
+          </a:p>
+        </p:txBody>
+      </p:sp>
+      <p:pic>
+        <p:nvPicPr>
+          <p:cNvPr id="19" name="図 18">
+            <a:extLst>
+              <a:ext uri="{FF2B5EF4-FFF2-40B4-BE49-F238E27FC236}">
+                <a16:creationId xmlns:a16="http://schemas.microsoft.com/office/drawing/2014/main" id="{35F55670-5347-4F60-8F96-809B40AF9C46}"/>
+              </a:ext>
+            </a:extLst>
+          </p:cNvPr>
+          <p:cNvPicPr>
+            <a:picLocks noChangeAspect="1"/>
+          </p:cNvPicPr>
+          <p:nvPr/>
+        </p:nvPicPr>
+        <p:blipFill>
+          <a:blip r:embed="rId5">
+            <a:extLst>
+              <a:ext uri="{28A0092B-C50C-407E-A947-70E740481C1C}">
+                <a14:useLocalDpi xmlns:a14="http://schemas.microsoft.com/office/drawing/2010/main" val="0"/>
+              </a:ext>
+            </a:extLst>
+          </a:blip>
+          <a:stretch>
+            <a:fillRect/>
+          </a:stretch>
+        </p:blipFill>
+        <p:spPr>
+          <a:xfrm rot="19088219">
+            <a:off x="1844421" y="4762214"/>
+            <a:ext cx="1747731" cy="1571893"/>
+          </a:xfrm>
+          <a:prstGeom prst="rect">
+            <a:avLst/>
+          </a:prstGeom>
+        </p:spPr>
+      </p:pic>
+      <p:sp>
+        <p:nvSpPr>
+          <p:cNvPr id="20" name="矢印: 右 19">
+            <a:extLst>
+              <a:ext uri="{FF2B5EF4-FFF2-40B4-BE49-F238E27FC236}">
+                <a16:creationId xmlns:a16="http://schemas.microsoft.com/office/drawing/2014/main" id="{4E9A2B1C-37B6-4F28-8C48-D433A4BF84DC}"/>
+              </a:ext>
+            </a:extLst>
+          </p:cNvPr>
+          <p:cNvSpPr/>
+          <p:nvPr/>
+        </p:nvSpPr>
+        <p:spPr>
+          <a:xfrm>
+            <a:off x="3546697" y="4935942"/>
+            <a:ext cx="446439" cy="185163"/>
+          </a:xfrm>
+          <a:prstGeom prst="rightArrow">
+            <a:avLst/>
+          </a:prstGeom>
+        </p:spPr>
+        <p:style>
+          <a:lnRef idx="2">
+            <a:schemeClr val="accent1">
+              <a:shade val="50000"/>
+            </a:schemeClr>
+          </a:lnRef>
+          <a:fillRef idx="1">
+            <a:schemeClr val="accent1"/>
+          </a:fillRef>
+          <a:effectRef idx="0">
+            <a:schemeClr val="accent1"/>
+          </a:effectRef>
+          <a:fontRef idx="minor">
+            <a:schemeClr val="lt1"/>
+          </a:fontRef>
+        </p:style>
+        <p:txBody>
+          <a:bodyPr rtlCol="0" anchor="ctr"/>
+          <a:lstStyle/>
+          <a:p>
+            <a:pPr algn="ctr"/>
+            <a:endParaRPr kumimoji="1" lang="ja-JP" altLang="en-US"/>
+          </a:p>
+        </p:txBody>
+      </p:sp>
+      <p:pic>
+        <p:nvPicPr>
+          <p:cNvPr id="22" name="図 21">
+            <a:extLst>
+              <a:ext uri="{FF2B5EF4-FFF2-40B4-BE49-F238E27FC236}">
+                <a16:creationId xmlns:a16="http://schemas.microsoft.com/office/drawing/2014/main" id="{7700265F-D4C0-4694-AAB4-563B31CA2F88}"/>
+              </a:ext>
+            </a:extLst>
+          </p:cNvPr>
+          <p:cNvPicPr>
+            <a:picLocks noChangeAspect="1"/>
+          </p:cNvPicPr>
+          <p:nvPr/>
+        </p:nvPicPr>
+        <p:blipFill>
+          <a:blip r:embed="rId6">
+            <a:extLst>
+              <a:ext uri="{28A0092B-C50C-407E-A947-70E740481C1C}">
+                <a14:useLocalDpi xmlns:a14="http://schemas.microsoft.com/office/drawing/2010/main" val="0"/>
+              </a:ext>
+            </a:extLst>
+          </a:blip>
+          <a:stretch>
+            <a:fillRect/>
+          </a:stretch>
+        </p:blipFill>
+        <p:spPr>
+          <a:xfrm>
+            <a:off x="3876897" y="4162068"/>
+            <a:ext cx="2337009" cy="2337009"/>
+          </a:xfrm>
+          <a:prstGeom prst="rect">
+            <a:avLst/>
+          </a:prstGeom>
+        </p:spPr>
+      </p:pic>
+      <p:sp>
+        <p:nvSpPr>
+          <p:cNvPr id="23" name="矢印: 右 22">
+            <a:extLst>
+              <a:ext uri="{FF2B5EF4-FFF2-40B4-BE49-F238E27FC236}">
+                <a16:creationId xmlns:a16="http://schemas.microsoft.com/office/drawing/2014/main" id="{52853AF0-F5C3-443C-9128-7EB153EF3427}"/>
+              </a:ext>
+            </a:extLst>
+          </p:cNvPr>
+          <p:cNvSpPr/>
+          <p:nvPr/>
+        </p:nvSpPr>
+        <p:spPr>
+          <a:xfrm>
+            <a:off x="6089107" y="5139650"/>
+            <a:ext cx="446439" cy="185163"/>
+          </a:xfrm>
+          <a:prstGeom prst="rightArrow">
+            <a:avLst/>
+          </a:prstGeom>
+        </p:spPr>
+        <p:style>
+          <a:lnRef idx="2">
+            <a:schemeClr val="accent1">
+              <a:shade val="50000"/>
+            </a:schemeClr>
+          </a:lnRef>
+          <a:fillRef idx="1">
+            <a:schemeClr val="accent1"/>
+          </a:fillRef>
+          <a:effectRef idx="0">
+            <a:schemeClr val="accent1"/>
+          </a:effectRef>
+          <a:fontRef idx="minor">
+            <a:schemeClr val="lt1"/>
+          </a:fontRef>
+        </p:style>
+        <p:txBody>
+          <a:bodyPr rtlCol="0" anchor="ctr"/>
+          <a:lstStyle/>
+          <a:p>
+            <a:pPr algn="ctr"/>
+            <a:endParaRPr kumimoji="1" lang="ja-JP" altLang="en-US"/>
+          </a:p>
+        </p:txBody>
+      </p:sp>
+      <p:pic>
+        <p:nvPicPr>
+          <p:cNvPr id="24" name="図 23">
+            <a:extLst>
+              <a:ext uri="{FF2B5EF4-FFF2-40B4-BE49-F238E27FC236}">
+                <a16:creationId xmlns:a16="http://schemas.microsoft.com/office/drawing/2014/main" id="{12CCC75C-CFF4-43B9-860E-504CC3C795B7}"/>
+              </a:ext>
+            </a:extLst>
+          </p:cNvPr>
+          <p:cNvPicPr>
+            <a:picLocks noChangeAspect="1"/>
+          </p:cNvPicPr>
+          <p:nvPr/>
+        </p:nvPicPr>
+        <p:blipFill>
+          <a:blip r:embed="rId4">
+            <a:extLst>
+              <a:ext uri="{28A0092B-C50C-407E-A947-70E740481C1C}">
+                <a14:useLocalDpi xmlns:a14="http://schemas.microsoft.com/office/drawing/2010/main" val="0"/>
+              </a:ext>
+            </a:extLst>
+          </a:blip>
+          <a:stretch>
+            <a:fillRect/>
+          </a:stretch>
+        </p:blipFill>
+        <p:spPr>
+          <a:xfrm>
+            <a:off x="6188648" y="4629910"/>
+            <a:ext cx="2460811" cy="2460811"/>
+          </a:xfrm>
+          <a:prstGeom prst="rect">
+            <a:avLst/>
+          </a:prstGeom>
+        </p:spPr>
+      </p:pic>
+      <p:sp>
+        <p:nvSpPr>
+          <p:cNvPr id="25" name="正方形/長方形 24">
+            <a:extLst>
+              <a:ext uri="{FF2B5EF4-FFF2-40B4-BE49-F238E27FC236}">
+                <a16:creationId xmlns:a16="http://schemas.microsoft.com/office/drawing/2014/main" id="{C2ACC039-0FBD-42BA-8B2E-0FE7DF7AEE22}"/>
+              </a:ext>
+            </a:extLst>
+          </p:cNvPr>
+          <p:cNvSpPr/>
+          <p:nvPr/>
+        </p:nvSpPr>
+        <p:spPr>
+          <a:xfrm>
+            <a:off x="6535546" y="6436897"/>
+            <a:ext cx="2097092" cy="343250"/>
+          </a:xfrm>
+          <a:prstGeom prst="rect">
+            <a:avLst/>
+          </a:prstGeom>
+          <a:solidFill>
+            <a:schemeClr val="tx1"/>
+          </a:solidFill>
+          <a:ln>
+            <a:solidFill>
+              <a:schemeClr val="tx1"/>
+            </a:solidFill>
+          </a:ln>
+        </p:spPr>
+        <p:style>
+          <a:lnRef idx="2">
+            <a:schemeClr val="accent1">
+              <a:shade val="50000"/>
+            </a:schemeClr>
+          </a:lnRef>
+          <a:fillRef idx="1">
+            <a:schemeClr val="accent1"/>
+          </a:fillRef>
+          <a:effectRef idx="0">
+            <a:schemeClr val="accent1"/>
+          </a:effectRef>
+          <a:fontRef idx="minor">
+            <a:schemeClr val="lt1"/>
+          </a:fontRef>
+        </p:style>
+        <p:txBody>
+          <a:bodyPr rtlCol="0" anchor="ctr"/>
+          <a:lstStyle/>
+          <a:p>
+            <a:pPr algn="ctr"/>
+            <a:endParaRPr kumimoji="1" lang="ja-JP" altLang="en-US"/>
+          </a:p>
+        </p:txBody>
+      </p:sp>
+    </p:spTree>
+    <p:extLst>
+      <p:ext uri="{BB962C8B-B14F-4D97-AF65-F5344CB8AC3E}">
+        <p14:creationId xmlns:p14="http://schemas.microsoft.com/office/powerpoint/2010/main" val="3283254432"/>
+      </p:ext>
+    </p:extLst>
+  </p:cSld>
+  <p:clrMapOvr>
+    <a:masterClrMapping/>
+  </p:clrMapOvr>
+</p:sld>
+</file>
+
+<file path=ppt/slides/slide3.xml><?xml version="1.0" encoding="utf-8"?>
+<p:sld xmlns:a="http://schemas.openxmlformats.org/drawingml/2006/main" xmlns:r="http://schemas.openxmlformats.org/officeDocument/2006/relationships" xmlns:p="http://schemas.openxmlformats.org/presentationml/2006/main">
+  <p:cSld>
+    <p:spTree>
+      <p:nvGrpSpPr>
+        <p:cNvPr id="1" name=""/>
+        <p:cNvGrpSpPr/>
+        <p:nvPr/>
+      </p:nvGrpSpPr>
+      <p:grpSpPr>
+        <a:xfrm>
+          <a:off x="0" y="0"/>
+          <a:ext cx="0" cy="0"/>
+          <a:chOff x="0" y="0"/>
+          <a:chExt cx="0" cy="0"/>
+        </a:xfrm>
+      </p:grpSpPr>
+      <p:sp>
+        <p:nvSpPr>
+          <p:cNvPr id="4" name="テキスト ボックス 3">
+            <a:extLst>
+              <a:ext uri="{FF2B5EF4-FFF2-40B4-BE49-F238E27FC236}">
+                <a16:creationId xmlns:a16="http://schemas.microsoft.com/office/drawing/2014/main" id="{40B13EE1-46E8-4190-A176-E9B052C35E9C}"/>
+              </a:ext>
+            </a:extLst>
+          </p:cNvPr>
+          <p:cNvSpPr txBox="1"/>
+          <p:nvPr/>
+        </p:nvSpPr>
+        <p:spPr>
+          <a:xfrm>
+            <a:off x="0" y="0"/>
+            <a:ext cx="4134465" cy="769441"/>
+          </a:xfrm>
+          <a:prstGeom prst="rect">
+            <a:avLst/>
+          </a:prstGeom>
+          <a:noFill/>
+        </p:spPr>
+        <p:txBody>
+          <a:bodyPr wrap="none" rtlCol="0">
+            <a:spAutoFit/>
+          </a:bodyPr>
+          <a:lstStyle/>
+          <a:p>
+            <a:r>
+              <a:rPr kumimoji="1" lang="ja-JP" altLang="en-US" sz="4400" dirty="0"/>
+              <a:t>ー壁ジャンプー</a:t>
+            </a:r>
+          </a:p>
+        </p:txBody>
+      </p:sp>
+      <p:sp>
+        <p:nvSpPr>
+          <p:cNvPr id="5" name="テキスト ボックス 4">
+            <a:extLst>
+              <a:ext uri="{FF2B5EF4-FFF2-40B4-BE49-F238E27FC236}">
+                <a16:creationId xmlns:a16="http://schemas.microsoft.com/office/drawing/2014/main" id="{FD421848-1DF0-40D7-B032-884FB810EA68}"/>
+              </a:ext>
+            </a:extLst>
+          </p:cNvPr>
+          <p:cNvSpPr txBox="1"/>
+          <p:nvPr/>
+        </p:nvSpPr>
+        <p:spPr>
+          <a:xfrm>
+            <a:off x="0" y="769441"/>
+            <a:ext cx="9879628" cy="646331"/>
+          </a:xfrm>
+          <a:prstGeom prst="rect">
+            <a:avLst/>
+          </a:prstGeom>
+          <a:noFill/>
+        </p:spPr>
+        <p:txBody>
+          <a:bodyPr wrap="none" rtlCol="0">
+            <a:spAutoFit/>
+          </a:bodyPr>
+          <a:lstStyle/>
+          <a:p>
+            <a:r>
+              <a:rPr lang="ja-JP" altLang="en-US" dirty="0"/>
+              <a:t>プレイヤーが壁に接触した状態でジャンプ入力を行うと、壁を蹴って反対方向へ跳び上がる。</a:t>
+            </a:r>
+            <a:endParaRPr lang="en-US" altLang="ja-JP" dirty="0"/>
+          </a:p>
+          <a:p>
+            <a:endParaRPr lang="en-US" altLang="ja-JP" dirty="0"/>
+          </a:p>
+        </p:txBody>
+      </p:sp>
+      <p:sp>
+        <p:nvSpPr>
+          <p:cNvPr id="6" name="正方形/長方形 5">
+            <a:extLst>
+              <a:ext uri="{FF2B5EF4-FFF2-40B4-BE49-F238E27FC236}">
+                <a16:creationId xmlns:a16="http://schemas.microsoft.com/office/drawing/2014/main" id="{80CB0C25-677E-4668-8F2A-611D57B10DBB}"/>
+              </a:ext>
+            </a:extLst>
+          </p:cNvPr>
+          <p:cNvSpPr/>
+          <p:nvPr/>
+        </p:nvSpPr>
+        <p:spPr>
+          <a:xfrm>
+            <a:off x="1" y="1712686"/>
+            <a:ext cx="769256" cy="5145314"/>
+          </a:xfrm>
+          <a:prstGeom prst="rect">
+            <a:avLst/>
+          </a:prstGeom>
+          <a:solidFill>
+            <a:schemeClr val="tx1"/>
+          </a:solidFill>
+          <a:ln>
+            <a:solidFill>
+              <a:schemeClr val="tx1"/>
+            </a:solidFill>
+          </a:ln>
+        </p:spPr>
+        <p:style>
+          <a:lnRef idx="2">
+            <a:schemeClr val="accent1">
+              <a:shade val="50000"/>
+            </a:schemeClr>
+          </a:lnRef>
+          <a:fillRef idx="1">
+            <a:schemeClr val="accent1"/>
+          </a:fillRef>
+          <a:effectRef idx="0">
+            <a:schemeClr val="accent1"/>
+          </a:effectRef>
+          <a:fontRef idx="minor">
+            <a:schemeClr val="lt1"/>
+          </a:fontRef>
+        </p:style>
+        <p:txBody>
+          <a:bodyPr rtlCol="0" anchor="ctr"/>
+          <a:lstStyle/>
+          <a:p>
+            <a:pPr algn="ctr"/>
+            <a:endParaRPr kumimoji="1" lang="ja-JP" altLang="en-US"/>
+          </a:p>
+        </p:txBody>
+      </p:sp>
+      <p:sp>
+        <p:nvSpPr>
+          <p:cNvPr id="9" name="テキスト ボックス 8">
+            <a:extLst>
+              <a:ext uri="{FF2B5EF4-FFF2-40B4-BE49-F238E27FC236}">
+                <a16:creationId xmlns:a16="http://schemas.microsoft.com/office/drawing/2014/main" id="{8C062F06-CEE3-4819-9898-D578CF3225BB}"/>
+              </a:ext>
+            </a:extLst>
+          </p:cNvPr>
+          <p:cNvSpPr txBox="1"/>
+          <p:nvPr/>
+        </p:nvSpPr>
+        <p:spPr>
+          <a:xfrm>
+            <a:off x="705320" y="5145314"/>
+            <a:ext cx="2723823" cy="369332"/>
+          </a:xfrm>
+          <a:prstGeom prst="rect">
+            <a:avLst/>
+          </a:prstGeom>
+          <a:noFill/>
+        </p:spPr>
+        <p:txBody>
+          <a:bodyPr wrap="none" rtlCol="0">
+            <a:spAutoFit/>
+          </a:bodyPr>
+          <a:lstStyle/>
+          <a:p>
+            <a:r>
+              <a:rPr kumimoji="1" lang="ja-JP" altLang="en-US" dirty="0"/>
+              <a:t>この状態でジャンプ入力</a:t>
+            </a:r>
+          </a:p>
+        </p:txBody>
+      </p:sp>
+      <p:sp>
+        <p:nvSpPr>
+          <p:cNvPr id="10" name="矢印: 右 9">
+            <a:extLst>
+              <a:ext uri="{FF2B5EF4-FFF2-40B4-BE49-F238E27FC236}">
+                <a16:creationId xmlns:a16="http://schemas.microsoft.com/office/drawing/2014/main" id="{B2503489-15EE-4CF9-821E-A96A40F9276A}"/>
+              </a:ext>
+            </a:extLst>
+          </p:cNvPr>
+          <p:cNvSpPr/>
+          <p:nvPr/>
+        </p:nvSpPr>
+        <p:spPr>
+          <a:xfrm>
+            <a:off x="3038443" y="3384970"/>
+            <a:ext cx="1901371" cy="1466429"/>
+          </a:xfrm>
+          <a:prstGeom prst="rightArrow">
+            <a:avLst/>
+          </a:prstGeom>
+        </p:spPr>
+        <p:style>
+          <a:lnRef idx="2">
+            <a:schemeClr val="accent1">
+              <a:shade val="50000"/>
+            </a:schemeClr>
+          </a:lnRef>
+          <a:fillRef idx="1">
+            <a:schemeClr val="accent1"/>
+          </a:fillRef>
+          <a:effectRef idx="0">
+            <a:schemeClr val="accent1"/>
+          </a:effectRef>
+          <a:fontRef idx="minor">
+            <a:schemeClr val="lt1"/>
+          </a:fontRef>
+        </p:style>
+        <p:txBody>
+          <a:bodyPr rtlCol="0" anchor="ctr"/>
+          <a:lstStyle/>
+          <a:p>
+            <a:pPr algn="ctr"/>
+            <a:endParaRPr kumimoji="1" lang="ja-JP" altLang="en-US"/>
+          </a:p>
+        </p:txBody>
+      </p:sp>
+      <p:sp>
+        <p:nvSpPr>
+          <p:cNvPr id="11" name="正方形/長方形 10">
+            <a:extLst>
+              <a:ext uri="{FF2B5EF4-FFF2-40B4-BE49-F238E27FC236}">
+                <a16:creationId xmlns:a16="http://schemas.microsoft.com/office/drawing/2014/main" id="{681BAC70-B423-44A0-9114-3914B0E03816}"/>
+              </a:ext>
+            </a:extLst>
+          </p:cNvPr>
+          <p:cNvSpPr/>
+          <p:nvPr/>
+        </p:nvSpPr>
+        <p:spPr>
+          <a:xfrm>
+            <a:off x="5218279" y="1712686"/>
+            <a:ext cx="769256" cy="5145314"/>
+          </a:xfrm>
+          <a:prstGeom prst="rect">
+            <a:avLst/>
+          </a:prstGeom>
+          <a:solidFill>
+            <a:schemeClr val="tx1"/>
+          </a:solidFill>
+          <a:ln>
+            <a:solidFill>
+              <a:schemeClr val="tx1"/>
+            </a:solidFill>
+          </a:ln>
+        </p:spPr>
+        <p:style>
+          <a:lnRef idx="2">
+            <a:schemeClr val="accent1">
+              <a:shade val="50000"/>
+            </a:schemeClr>
+          </a:lnRef>
+          <a:fillRef idx="1">
+            <a:schemeClr val="accent1"/>
+          </a:fillRef>
+          <a:effectRef idx="0">
+            <a:schemeClr val="accent1"/>
+          </a:effectRef>
+          <a:fontRef idx="minor">
+            <a:schemeClr val="lt1"/>
+          </a:fontRef>
+        </p:style>
+        <p:txBody>
+          <a:bodyPr rtlCol="0" anchor="ctr"/>
+          <a:lstStyle/>
+          <a:p>
+            <a:pPr algn="ctr"/>
+            <a:endParaRPr kumimoji="1" lang="ja-JP" altLang="en-US"/>
+          </a:p>
+        </p:txBody>
+      </p:sp>
+      <p:pic>
+        <p:nvPicPr>
+          <p:cNvPr id="15" name="図 14">
+            <a:extLst>
+              <a:ext uri="{FF2B5EF4-FFF2-40B4-BE49-F238E27FC236}">
+                <a16:creationId xmlns:a16="http://schemas.microsoft.com/office/drawing/2014/main" id="{0C1ECDC2-CB10-4DD8-A8DC-A89625E0A6D0}"/>
+              </a:ext>
+            </a:extLst>
+          </p:cNvPr>
+          <p:cNvPicPr>
+            <a:picLocks noChangeAspect="1"/>
+          </p:cNvPicPr>
+          <p:nvPr/>
+        </p:nvPicPr>
+        <p:blipFill>
+          <a:blip r:embed="rId2">
+            <a:extLst>
+              <a:ext uri="{28A0092B-C50C-407E-A947-70E740481C1C}">
+                <a14:useLocalDpi xmlns:a14="http://schemas.microsoft.com/office/drawing/2010/main" val="0"/>
+              </a:ext>
+            </a:extLst>
+          </a:blip>
+          <a:stretch>
+            <a:fillRect/>
+          </a:stretch>
+        </p:blipFill>
+        <p:spPr>
+          <a:xfrm>
+            <a:off x="6584884" y="1857828"/>
+            <a:ext cx="1849529" cy="1951471"/>
+          </a:xfrm>
+          <a:prstGeom prst="rect">
+            <a:avLst/>
+          </a:prstGeom>
+        </p:spPr>
+      </p:pic>
+      <p:pic>
+        <p:nvPicPr>
+          <p:cNvPr id="17" name="図 16">
+            <a:extLst>
+              <a:ext uri="{FF2B5EF4-FFF2-40B4-BE49-F238E27FC236}">
+                <a16:creationId xmlns:a16="http://schemas.microsoft.com/office/drawing/2014/main" id="{831FA3C7-1E1F-4CC3-93D6-47E015317E35}"/>
+              </a:ext>
+            </a:extLst>
+          </p:cNvPr>
+          <p:cNvPicPr>
+            <a:picLocks noChangeAspect="1"/>
+          </p:cNvPicPr>
+          <p:nvPr/>
+        </p:nvPicPr>
+        <p:blipFill>
+          <a:blip r:embed="rId3">
+            <a:extLst>
+              <a:ext uri="{28A0092B-C50C-407E-A947-70E740481C1C}">
+                <a14:useLocalDpi xmlns:a14="http://schemas.microsoft.com/office/drawing/2010/main" val="0"/>
+              </a:ext>
+            </a:extLst>
+          </a:blip>
+          <a:stretch>
+            <a:fillRect/>
+          </a:stretch>
+        </p:blipFill>
+        <p:spPr>
+          <a:xfrm>
+            <a:off x="-439886" y="2556084"/>
+            <a:ext cx="3124200" cy="3124200"/>
+          </a:xfrm>
+          <a:prstGeom prst="rect">
+            <a:avLst/>
+          </a:prstGeom>
+        </p:spPr>
+      </p:pic>
+    </p:spTree>
+    <p:extLst>
+      <p:ext uri="{BB962C8B-B14F-4D97-AF65-F5344CB8AC3E}">
+        <p14:creationId xmlns:p14="http://schemas.microsoft.com/office/powerpoint/2010/main" val="1369157224"/>
+      </p:ext>
+    </p:extLst>
+  </p:cSld>
+  <p:clrMapOvr>
+    <a:masterClrMapping/>
+  </p:clrMapOvr>
+</p:sld>
+</file>
+
+<file path=ppt/slides/slide4.xml><?xml version="1.0" encoding="utf-8"?>
+<p:sld xmlns:a="http://schemas.openxmlformats.org/drawingml/2006/main" xmlns:r="http://schemas.openxmlformats.org/officeDocument/2006/relationships" xmlns:p="http://schemas.openxmlformats.org/presentationml/2006/main">
+  <p:cSld>
+    <p:spTree>
+      <p:nvGrpSpPr>
+        <p:cNvPr id="1" name=""/>
+        <p:cNvGrpSpPr/>
+        <p:nvPr/>
+      </p:nvGrpSpPr>
+      <p:grpSpPr>
+        <a:xfrm>
+          <a:off x="0" y="0"/>
+          <a:ext cx="0" cy="0"/>
+          <a:chOff x="0" y="0"/>
+          <a:chExt cx="0" cy="0"/>
+        </a:xfrm>
+      </p:grpSpPr>
+      <p:sp>
+        <p:nvSpPr>
+          <p:cNvPr id="4" name="テキスト ボックス 3">
+            <a:extLst>
+              <a:ext uri="{FF2B5EF4-FFF2-40B4-BE49-F238E27FC236}">
+                <a16:creationId xmlns:a16="http://schemas.microsoft.com/office/drawing/2014/main" id="{663915C1-1EBB-4D3C-B65C-3603D7F4CE41}"/>
+              </a:ext>
+            </a:extLst>
+          </p:cNvPr>
+          <p:cNvSpPr txBox="1"/>
+          <p:nvPr/>
+        </p:nvSpPr>
+        <p:spPr>
+          <a:xfrm>
+            <a:off x="0" y="0"/>
+            <a:ext cx="4286251" cy="769441"/>
+          </a:xfrm>
+          <a:prstGeom prst="rect">
+            <a:avLst/>
+          </a:prstGeom>
+          <a:noFill/>
+        </p:spPr>
+        <p:txBody>
+          <a:bodyPr wrap="square" rtlCol="0">
+            <a:spAutoFit/>
+          </a:bodyPr>
+          <a:lstStyle/>
+          <a:p>
+            <a:r>
+              <a:rPr kumimoji="1" lang="ja-JP" altLang="en-US" sz="4400" dirty="0"/>
+              <a:t>ー死亡判定ー</a:t>
+            </a:r>
+          </a:p>
+        </p:txBody>
+      </p:sp>
+      <p:sp>
+        <p:nvSpPr>
+          <p:cNvPr id="5" name="テキスト ボックス 4">
+            <a:extLst>
+              <a:ext uri="{FF2B5EF4-FFF2-40B4-BE49-F238E27FC236}">
+                <a16:creationId xmlns:a16="http://schemas.microsoft.com/office/drawing/2014/main" id="{01EE4625-E781-4F5D-B48A-8D3A2E00C530}"/>
+              </a:ext>
+            </a:extLst>
+          </p:cNvPr>
+          <p:cNvSpPr txBox="1"/>
+          <p:nvPr/>
+        </p:nvSpPr>
+        <p:spPr>
+          <a:xfrm>
+            <a:off x="204132" y="726758"/>
+            <a:ext cx="5032147" cy="646331"/>
+          </a:xfrm>
+          <a:prstGeom prst="rect">
+            <a:avLst/>
+          </a:prstGeom>
+          <a:noFill/>
+        </p:spPr>
+        <p:txBody>
+          <a:bodyPr wrap="none" rtlCol="0">
+            <a:spAutoFit/>
+          </a:bodyPr>
+          <a:lstStyle/>
+          <a:p>
+            <a:r>
+              <a:rPr kumimoji="1" lang="ja-JP" altLang="en-US" dirty="0"/>
+              <a:t>落下死</a:t>
+            </a:r>
+            <a:r>
+              <a:rPr lang="en-US" altLang="ja-JP" dirty="0"/>
+              <a:t>	</a:t>
+            </a:r>
+            <a:r>
+              <a:rPr lang="ja-JP" altLang="en-US" dirty="0"/>
+              <a:t>　トゲ</a:t>
+            </a:r>
+            <a:endParaRPr lang="en-US" altLang="ja-JP" dirty="0"/>
+          </a:p>
+          <a:p>
+            <a:r>
+              <a:rPr kumimoji="1" lang="ja-JP" altLang="en-US" dirty="0"/>
+              <a:t>敵の攻撃　ダッシュ状態でないときの敵の接触</a:t>
+            </a:r>
+          </a:p>
+        </p:txBody>
+      </p:sp>
+      <p:sp>
+        <p:nvSpPr>
+          <p:cNvPr id="7" name="テキスト ボックス 6">
+            <a:extLst>
+              <a:ext uri="{FF2B5EF4-FFF2-40B4-BE49-F238E27FC236}">
+                <a16:creationId xmlns:a16="http://schemas.microsoft.com/office/drawing/2014/main" id="{A2A67A99-A783-4540-8159-A022FC2423BB}"/>
+              </a:ext>
+            </a:extLst>
+          </p:cNvPr>
+          <p:cNvSpPr txBox="1"/>
+          <p:nvPr/>
+        </p:nvSpPr>
+        <p:spPr>
+          <a:xfrm>
+            <a:off x="0" y="2099847"/>
+            <a:ext cx="9693679" cy="1200329"/>
+          </a:xfrm>
+          <a:prstGeom prst="rect">
+            <a:avLst/>
+          </a:prstGeom>
+          <a:noFill/>
+        </p:spPr>
+        <p:txBody>
+          <a:bodyPr wrap="none" rtlCol="0">
+            <a:spAutoFit/>
+          </a:bodyPr>
+          <a:lstStyle/>
+          <a:p>
+            <a:r>
+              <a:rPr kumimoji="1" lang="ja-JP" altLang="en-US" sz="2400" dirty="0"/>
+              <a:t>ダッシュ状態の</a:t>
+            </a:r>
+            <a:r>
+              <a:rPr kumimoji="1" lang="en-US" altLang="ja-JP" sz="2400" dirty="0"/>
+              <a:t>Player</a:t>
+            </a:r>
+            <a:r>
+              <a:rPr kumimoji="1" lang="ja-JP" altLang="en-US" sz="2400" dirty="0"/>
+              <a:t>が敵と接触することで「行動待機状態」になる</a:t>
+            </a:r>
+            <a:endParaRPr kumimoji="1" lang="en-US" altLang="ja-JP" sz="2400" dirty="0"/>
+          </a:p>
+          <a:p>
+            <a:r>
+              <a:rPr kumimoji="1" lang="ja-JP" altLang="en-US" sz="2400" dirty="0"/>
+              <a:t>この「行動待機状態」になるともう一度ダッシュが可能になる</a:t>
+            </a:r>
+            <a:endParaRPr kumimoji="1" lang="en-US" altLang="ja-JP" sz="2400" dirty="0"/>
+          </a:p>
+          <a:p>
+            <a:r>
+              <a:rPr lang="ja-JP" altLang="en-US" sz="2400" dirty="0"/>
+              <a:t>「行動待機状態」でダッシュをすることで敵が死ぬ</a:t>
+            </a:r>
+            <a:endParaRPr kumimoji="1" lang="ja-JP" altLang="en-US" sz="2400" dirty="0"/>
+          </a:p>
+        </p:txBody>
+      </p:sp>
+      <p:pic>
+        <p:nvPicPr>
+          <p:cNvPr id="8" name="図 7">
+            <a:extLst>
+              <a:ext uri="{FF2B5EF4-FFF2-40B4-BE49-F238E27FC236}">
+                <a16:creationId xmlns:a16="http://schemas.microsoft.com/office/drawing/2014/main" id="{82524A84-6215-4ACB-B1B5-5C1CF7030C3D}"/>
+              </a:ext>
+            </a:extLst>
+          </p:cNvPr>
+          <p:cNvPicPr>
+            <a:picLocks noChangeAspect="1"/>
+          </p:cNvPicPr>
+          <p:nvPr/>
+        </p:nvPicPr>
+        <p:blipFill>
+          <a:blip r:embed="rId2">
+            <a:extLst>
+              <a:ext uri="{28A0092B-C50C-407E-A947-70E740481C1C}">
+                <a14:useLocalDpi xmlns:a14="http://schemas.microsoft.com/office/drawing/2010/main" val="0"/>
+              </a:ext>
+            </a:extLst>
+          </a:blip>
+          <a:stretch>
+            <a:fillRect/>
+          </a:stretch>
+        </p:blipFill>
+        <p:spPr>
+          <a:xfrm>
+            <a:off x="1456742" y="2923658"/>
+            <a:ext cx="2720880" cy="2048662"/>
+          </a:xfrm>
+          <a:prstGeom prst="rect">
+            <a:avLst/>
+          </a:prstGeom>
+        </p:spPr>
+      </p:pic>
+      <p:pic>
+        <p:nvPicPr>
+          <p:cNvPr id="9" name="図 8">
+            <a:extLst>
+              <a:ext uri="{FF2B5EF4-FFF2-40B4-BE49-F238E27FC236}">
+                <a16:creationId xmlns:a16="http://schemas.microsoft.com/office/drawing/2014/main" id="{64EBB7A2-7005-4711-9C94-8EACC6CF336E}"/>
+              </a:ext>
+            </a:extLst>
+          </p:cNvPr>
+          <p:cNvPicPr>
+            <a:picLocks noChangeAspect="1"/>
+          </p:cNvPicPr>
+          <p:nvPr/>
+        </p:nvPicPr>
+        <p:blipFill>
+          <a:blip r:embed="rId3">
+            <a:extLst>
+              <a:ext uri="{28A0092B-C50C-407E-A947-70E740481C1C}">
+                <a14:useLocalDpi xmlns:a14="http://schemas.microsoft.com/office/drawing/2010/main" val="0"/>
+              </a:ext>
+            </a:extLst>
+          </a:blip>
+          <a:stretch>
+            <a:fillRect/>
+          </a:stretch>
+        </p:blipFill>
+        <p:spPr>
+          <a:xfrm>
+            <a:off x="592396" y="3317163"/>
+            <a:ext cx="1728692" cy="1554769"/>
+          </a:xfrm>
+          <a:prstGeom prst="rect">
+            <a:avLst/>
+          </a:prstGeom>
+        </p:spPr>
+      </p:pic>
+      <p:pic>
+        <p:nvPicPr>
+          <p:cNvPr id="10" name="図 9">
+            <a:extLst>
+              <a:ext uri="{FF2B5EF4-FFF2-40B4-BE49-F238E27FC236}">
+                <a16:creationId xmlns:a16="http://schemas.microsoft.com/office/drawing/2014/main" id="{3BF96E96-784E-4097-92CF-1B60C7AB4F8D}"/>
+              </a:ext>
+            </a:extLst>
+          </p:cNvPr>
+          <p:cNvPicPr>
+            <a:picLocks noChangeAspect="1"/>
+          </p:cNvPicPr>
+          <p:nvPr/>
+        </p:nvPicPr>
+        <p:blipFill>
+          <a:blip r:embed="rId2">
+            <a:extLst>
+              <a:ext uri="{28A0092B-C50C-407E-A947-70E740481C1C}">
+                <a14:useLocalDpi xmlns:a14="http://schemas.microsoft.com/office/drawing/2010/main" val="0"/>
+              </a:ext>
+            </a:extLst>
+          </a:blip>
+          <a:stretch>
+            <a:fillRect/>
+          </a:stretch>
+        </p:blipFill>
+        <p:spPr>
+          <a:xfrm>
+            <a:off x="4344805" y="2923658"/>
+            <a:ext cx="2720880" cy="2048662"/>
+          </a:xfrm>
+          <a:prstGeom prst="rect">
+            <a:avLst/>
+          </a:prstGeom>
+        </p:spPr>
+      </p:pic>
+      <p:pic>
+        <p:nvPicPr>
+          <p:cNvPr id="11" name="図 10">
+            <a:extLst>
+              <a:ext uri="{FF2B5EF4-FFF2-40B4-BE49-F238E27FC236}">
+                <a16:creationId xmlns:a16="http://schemas.microsoft.com/office/drawing/2014/main" id="{E435A3E7-E9FC-4AD5-8F6F-43EDDBC7C4DA}"/>
+              </a:ext>
+            </a:extLst>
+          </p:cNvPr>
+          <p:cNvPicPr>
+            <a:picLocks noChangeAspect="1"/>
+          </p:cNvPicPr>
+          <p:nvPr/>
+        </p:nvPicPr>
+        <p:blipFill>
+          <a:blip r:embed="rId4">
+            <a:extLst>
+              <a:ext uri="{28A0092B-C50C-407E-A947-70E740481C1C}">
+                <a14:useLocalDpi xmlns:a14="http://schemas.microsoft.com/office/drawing/2010/main" val="0"/>
+              </a:ext>
+            </a:extLst>
+          </a:blip>
+          <a:stretch>
+            <a:fillRect/>
+          </a:stretch>
+        </p:blipFill>
+        <p:spPr>
+          <a:xfrm>
+            <a:off x="4177622" y="2867045"/>
+            <a:ext cx="2460811" cy="2460811"/>
+          </a:xfrm>
+          <a:prstGeom prst="rect">
+            <a:avLst/>
+          </a:prstGeom>
+        </p:spPr>
+      </p:pic>
+      <p:sp>
+        <p:nvSpPr>
+          <p:cNvPr id="12" name="テキスト ボックス 11">
+            <a:extLst>
+              <a:ext uri="{FF2B5EF4-FFF2-40B4-BE49-F238E27FC236}">
+                <a16:creationId xmlns:a16="http://schemas.microsoft.com/office/drawing/2014/main" id="{AD1F8E21-7F40-42C8-B398-ADD7CC411B63}"/>
+              </a:ext>
+            </a:extLst>
+          </p:cNvPr>
+          <p:cNvSpPr txBox="1"/>
+          <p:nvPr/>
+        </p:nvSpPr>
+        <p:spPr>
+          <a:xfrm>
+            <a:off x="4618701" y="4741487"/>
+            <a:ext cx="4185761" cy="1200329"/>
+          </a:xfrm>
+          <a:prstGeom prst="rect">
+            <a:avLst/>
+          </a:prstGeom>
+          <a:noFill/>
+        </p:spPr>
+        <p:txBody>
+          <a:bodyPr wrap="none" rtlCol="0">
+            <a:spAutoFit/>
+          </a:bodyPr>
+          <a:lstStyle/>
+          <a:p>
+            <a:r>
+              <a:rPr lang="ja-JP" altLang="en-US" sz="2400" dirty="0"/>
+              <a:t>行動待機状態</a:t>
+            </a:r>
+            <a:endParaRPr lang="en-US" altLang="ja-JP" sz="2400" dirty="0"/>
+          </a:p>
+          <a:p>
+            <a:r>
+              <a:rPr kumimoji="1" lang="ja-JP" altLang="en-US" sz="2400" dirty="0"/>
+              <a:t>この状態では敵は攻撃しない</a:t>
+            </a:r>
+            <a:endParaRPr kumimoji="1" lang="en-US" altLang="ja-JP" sz="2400" dirty="0"/>
+          </a:p>
+          <a:p>
+            <a:r>
+              <a:rPr lang="en-US" altLang="ja-JP" sz="2400" dirty="0"/>
+              <a:t>Player</a:t>
+            </a:r>
+            <a:r>
+              <a:rPr lang="ja-JP" altLang="en-US" sz="2400" dirty="0"/>
+              <a:t>のダッシュが回復</a:t>
+            </a:r>
+            <a:endParaRPr kumimoji="1" lang="ja-JP" altLang="en-US" sz="2400" dirty="0"/>
+          </a:p>
+        </p:txBody>
+      </p:sp>
+      <p:pic>
+        <p:nvPicPr>
+          <p:cNvPr id="13" name="図 12">
+            <a:extLst>
+              <a:ext uri="{FF2B5EF4-FFF2-40B4-BE49-F238E27FC236}">
+                <a16:creationId xmlns:a16="http://schemas.microsoft.com/office/drawing/2014/main" id="{B550E5D0-44E5-4322-8EB6-5E831CDF1C57}"/>
+              </a:ext>
+            </a:extLst>
+          </p:cNvPr>
+          <p:cNvPicPr>
+            <a:picLocks noChangeAspect="1"/>
+          </p:cNvPicPr>
+          <p:nvPr/>
+        </p:nvPicPr>
+        <p:blipFill>
+          <a:blip r:embed="rId3">
+            <a:extLst>
+              <a:ext uri="{28A0092B-C50C-407E-A947-70E740481C1C}">
+                <a14:useLocalDpi xmlns:a14="http://schemas.microsoft.com/office/drawing/2010/main" val="0"/>
+              </a:ext>
+            </a:extLst>
+          </a:blip>
+          <a:stretch>
+            <a:fillRect/>
+          </a:stretch>
+        </p:blipFill>
+        <p:spPr>
+          <a:xfrm>
+            <a:off x="10156847" y="3170604"/>
+            <a:ext cx="1728692" cy="1554769"/>
+          </a:xfrm>
+          <a:prstGeom prst="rect">
+            <a:avLst/>
+          </a:prstGeom>
+        </p:spPr>
+      </p:pic>
+      <p:pic>
+        <p:nvPicPr>
+          <p:cNvPr id="14" name="図 13">
+            <a:extLst>
+              <a:ext uri="{FF2B5EF4-FFF2-40B4-BE49-F238E27FC236}">
+                <a16:creationId xmlns:a16="http://schemas.microsoft.com/office/drawing/2014/main" id="{94CA9B86-1EDE-49DF-B738-803C8EEAE057}"/>
+              </a:ext>
+            </a:extLst>
+          </p:cNvPr>
+          <p:cNvPicPr>
+            <a:picLocks noChangeAspect="1"/>
+          </p:cNvPicPr>
+          <p:nvPr/>
+        </p:nvPicPr>
+        <p:blipFill>
+          <a:blip r:embed="rId5">
+            <a:extLst>
+              <a:ext uri="{28A0092B-C50C-407E-A947-70E740481C1C}">
+                <a14:useLocalDpi xmlns:a14="http://schemas.microsoft.com/office/drawing/2010/main" val="0"/>
+              </a:ext>
+            </a:extLst>
+          </a:blip>
+          <a:stretch>
+            <a:fillRect/>
+          </a:stretch>
+        </p:blipFill>
+        <p:spPr>
+          <a:xfrm>
+            <a:off x="8339785" y="3225636"/>
+            <a:ext cx="1921011" cy="1499737"/>
+          </a:xfrm>
+          <a:prstGeom prst="rect">
+            <a:avLst/>
+          </a:prstGeom>
+        </p:spPr>
+      </p:pic>
+    </p:spTree>
+    <p:extLst>
+      <p:ext uri="{BB962C8B-B14F-4D97-AF65-F5344CB8AC3E}">
+        <p14:creationId xmlns:p14="http://schemas.microsoft.com/office/powerpoint/2010/main" val="2024741015"/>
+      </p:ext>
+    </p:extLst>
+  </p:cSld>
+  <p:clrMapOvr>
+    <a:masterClrMapping/>
+  </p:clrMapOvr>
+</p:sld>
+</file>
+
 <file path=ppt/theme/theme1.xml><?xml version="1.0" encoding="utf-8"?>
 <a:theme xmlns:a="http://schemas.openxmlformats.org/drawingml/2006/main" name="Office テーマ">
   <a:themeElements>

--- a/仕様書/Ninja.pptx
+++ b/仕様書/Ninja.pptx
@@ -7,8 +7,10 @@
   <p:sldIdLst>
     <p:sldId id="256" r:id="rId2"/>
     <p:sldId id="258" r:id="rId3"/>
-    <p:sldId id="259" r:id="rId4"/>
-    <p:sldId id="257" r:id="rId5"/>
+    <p:sldId id="260" r:id="rId4"/>
+    <p:sldId id="261" r:id="rId5"/>
+    <p:sldId id="259" r:id="rId6"/>
+    <p:sldId id="257" r:id="rId7"/>
   </p:sldIdLst>
   <p:sldSz cx="12192000" cy="6858000"/>
   <p:notesSz cx="6858000" cy="9144000"/>
@@ -262,7 +264,7 @@
           <a:p>
             <a:fld id="{A56489B6-1740-4A5C-B8C9-33805F9AA650}" type="datetimeFigureOut">
               <a:rPr kumimoji="1" lang="ja-JP" altLang="en-US" smtClean="0"/>
-              <a:t>2026/6/3</a:t>
+              <a:t>2026/6/5</a:t>
             </a:fld>
             <a:endParaRPr kumimoji="1" lang="ja-JP" altLang="en-US"/>
           </a:p>
@@ -492,7 +494,7 @@
           <a:p>
             <a:fld id="{A56489B6-1740-4A5C-B8C9-33805F9AA650}" type="datetimeFigureOut">
               <a:rPr kumimoji="1" lang="ja-JP" altLang="en-US" smtClean="0"/>
-              <a:t>2026/6/3</a:t>
+              <a:t>2026/6/5</a:t>
             </a:fld>
             <a:endParaRPr kumimoji="1" lang="ja-JP" altLang="en-US"/>
           </a:p>
@@ -732,7 +734,7 @@
           <a:p>
             <a:fld id="{A56489B6-1740-4A5C-B8C9-33805F9AA650}" type="datetimeFigureOut">
               <a:rPr kumimoji="1" lang="ja-JP" altLang="en-US" smtClean="0"/>
-              <a:t>2026/6/3</a:t>
+              <a:t>2026/6/5</a:t>
             </a:fld>
             <a:endParaRPr kumimoji="1" lang="ja-JP" altLang="en-US"/>
           </a:p>
@@ -962,7 +964,7 @@
           <a:p>
             <a:fld id="{A56489B6-1740-4A5C-B8C9-33805F9AA650}" type="datetimeFigureOut">
               <a:rPr kumimoji="1" lang="ja-JP" altLang="en-US" smtClean="0"/>
-              <a:t>2026/6/3</a:t>
+              <a:t>2026/6/5</a:t>
             </a:fld>
             <a:endParaRPr kumimoji="1" lang="ja-JP" altLang="en-US"/>
           </a:p>
@@ -1237,7 +1239,7 @@
           <a:p>
             <a:fld id="{A56489B6-1740-4A5C-B8C9-33805F9AA650}" type="datetimeFigureOut">
               <a:rPr kumimoji="1" lang="ja-JP" altLang="en-US" smtClean="0"/>
-              <a:t>2026/6/3</a:t>
+              <a:t>2026/6/5</a:t>
             </a:fld>
             <a:endParaRPr kumimoji="1" lang="ja-JP" altLang="en-US"/>
           </a:p>
@@ -1566,7 +1568,7 @@
           <a:p>
             <a:fld id="{A56489B6-1740-4A5C-B8C9-33805F9AA650}" type="datetimeFigureOut">
               <a:rPr kumimoji="1" lang="ja-JP" altLang="en-US" smtClean="0"/>
-              <a:t>2026/6/3</a:t>
+              <a:t>2026/6/5</a:t>
             </a:fld>
             <a:endParaRPr kumimoji="1" lang="ja-JP" altLang="en-US"/>
           </a:p>
@@ -2042,7 +2044,7 @@
           <a:p>
             <a:fld id="{A56489B6-1740-4A5C-B8C9-33805F9AA650}" type="datetimeFigureOut">
               <a:rPr kumimoji="1" lang="ja-JP" altLang="en-US" smtClean="0"/>
-              <a:t>2026/6/3</a:t>
+              <a:t>2026/6/5</a:t>
             </a:fld>
             <a:endParaRPr kumimoji="1" lang="ja-JP" altLang="en-US"/>
           </a:p>
@@ -2183,7 +2185,7 @@
           <a:p>
             <a:fld id="{A56489B6-1740-4A5C-B8C9-33805F9AA650}" type="datetimeFigureOut">
               <a:rPr kumimoji="1" lang="ja-JP" altLang="en-US" smtClean="0"/>
-              <a:t>2026/6/3</a:t>
+              <a:t>2026/6/5</a:t>
             </a:fld>
             <a:endParaRPr kumimoji="1" lang="ja-JP" altLang="en-US"/>
           </a:p>
@@ -2296,7 +2298,7 @@
           <a:p>
             <a:fld id="{A56489B6-1740-4A5C-B8C9-33805F9AA650}" type="datetimeFigureOut">
               <a:rPr kumimoji="1" lang="ja-JP" altLang="en-US" smtClean="0"/>
-              <a:t>2026/6/3</a:t>
+              <a:t>2026/6/5</a:t>
             </a:fld>
             <a:endParaRPr kumimoji="1" lang="ja-JP" altLang="en-US"/>
           </a:p>
@@ -2639,7 +2641,7 @@
           <a:p>
             <a:fld id="{A56489B6-1740-4A5C-B8C9-33805F9AA650}" type="datetimeFigureOut">
               <a:rPr kumimoji="1" lang="ja-JP" altLang="en-US" smtClean="0"/>
-              <a:t>2026/6/3</a:t>
+              <a:t>2026/6/5</a:t>
             </a:fld>
             <a:endParaRPr kumimoji="1" lang="ja-JP" altLang="en-US"/>
           </a:p>
@@ -2927,7 +2929,7 @@
           <a:p>
             <a:fld id="{A56489B6-1740-4A5C-B8C9-33805F9AA650}" type="datetimeFigureOut">
               <a:rPr kumimoji="1" lang="ja-JP" altLang="en-US" smtClean="0"/>
-              <a:t>2026/6/3</a:t>
+              <a:t>2026/6/5</a:t>
             </a:fld>
             <a:endParaRPr kumimoji="1" lang="ja-JP" altLang="en-US"/>
           </a:p>
@@ -3200,7 +3202,7 @@
           <a:p>
             <a:fld id="{A56489B6-1740-4A5C-B8C9-33805F9AA650}" type="datetimeFigureOut">
               <a:rPr kumimoji="1" lang="ja-JP" altLang="en-US" smtClean="0"/>
-              <a:t>2026/6/3</a:t>
+              <a:t>2026/6/5</a:t>
             </a:fld>
             <a:endParaRPr kumimoji="1" lang="ja-JP" altLang="en-US"/>
           </a:p>
@@ -4074,7 +4076,7 @@
         </p:nvSpPr>
         <p:spPr>
           <a:xfrm>
-            <a:off x="5824537" y="1485901"/>
+            <a:off x="5824537" y="2778379"/>
             <a:ext cx="3570208" cy="769441"/>
           </a:xfrm>
           <a:prstGeom prst="rect">
@@ -4110,7 +4112,7 @@
         </p:nvSpPr>
         <p:spPr>
           <a:xfrm>
-            <a:off x="5824537" y="2255343"/>
+            <a:off x="5824537" y="3547821"/>
             <a:ext cx="2698175" cy="523220"/>
           </a:xfrm>
           <a:prstGeom prst="rect">
@@ -4145,7 +4147,7 @@
         </p:nvSpPr>
         <p:spPr>
           <a:xfrm>
-            <a:off x="6090403" y="2778379"/>
+            <a:off x="6090403" y="4070857"/>
             <a:ext cx="4108817" cy="1200329"/>
           </a:xfrm>
           <a:prstGeom prst="rect">
@@ -4225,7 +4227,7 @@
         </p:nvSpPr>
         <p:spPr>
           <a:xfrm>
-            <a:off x="5824537" y="4079438"/>
+            <a:off x="5824537" y="5371916"/>
             <a:ext cx="1620957" cy="523220"/>
           </a:xfrm>
           <a:prstGeom prst="rect">
@@ -4265,7 +4267,7 @@
         </p:nvSpPr>
         <p:spPr>
           <a:xfrm>
-            <a:off x="6090403" y="4638853"/>
+            <a:off x="6090403" y="5931331"/>
             <a:ext cx="6146234" cy="923330"/>
           </a:xfrm>
           <a:prstGeom prst="rect">
@@ -4327,6 +4329,126 @@
             <a:r>
               <a:rPr lang="en-US" altLang="ja-JP" dirty="0"/>
               <a:t>START</a:t>
+            </a:r>
+            <a:endParaRPr kumimoji="1" lang="ja-JP" altLang="en-US" dirty="0"/>
+          </a:p>
+        </p:txBody>
+      </p:sp>
+      <p:sp>
+        <p:nvSpPr>
+          <p:cNvPr id="22" name="テキスト ボックス 21">
+            <a:extLst>
+              <a:ext uri="{FF2B5EF4-FFF2-40B4-BE49-F238E27FC236}">
+                <a16:creationId xmlns:a16="http://schemas.microsoft.com/office/drawing/2014/main" id="{89161CD5-57E6-4CE0-A9A7-49E74D6DDADE}"/>
+              </a:ext>
+            </a:extLst>
+          </p:cNvPr>
+          <p:cNvSpPr txBox="1"/>
+          <p:nvPr/>
+        </p:nvSpPr>
+        <p:spPr>
+          <a:xfrm>
+            <a:off x="5824537" y="135733"/>
+            <a:ext cx="1261884" cy="523220"/>
+          </a:xfrm>
+          <a:prstGeom prst="rect">
+            <a:avLst/>
+          </a:prstGeom>
+          <a:noFill/>
+        </p:spPr>
+        <p:txBody>
+          <a:bodyPr wrap="none" rtlCol="0">
+            <a:spAutoFit/>
+          </a:bodyPr>
+          <a:lstStyle/>
+          <a:p>
+            <a:r>
+              <a:rPr kumimoji="1" lang="ja-JP" altLang="en-US" sz="2800" dirty="0"/>
+              <a:t>・ワザ</a:t>
+            </a:r>
+          </a:p>
+        </p:txBody>
+      </p:sp>
+      <p:sp>
+        <p:nvSpPr>
+          <p:cNvPr id="23" name="テキスト ボックス 22">
+            <a:extLst>
+              <a:ext uri="{FF2B5EF4-FFF2-40B4-BE49-F238E27FC236}">
+                <a16:creationId xmlns:a16="http://schemas.microsoft.com/office/drawing/2014/main" id="{AD121BFB-A18D-4781-A16B-000DFF50B916}"/>
+              </a:ext>
+            </a:extLst>
+          </p:cNvPr>
+          <p:cNvSpPr txBox="1"/>
+          <p:nvPr/>
+        </p:nvSpPr>
+        <p:spPr>
+          <a:xfrm>
+            <a:off x="5910867" y="578829"/>
+            <a:ext cx="4057521" cy="923330"/>
+          </a:xfrm>
+          <a:prstGeom prst="rect">
+            <a:avLst/>
+          </a:prstGeom>
+          <a:noFill/>
+        </p:spPr>
+        <p:txBody>
+          <a:bodyPr wrap="none" rtlCol="0">
+            <a:spAutoFit/>
+          </a:bodyPr>
+          <a:lstStyle/>
+          <a:p>
+            <a:r>
+              <a:rPr lang="ja-JP" altLang="en-US" dirty="0"/>
+              <a:t>敵に対抗ための忍術</a:t>
+            </a:r>
+            <a:r>
+              <a:rPr lang="en-US" altLang="ja-JP" dirty="0"/>
+              <a:t>(</a:t>
+            </a:r>
+            <a:r>
+              <a:rPr lang="ja-JP" altLang="en-US" dirty="0"/>
+              <a:t>ボタンは検討中</a:t>
+            </a:r>
+            <a:r>
+              <a:rPr lang="en-US" altLang="ja-JP" dirty="0"/>
+              <a:t>)</a:t>
+            </a:r>
+          </a:p>
+          <a:p>
+            <a:r>
+              <a:rPr kumimoji="1" lang="ja-JP" altLang="en-US" dirty="0"/>
+              <a:t>キーボード</a:t>
+            </a:r>
+            <a:r>
+              <a:rPr kumimoji="1" lang="en-US" altLang="ja-JP" dirty="0"/>
+              <a:t>	</a:t>
+            </a:r>
+            <a:r>
+              <a:rPr kumimoji="1" lang="ja-JP" altLang="en-US" dirty="0"/>
+              <a:t>→</a:t>
+            </a:r>
+            <a:r>
+              <a:rPr lang="en-US" altLang="ja-JP" dirty="0"/>
+              <a:t>N</a:t>
+            </a:r>
+            <a:endParaRPr kumimoji="1" lang="en-US" altLang="ja-JP" dirty="0"/>
+          </a:p>
+          <a:p>
+            <a:r>
+              <a:rPr lang="ja-JP" altLang="en-US" dirty="0"/>
+              <a:t>コントローラー</a:t>
+            </a:r>
+            <a:r>
+              <a:rPr lang="en-US" altLang="ja-JP" dirty="0"/>
+              <a:t>	</a:t>
+            </a:r>
+            <a:r>
+              <a:rPr lang="ja-JP" altLang="en-US" dirty="0"/>
+              <a:t>→</a:t>
+            </a:r>
+            <a:r>
+              <a:rPr lang="en-US" altLang="ja-JP" dirty="0"/>
+              <a:t>Y</a:t>
             </a:r>
             <a:endParaRPr kumimoji="1" lang="ja-JP" altLang="en-US" dirty="0"/>
           </a:p>
@@ -5167,6 +5289,308 @@
           <p:cNvPr id="4" name="テキスト ボックス 3">
             <a:extLst>
               <a:ext uri="{FF2B5EF4-FFF2-40B4-BE49-F238E27FC236}">
+                <a16:creationId xmlns:a16="http://schemas.microsoft.com/office/drawing/2014/main" id="{3FEC7234-B10E-40CD-A03C-F3BB2D062744}"/>
+              </a:ext>
+            </a:extLst>
+          </p:cNvPr>
+          <p:cNvSpPr txBox="1"/>
+          <p:nvPr/>
+        </p:nvSpPr>
+        <p:spPr>
+          <a:xfrm>
+            <a:off x="0" y="0"/>
+            <a:ext cx="3005951" cy="769441"/>
+          </a:xfrm>
+          <a:prstGeom prst="rect">
+            <a:avLst/>
+          </a:prstGeom>
+          <a:noFill/>
+        </p:spPr>
+        <p:txBody>
+          <a:bodyPr wrap="none" rtlCol="0">
+            <a:spAutoFit/>
+          </a:bodyPr>
+          <a:lstStyle/>
+          <a:p>
+            <a:r>
+              <a:rPr kumimoji="1" lang="ja-JP" altLang="en-US" sz="4400" dirty="0"/>
+              <a:t>ー手裏剣ー</a:t>
+            </a:r>
+          </a:p>
+        </p:txBody>
+      </p:sp>
+      <p:sp>
+        <p:nvSpPr>
+          <p:cNvPr id="5" name="テキスト ボックス 4">
+            <a:extLst>
+              <a:ext uri="{FF2B5EF4-FFF2-40B4-BE49-F238E27FC236}">
+                <a16:creationId xmlns:a16="http://schemas.microsoft.com/office/drawing/2014/main" id="{5DDD4A7B-EC46-4FD4-AFC7-28DA10C4B49A}"/>
+              </a:ext>
+            </a:extLst>
+          </p:cNvPr>
+          <p:cNvSpPr txBox="1"/>
+          <p:nvPr/>
+        </p:nvSpPr>
+        <p:spPr>
+          <a:xfrm>
+            <a:off x="0" y="769441"/>
+            <a:ext cx="3877985" cy="646331"/>
+          </a:xfrm>
+          <a:prstGeom prst="rect">
+            <a:avLst/>
+          </a:prstGeom>
+          <a:noFill/>
+        </p:spPr>
+        <p:txBody>
+          <a:bodyPr wrap="none" rtlCol="0">
+            <a:spAutoFit/>
+          </a:bodyPr>
+          <a:lstStyle/>
+          <a:p>
+            <a:r>
+              <a:rPr kumimoji="1" lang="ja-JP" altLang="en-US" dirty="0"/>
+              <a:t>手裏剣を投げて遠くの敵を攻撃する</a:t>
+            </a:r>
+            <a:endParaRPr kumimoji="1" lang="en-US" altLang="ja-JP" dirty="0"/>
+          </a:p>
+          <a:p>
+            <a:r>
+              <a:rPr lang="ja-JP" altLang="en-US" dirty="0"/>
+              <a:t>攻撃力は低い、倒すのに</a:t>
+            </a:r>
+            <a:r>
+              <a:rPr lang="en-US" altLang="ja-JP" dirty="0"/>
+              <a:t>3</a:t>
+            </a:r>
+            <a:r>
+              <a:rPr lang="ja-JP" altLang="en-US" dirty="0"/>
+              <a:t>発かかる</a:t>
+            </a:r>
+            <a:endParaRPr lang="en-US" altLang="ja-JP" dirty="0"/>
+          </a:p>
+        </p:txBody>
+      </p:sp>
+      <p:pic>
+        <p:nvPicPr>
+          <p:cNvPr id="7" name="図 6">
+            <a:extLst>
+              <a:ext uri="{FF2B5EF4-FFF2-40B4-BE49-F238E27FC236}">
+                <a16:creationId xmlns:a16="http://schemas.microsoft.com/office/drawing/2014/main" id="{B495BC0D-57CB-4F53-B9C5-A0E99BEA0209}"/>
+              </a:ext>
+            </a:extLst>
+          </p:cNvPr>
+          <p:cNvPicPr>
+            <a:picLocks noChangeAspect="1"/>
+          </p:cNvPicPr>
+          <p:nvPr/>
+        </p:nvPicPr>
+        <p:blipFill>
+          <a:blip r:embed="rId2">
+            <a:extLst>
+              <a:ext uri="{28A0092B-C50C-407E-A947-70E740481C1C}">
+                <a14:useLocalDpi xmlns:a14="http://schemas.microsoft.com/office/drawing/2010/main" val="0"/>
+              </a:ext>
+            </a:extLst>
+          </a:blip>
+          <a:stretch>
+            <a:fillRect/>
+          </a:stretch>
+        </p:blipFill>
+        <p:spPr>
+          <a:xfrm>
+            <a:off x="-84327" y="1538882"/>
+            <a:ext cx="3174603" cy="2603175"/>
+          </a:xfrm>
+          <a:prstGeom prst="rect">
+            <a:avLst/>
+          </a:prstGeom>
+        </p:spPr>
+      </p:pic>
+      <p:sp>
+        <p:nvSpPr>
+          <p:cNvPr id="8" name="テキスト ボックス 7">
+            <a:extLst>
+              <a:ext uri="{FF2B5EF4-FFF2-40B4-BE49-F238E27FC236}">
+                <a16:creationId xmlns:a16="http://schemas.microsoft.com/office/drawing/2014/main" id="{A68E9325-B9B9-4F74-84D0-6F855E74198F}"/>
+              </a:ext>
+            </a:extLst>
+          </p:cNvPr>
+          <p:cNvSpPr txBox="1"/>
+          <p:nvPr/>
+        </p:nvSpPr>
+        <p:spPr>
+          <a:xfrm>
+            <a:off x="6315074" y="769441"/>
+            <a:ext cx="4443413" cy="923330"/>
+          </a:xfrm>
+          <a:prstGeom prst="rect">
+            <a:avLst/>
+          </a:prstGeom>
+          <a:noFill/>
+        </p:spPr>
+        <p:txBody>
+          <a:bodyPr wrap="square" rtlCol="0">
+            <a:spAutoFit/>
+          </a:bodyPr>
+          <a:lstStyle/>
+          <a:p>
+            <a:r>
+              <a:rPr kumimoji="1" lang="ja-JP" altLang="en-US" dirty="0"/>
+              <a:t>連続で投げれる？</a:t>
+            </a:r>
+            <a:endParaRPr kumimoji="1" lang="en-US" altLang="ja-JP" dirty="0"/>
+          </a:p>
+          <a:p>
+            <a:r>
+              <a:rPr lang="ja-JP" altLang="en-US" dirty="0"/>
+              <a:t>距離は自分で調整できるようにする？</a:t>
+            </a:r>
+            <a:endParaRPr lang="en-US" altLang="ja-JP" dirty="0"/>
+          </a:p>
+          <a:p>
+            <a:r>
+              <a:rPr kumimoji="1" lang="ja-JP" altLang="en-US" dirty="0"/>
+              <a:t>ボタンは？</a:t>
+            </a:r>
+          </a:p>
+        </p:txBody>
+      </p:sp>
+    </p:spTree>
+    <p:extLst>
+      <p:ext uri="{BB962C8B-B14F-4D97-AF65-F5344CB8AC3E}">
+        <p14:creationId xmlns:p14="http://schemas.microsoft.com/office/powerpoint/2010/main" val="472003385"/>
+      </p:ext>
+    </p:extLst>
+  </p:cSld>
+  <p:clrMapOvr>
+    <a:masterClrMapping/>
+  </p:clrMapOvr>
+</p:sld>
+</file>
+
+<file path=ppt/slides/slide4.xml><?xml version="1.0" encoding="utf-8"?>
+<p:sld xmlns:a="http://schemas.openxmlformats.org/drawingml/2006/main" xmlns:r="http://schemas.openxmlformats.org/officeDocument/2006/relationships" xmlns:p="http://schemas.openxmlformats.org/presentationml/2006/main">
+  <p:cSld>
+    <p:spTree>
+      <p:nvGrpSpPr>
+        <p:cNvPr id="1" name=""/>
+        <p:cNvGrpSpPr/>
+        <p:nvPr/>
+      </p:nvGrpSpPr>
+      <p:grpSpPr>
+        <a:xfrm>
+          <a:off x="0" y="0"/>
+          <a:ext cx="0" cy="0"/>
+          <a:chOff x="0" y="0"/>
+          <a:chExt cx="0" cy="0"/>
+        </a:xfrm>
+      </p:grpSpPr>
+      <p:sp>
+        <p:nvSpPr>
+          <p:cNvPr id="4" name="テキスト ボックス 3">
+            <a:extLst>
+              <a:ext uri="{FF2B5EF4-FFF2-40B4-BE49-F238E27FC236}">
+                <a16:creationId xmlns:a16="http://schemas.microsoft.com/office/drawing/2014/main" id="{AB1F47F3-02A1-45C6-B72B-8FA921C180CA}"/>
+              </a:ext>
+            </a:extLst>
+          </p:cNvPr>
+          <p:cNvSpPr txBox="1"/>
+          <p:nvPr/>
+        </p:nvSpPr>
+        <p:spPr>
+          <a:xfrm>
+            <a:off x="0" y="0"/>
+            <a:ext cx="4698722" cy="769441"/>
+          </a:xfrm>
+          <a:prstGeom prst="rect">
+            <a:avLst/>
+          </a:prstGeom>
+          <a:noFill/>
+        </p:spPr>
+        <p:txBody>
+          <a:bodyPr wrap="none" rtlCol="0">
+            <a:spAutoFit/>
+          </a:bodyPr>
+          <a:lstStyle/>
+          <a:p>
+            <a:r>
+              <a:rPr kumimoji="1" lang="ja-JP" altLang="en-US" sz="4400" dirty="0"/>
+              <a:t>ー身代わりの術ー</a:t>
+            </a:r>
+          </a:p>
+        </p:txBody>
+      </p:sp>
+      <p:sp>
+        <p:nvSpPr>
+          <p:cNvPr id="5" name="テキスト ボックス 4">
+            <a:extLst>
+              <a:ext uri="{FF2B5EF4-FFF2-40B4-BE49-F238E27FC236}">
+                <a16:creationId xmlns:a16="http://schemas.microsoft.com/office/drawing/2014/main" id="{1F407428-EDC3-441B-8D9F-F07A14138888}"/>
+              </a:ext>
+            </a:extLst>
+          </p:cNvPr>
+          <p:cNvSpPr txBox="1"/>
+          <p:nvPr/>
+        </p:nvSpPr>
+        <p:spPr>
+          <a:xfrm>
+            <a:off x="0" y="769441"/>
+            <a:ext cx="7109639" cy="369332"/>
+          </a:xfrm>
+          <a:prstGeom prst="rect">
+            <a:avLst/>
+          </a:prstGeom>
+          <a:noFill/>
+        </p:spPr>
+        <p:txBody>
+          <a:bodyPr wrap="none" rtlCol="0">
+            <a:spAutoFit/>
+          </a:bodyPr>
+          <a:lstStyle/>
+          <a:p>
+            <a:r>
+              <a:rPr kumimoji="1" lang="ja-JP" altLang="en-US" dirty="0"/>
+              <a:t>敵の攻撃に当たるとき、タイミングよくボタンを押すと回避できる</a:t>
+            </a:r>
+            <a:endParaRPr kumimoji="1" lang="en-US" altLang="ja-JP" dirty="0"/>
+          </a:p>
+        </p:txBody>
+      </p:sp>
+    </p:spTree>
+    <p:extLst>
+      <p:ext uri="{BB962C8B-B14F-4D97-AF65-F5344CB8AC3E}">
+        <p14:creationId xmlns:p14="http://schemas.microsoft.com/office/powerpoint/2010/main" val="2382912570"/>
+      </p:ext>
+    </p:extLst>
+  </p:cSld>
+  <p:clrMapOvr>
+    <a:masterClrMapping/>
+  </p:clrMapOvr>
+</p:sld>
+</file>
+
+<file path=ppt/slides/slide5.xml><?xml version="1.0" encoding="utf-8"?>
+<p:sld xmlns:a="http://schemas.openxmlformats.org/drawingml/2006/main" xmlns:r="http://schemas.openxmlformats.org/officeDocument/2006/relationships" xmlns:p="http://schemas.openxmlformats.org/presentationml/2006/main">
+  <p:cSld>
+    <p:spTree>
+      <p:nvGrpSpPr>
+        <p:cNvPr id="1" name=""/>
+        <p:cNvGrpSpPr/>
+        <p:nvPr/>
+      </p:nvGrpSpPr>
+      <p:grpSpPr>
+        <a:xfrm>
+          <a:off x="0" y="0"/>
+          <a:ext cx="0" cy="0"/>
+          <a:chOff x="0" y="0"/>
+          <a:chExt cx="0" cy="0"/>
+        </a:xfrm>
+      </p:grpSpPr>
+      <p:sp>
+        <p:nvSpPr>
+          <p:cNvPr id="4" name="テキスト ボックス 3">
+            <a:extLst>
+              <a:ext uri="{FF2B5EF4-FFF2-40B4-BE49-F238E27FC236}">
                 <a16:creationId xmlns:a16="http://schemas.microsoft.com/office/drawing/2014/main" id="{40B13EE1-46E8-4190-A176-E9B052C35E9C}"/>
               </a:ext>
             </a:extLst>
@@ -5510,7 +5934,7 @@
 </p:sld>
 </file>
 
-<file path=ppt/slides/slide4.xml><?xml version="1.0" encoding="utf-8"?>
+<file path=ppt/slides/slide6.xml><?xml version="1.0" encoding="utf-8"?>
 <p:sld xmlns:a="http://schemas.openxmlformats.org/drawingml/2006/main" xmlns:r="http://schemas.openxmlformats.org/officeDocument/2006/relationships" xmlns:p="http://schemas.openxmlformats.org/presentationml/2006/main">
   <p:cSld>
     <p:spTree>

--- a/仕様書/Ninja.pptx
+++ b/仕様書/Ninja.pptx
@@ -264,7 +264,7 @@
           <a:p>
             <a:fld id="{A56489B6-1740-4A5C-B8C9-33805F9AA650}" type="datetimeFigureOut">
               <a:rPr kumimoji="1" lang="ja-JP" altLang="en-US" smtClean="0"/>
-              <a:t>2026/6/5</a:t>
+              <a:t>2026/6/8</a:t>
             </a:fld>
             <a:endParaRPr kumimoji="1" lang="ja-JP" altLang="en-US"/>
           </a:p>
@@ -494,7 +494,7 @@
           <a:p>
             <a:fld id="{A56489B6-1740-4A5C-B8C9-33805F9AA650}" type="datetimeFigureOut">
               <a:rPr kumimoji="1" lang="ja-JP" altLang="en-US" smtClean="0"/>
-              <a:t>2026/6/5</a:t>
+              <a:t>2026/6/8</a:t>
             </a:fld>
             <a:endParaRPr kumimoji="1" lang="ja-JP" altLang="en-US"/>
           </a:p>
@@ -734,7 +734,7 @@
           <a:p>
             <a:fld id="{A56489B6-1740-4A5C-B8C9-33805F9AA650}" type="datetimeFigureOut">
               <a:rPr kumimoji="1" lang="ja-JP" altLang="en-US" smtClean="0"/>
-              <a:t>2026/6/5</a:t>
+              <a:t>2026/6/8</a:t>
             </a:fld>
             <a:endParaRPr kumimoji="1" lang="ja-JP" altLang="en-US"/>
           </a:p>
@@ -964,7 +964,7 @@
           <a:p>
             <a:fld id="{A56489B6-1740-4A5C-B8C9-33805F9AA650}" type="datetimeFigureOut">
               <a:rPr kumimoji="1" lang="ja-JP" altLang="en-US" smtClean="0"/>
-              <a:t>2026/6/5</a:t>
+              <a:t>2026/6/8</a:t>
             </a:fld>
             <a:endParaRPr kumimoji="1" lang="ja-JP" altLang="en-US"/>
           </a:p>
@@ -1239,7 +1239,7 @@
           <a:p>
             <a:fld id="{A56489B6-1740-4A5C-B8C9-33805F9AA650}" type="datetimeFigureOut">
               <a:rPr kumimoji="1" lang="ja-JP" altLang="en-US" smtClean="0"/>
-              <a:t>2026/6/5</a:t>
+              <a:t>2026/6/8</a:t>
             </a:fld>
             <a:endParaRPr kumimoji="1" lang="ja-JP" altLang="en-US"/>
           </a:p>
@@ -1568,7 +1568,7 @@
           <a:p>
             <a:fld id="{A56489B6-1740-4A5C-B8C9-33805F9AA650}" type="datetimeFigureOut">
               <a:rPr kumimoji="1" lang="ja-JP" altLang="en-US" smtClean="0"/>
-              <a:t>2026/6/5</a:t>
+              <a:t>2026/6/8</a:t>
             </a:fld>
             <a:endParaRPr kumimoji="1" lang="ja-JP" altLang="en-US"/>
           </a:p>
@@ -2044,7 +2044,7 @@
           <a:p>
             <a:fld id="{A56489B6-1740-4A5C-B8C9-33805F9AA650}" type="datetimeFigureOut">
               <a:rPr kumimoji="1" lang="ja-JP" altLang="en-US" smtClean="0"/>
-              <a:t>2026/6/5</a:t>
+              <a:t>2026/6/8</a:t>
             </a:fld>
             <a:endParaRPr kumimoji="1" lang="ja-JP" altLang="en-US"/>
           </a:p>
@@ -2185,7 +2185,7 @@
           <a:p>
             <a:fld id="{A56489B6-1740-4A5C-B8C9-33805F9AA650}" type="datetimeFigureOut">
               <a:rPr kumimoji="1" lang="ja-JP" altLang="en-US" smtClean="0"/>
-              <a:t>2026/6/5</a:t>
+              <a:t>2026/6/8</a:t>
             </a:fld>
             <a:endParaRPr kumimoji="1" lang="ja-JP" altLang="en-US"/>
           </a:p>
@@ -2298,7 +2298,7 @@
           <a:p>
             <a:fld id="{A56489B6-1740-4A5C-B8C9-33805F9AA650}" type="datetimeFigureOut">
               <a:rPr kumimoji="1" lang="ja-JP" altLang="en-US" smtClean="0"/>
-              <a:t>2026/6/5</a:t>
+              <a:t>2026/6/8</a:t>
             </a:fld>
             <a:endParaRPr kumimoji="1" lang="ja-JP" altLang="en-US"/>
           </a:p>
@@ -2641,7 +2641,7 @@
           <a:p>
             <a:fld id="{A56489B6-1740-4A5C-B8C9-33805F9AA650}" type="datetimeFigureOut">
               <a:rPr kumimoji="1" lang="ja-JP" altLang="en-US" smtClean="0"/>
-              <a:t>2026/6/5</a:t>
+              <a:t>2026/6/8</a:t>
             </a:fld>
             <a:endParaRPr kumimoji="1" lang="ja-JP" altLang="en-US"/>
           </a:p>
@@ -2929,7 +2929,7 @@
           <a:p>
             <a:fld id="{A56489B6-1740-4A5C-B8C9-33805F9AA650}" type="datetimeFigureOut">
               <a:rPr kumimoji="1" lang="ja-JP" altLang="en-US" smtClean="0"/>
-              <a:t>2026/6/5</a:t>
+              <a:t>2026/6/8</a:t>
             </a:fld>
             <a:endParaRPr kumimoji="1" lang="ja-JP" altLang="en-US"/>
           </a:p>
@@ -3202,7 +3202,7 @@
           <a:p>
             <a:fld id="{A56489B6-1740-4A5C-B8C9-33805F9AA650}" type="datetimeFigureOut">
               <a:rPr kumimoji="1" lang="ja-JP" altLang="en-US" smtClean="0"/>
-              <a:t>2026/6/5</a:t>
+              <a:t>2026/6/8</a:t>
             </a:fld>
             <a:endParaRPr kumimoji="1" lang="ja-JP" altLang="en-US"/>
           </a:p>
@@ -5356,15 +5356,7 @@
           <a:p>
             <a:r>
               <a:rPr lang="ja-JP" altLang="en-US" dirty="0"/>
-              <a:t>攻撃力は低い、倒すのに</a:t>
-            </a:r>
-            <a:r>
-              <a:rPr lang="en-US" altLang="ja-JP" dirty="0"/>
-              <a:t>3</a:t>
-            </a:r>
-            <a:r>
-              <a:rPr lang="ja-JP" altLang="en-US" dirty="0"/>
-              <a:t>発かかる</a:t>
+              <a:t>攻撃力は低い</a:t>
             </a:r>
             <a:endParaRPr lang="en-US" altLang="ja-JP" dirty="0"/>
           </a:p>
@@ -5406,55 +5398,6 @@
           </a:prstGeom>
         </p:spPr>
       </p:pic>
-      <p:sp>
-        <p:nvSpPr>
-          <p:cNvPr id="8" name="テキスト ボックス 7">
-            <a:extLst>
-              <a:ext uri="{FF2B5EF4-FFF2-40B4-BE49-F238E27FC236}">
-                <a16:creationId xmlns:a16="http://schemas.microsoft.com/office/drawing/2014/main" id="{A68E9325-B9B9-4F74-84D0-6F855E74198F}"/>
-              </a:ext>
-            </a:extLst>
-          </p:cNvPr>
-          <p:cNvSpPr txBox="1"/>
-          <p:nvPr/>
-        </p:nvSpPr>
-        <p:spPr>
-          <a:xfrm>
-            <a:off x="6315074" y="769441"/>
-            <a:ext cx="4443413" cy="923330"/>
-          </a:xfrm>
-          <a:prstGeom prst="rect">
-            <a:avLst/>
-          </a:prstGeom>
-          <a:noFill/>
-        </p:spPr>
-        <p:txBody>
-          <a:bodyPr wrap="square" rtlCol="0">
-            <a:spAutoFit/>
-          </a:bodyPr>
-          <a:lstStyle/>
-          <a:p>
-            <a:r>
-              <a:rPr kumimoji="1" lang="ja-JP" altLang="en-US" dirty="0"/>
-              <a:t>連続で投げれる？</a:t>
-            </a:r>
-            <a:endParaRPr kumimoji="1" lang="en-US" altLang="ja-JP" dirty="0"/>
-          </a:p>
-          <a:p>
-            <a:r>
-              <a:rPr lang="ja-JP" altLang="en-US" dirty="0"/>
-              <a:t>距離は自分で調整できるようにする？</a:t>
-            </a:r>
-            <a:endParaRPr lang="en-US" altLang="ja-JP" dirty="0"/>
-          </a:p>
-          <a:p>
-            <a:r>
-              <a:rPr kumimoji="1" lang="ja-JP" altLang="en-US" dirty="0"/>
-              <a:t>ボタンは？</a:t>
-            </a:r>
-          </a:p>
-        </p:txBody>
-      </p:sp>
     </p:spTree>
     <p:extLst>
       <p:ext uri="{BB962C8B-B14F-4D97-AF65-F5344CB8AC3E}">

--- a/仕様書/Ninja.pptx
+++ b/仕様書/Ninja.pptx
@@ -8,9 +8,8 @@
     <p:sldId id="256" r:id="rId2"/>
     <p:sldId id="258" r:id="rId3"/>
     <p:sldId id="260" r:id="rId4"/>
-    <p:sldId id="261" r:id="rId5"/>
-    <p:sldId id="259" r:id="rId6"/>
-    <p:sldId id="257" r:id="rId7"/>
+    <p:sldId id="259" r:id="rId5"/>
+    <p:sldId id="257" r:id="rId6"/>
   </p:sldIdLst>
   <p:sldSz cx="12192000" cy="6858000"/>
   <p:notesSz cx="6858000" cy="9144000"/>
@@ -264,7 +263,7 @@
           <a:p>
             <a:fld id="{A56489B6-1740-4A5C-B8C9-33805F9AA650}" type="datetimeFigureOut">
               <a:rPr kumimoji="1" lang="ja-JP" altLang="en-US" smtClean="0"/>
-              <a:t>2026/6/8</a:t>
+              <a:t>2026/6/11</a:t>
             </a:fld>
             <a:endParaRPr kumimoji="1" lang="ja-JP" altLang="en-US"/>
           </a:p>
@@ -494,7 +493,7 @@
           <a:p>
             <a:fld id="{A56489B6-1740-4A5C-B8C9-33805F9AA650}" type="datetimeFigureOut">
               <a:rPr kumimoji="1" lang="ja-JP" altLang="en-US" smtClean="0"/>
-              <a:t>2026/6/8</a:t>
+              <a:t>2026/6/11</a:t>
             </a:fld>
             <a:endParaRPr kumimoji="1" lang="ja-JP" altLang="en-US"/>
           </a:p>
@@ -734,7 +733,7 @@
           <a:p>
             <a:fld id="{A56489B6-1740-4A5C-B8C9-33805F9AA650}" type="datetimeFigureOut">
               <a:rPr kumimoji="1" lang="ja-JP" altLang="en-US" smtClean="0"/>
-              <a:t>2026/6/8</a:t>
+              <a:t>2026/6/11</a:t>
             </a:fld>
             <a:endParaRPr kumimoji="1" lang="ja-JP" altLang="en-US"/>
           </a:p>
@@ -964,7 +963,7 @@
           <a:p>
             <a:fld id="{A56489B6-1740-4A5C-B8C9-33805F9AA650}" type="datetimeFigureOut">
               <a:rPr kumimoji="1" lang="ja-JP" altLang="en-US" smtClean="0"/>
-              <a:t>2026/6/8</a:t>
+              <a:t>2026/6/11</a:t>
             </a:fld>
             <a:endParaRPr kumimoji="1" lang="ja-JP" altLang="en-US"/>
           </a:p>
@@ -1239,7 +1238,7 @@
           <a:p>
             <a:fld id="{A56489B6-1740-4A5C-B8C9-33805F9AA650}" type="datetimeFigureOut">
               <a:rPr kumimoji="1" lang="ja-JP" altLang="en-US" smtClean="0"/>
-              <a:t>2026/6/8</a:t>
+              <a:t>2026/6/11</a:t>
             </a:fld>
             <a:endParaRPr kumimoji="1" lang="ja-JP" altLang="en-US"/>
           </a:p>
@@ -1568,7 +1567,7 @@
           <a:p>
             <a:fld id="{A56489B6-1740-4A5C-B8C9-33805F9AA650}" type="datetimeFigureOut">
               <a:rPr kumimoji="1" lang="ja-JP" altLang="en-US" smtClean="0"/>
-              <a:t>2026/6/8</a:t>
+              <a:t>2026/6/11</a:t>
             </a:fld>
             <a:endParaRPr kumimoji="1" lang="ja-JP" altLang="en-US"/>
           </a:p>
@@ -2044,7 +2043,7 @@
           <a:p>
             <a:fld id="{A56489B6-1740-4A5C-B8C9-33805F9AA650}" type="datetimeFigureOut">
               <a:rPr kumimoji="1" lang="ja-JP" altLang="en-US" smtClean="0"/>
-              <a:t>2026/6/8</a:t>
+              <a:t>2026/6/11</a:t>
             </a:fld>
             <a:endParaRPr kumimoji="1" lang="ja-JP" altLang="en-US"/>
           </a:p>
@@ -2185,7 +2184,7 @@
           <a:p>
             <a:fld id="{A56489B6-1740-4A5C-B8C9-33805F9AA650}" type="datetimeFigureOut">
               <a:rPr kumimoji="1" lang="ja-JP" altLang="en-US" smtClean="0"/>
-              <a:t>2026/6/8</a:t>
+              <a:t>2026/6/11</a:t>
             </a:fld>
             <a:endParaRPr kumimoji="1" lang="ja-JP" altLang="en-US"/>
           </a:p>
@@ -2298,7 +2297,7 @@
           <a:p>
             <a:fld id="{A56489B6-1740-4A5C-B8C9-33805F9AA650}" type="datetimeFigureOut">
               <a:rPr kumimoji="1" lang="ja-JP" altLang="en-US" smtClean="0"/>
-              <a:t>2026/6/8</a:t>
+              <a:t>2026/6/11</a:t>
             </a:fld>
             <a:endParaRPr kumimoji="1" lang="ja-JP" altLang="en-US"/>
           </a:p>
@@ -2641,7 +2640,7 @@
           <a:p>
             <a:fld id="{A56489B6-1740-4A5C-B8C9-33805F9AA650}" type="datetimeFigureOut">
               <a:rPr kumimoji="1" lang="ja-JP" altLang="en-US" smtClean="0"/>
-              <a:t>2026/6/8</a:t>
+              <a:t>2026/6/11</a:t>
             </a:fld>
             <a:endParaRPr kumimoji="1" lang="ja-JP" altLang="en-US"/>
           </a:p>
@@ -2929,7 +2928,7 @@
           <a:p>
             <a:fld id="{A56489B6-1740-4A5C-B8C9-33805F9AA650}" type="datetimeFigureOut">
               <a:rPr kumimoji="1" lang="ja-JP" altLang="en-US" smtClean="0"/>
-              <a:t>2026/6/8</a:t>
+              <a:t>2026/6/11</a:t>
             </a:fld>
             <a:endParaRPr kumimoji="1" lang="ja-JP" altLang="en-US"/>
           </a:p>
@@ -3202,7 +3201,7 @@
           <a:p>
             <a:fld id="{A56489B6-1740-4A5C-B8C9-33805F9AA650}" type="datetimeFigureOut">
               <a:rPr kumimoji="1" lang="ja-JP" altLang="en-US" smtClean="0"/>
-              <a:t>2026/6/8</a:t>
+              <a:t>2026/6/11</a:t>
             </a:fld>
             <a:endParaRPr kumimoji="1" lang="ja-JP" altLang="en-US"/>
           </a:p>
@@ -4349,7 +4348,7 @@
         <p:spPr>
           <a:xfrm>
             <a:off x="5824537" y="135733"/>
-            <a:ext cx="1261884" cy="523220"/>
+            <a:ext cx="2618024" cy="523220"/>
           </a:xfrm>
           <a:prstGeom prst="rect">
             <a:avLst/>
@@ -4366,6 +4365,19 @@
               <a:rPr kumimoji="1" lang="ja-JP" altLang="en-US" sz="2800" dirty="0"/>
               <a:t>・ワザ</a:t>
             </a:r>
+            <a:r>
+              <a:rPr kumimoji="1" lang="en-US" altLang="ja-JP" sz="2800" dirty="0"/>
+              <a:t>(</a:t>
+            </a:r>
+            <a:r>
+              <a:rPr kumimoji="1" lang="ja-JP" altLang="en-US" sz="2800" dirty="0"/>
+              <a:t>手裏剣</a:t>
+            </a:r>
+            <a:r>
+              <a:rPr kumimoji="1" lang="en-US" altLang="ja-JP" sz="2800" dirty="0"/>
+              <a:t>)</a:t>
+            </a:r>
+            <a:endParaRPr kumimoji="1" lang="ja-JP" altLang="en-US" sz="2800" dirty="0"/>
           </a:p>
         </p:txBody>
       </p:sp>
@@ -4384,7 +4396,7 @@
         <p:spPr>
           <a:xfrm>
             <a:off x="5910867" y="578829"/>
-            <a:ext cx="4057521" cy="923330"/>
+            <a:ext cx="2435282" cy="923330"/>
           </a:xfrm>
           <a:prstGeom prst="rect">
             <a:avLst/>
@@ -4399,20 +4411,9 @@
           <a:p>
             <a:r>
               <a:rPr lang="ja-JP" altLang="en-US" dirty="0"/>
-              <a:t>敵に対抗ための忍術</a:t>
-            </a:r>
-            <a:r>
-              <a:rPr lang="en-US" altLang="ja-JP" dirty="0"/>
-              <a:t>(</a:t>
-            </a:r>
-            <a:r>
-              <a:rPr lang="ja-JP" altLang="en-US" dirty="0"/>
-              <a:t>ボタンは検討中</a:t>
-            </a:r>
-            <a:r>
-              <a:rPr lang="en-US" altLang="ja-JP" dirty="0"/>
-              <a:t>)</a:t>
-            </a:r>
+              <a:t>遠距離攻撃</a:t>
+            </a:r>
+            <a:endParaRPr lang="en-US" altLang="ja-JP" dirty="0"/>
           </a:p>
           <a:p>
             <a:r>
@@ -4449,6 +4450,127 @@
             <a:r>
               <a:rPr lang="en-US" altLang="ja-JP" dirty="0"/>
               <a:t>Y</a:t>
+            </a:r>
+            <a:endParaRPr kumimoji="1" lang="ja-JP" altLang="en-US" dirty="0"/>
+          </a:p>
+        </p:txBody>
+      </p:sp>
+      <p:sp>
+        <p:nvSpPr>
+          <p:cNvPr id="21" name="テキスト ボックス 20">
+            <a:extLst>
+              <a:ext uri="{FF2B5EF4-FFF2-40B4-BE49-F238E27FC236}">
+                <a16:creationId xmlns:a16="http://schemas.microsoft.com/office/drawing/2014/main" id="{DB19AAC8-1B3C-4CAD-9FCD-EC10CB28C6E9}"/>
+              </a:ext>
+            </a:extLst>
+          </p:cNvPr>
+          <p:cNvSpPr txBox="1"/>
+          <p:nvPr/>
+        </p:nvSpPr>
+        <p:spPr>
+          <a:xfrm>
+            <a:off x="5824537" y="1457056"/>
+            <a:ext cx="4054315" cy="523220"/>
+          </a:xfrm>
+          <a:prstGeom prst="rect">
+            <a:avLst/>
+          </a:prstGeom>
+          <a:noFill/>
+        </p:spPr>
+        <p:txBody>
+          <a:bodyPr wrap="none" rtlCol="0">
+            <a:spAutoFit/>
+          </a:bodyPr>
+          <a:lstStyle/>
+          <a:p>
+            <a:r>
+              <a:rPr kumimoji="1" lang="ja-JP" altLang="en-US" sz="2800" dirty="0"/>
+              <a:t>・ガード</a:t>
+            </a:r>
+            <a:r>
+              <a:rPr kumimoji="1" lang="en-US" altLang="ja-JP" sz="2800" dirty="0"/>
+              <a:t>(</a:t>
+            </a:r>
+            <a:r>
+              <a:rPr kumimoji="1" lang="ja-JP" altLang="en-US" sz="2800" dirty="0"/>
+              <a:t>身代わりの術</a:t>
+            </a:r>
+            <a:r>
+              <a:rPr kumimoji="1" lang="en-US" altLang="ja-JP" sz="2800" dirty="0"/>
+              <a:t>)</a:t>
+            </a:r>
+            <a:endParaRPr kumimoji="1" lang="ja-JP" altLang="en-US" sz="2800" dirty="0"/>
+          </a:p>
+        </p:txBody>
+      </p:sp>
+      <p:sp>
+        <p:nvSpPr>
+          <p:cNvPr id="24" name="テキスト ボックス 23">
+            <a:extLst>
+              <a:ext uri="{FF2B5EF4-FFF2-40B4-BE49-F238E27FC236}">
+                <a16:creationId xmlns:a16="http://schemas.microsoft.com/office/drawing/2014/main" id="{0665B061-47E4-4EA1-863F-97287E6D083E}"/>
+              </a:ext>
+            </a:extLst>
+          </p:cNvPr>
+          <p:cNvSpPr txBox="1"/>
+          <p:nvPr/>
+        </p:nvSpPr>
+        <p:spPr>
+          <a:xfrm>
+            <a:off x="5898486" y="1906874"/>
+            <a:ext cx="2573140" cy="923330"/>
+          </a:xfrm>
+          <a:prstGeom prst="rect">
+            <a:avLst/>
+          </a:prstGeom>
+          <a:noFill/>
+        </p:spPr>
+        <p:txBody>
+          <a:bodyPr wrap="none" rtlCol="0">
+            <a:spAutoFit/>
+          </a:bodyPr>
+          <a:lstStyle/>
+          <a:p>
+            <a:r>
+              <a:rPr lang="ja-JP" altLang="en-US" dirty="0"/>
+              <a:t>遠距離攻撃</a:t>
+            </a:r>
+            <a:endParaRPr lang="en-US" altLang="ja-JP" dirty="0"/>
+          </a:p>
+          <a:p>
+            <a:r>
+              <a:rPr kumimoji="1" lang="ja-JP" altLang="en-US" dirty="0"/>
+              <a:t>キーボード</a:t>
+            </a:r>
+            <a:r>
+              <a:rPr kumimoji="1" lang="en-US" altLang="ja-JP" dirty="0"/>
+              <a:t>	</a:t>
+            </a:r>
+            <a:r>
+              <a:rPr kumimoji="1" lang="ja-JP" altLang="en-US" dirty="0"/>
+              <a:t>→</a:t>
+            </a:r>
+            <a:r>
+              <a:rPr kumimoji="1" lang="en-US" altLang="ja-JP" dirty="0"/>
+              <a:t>B</a:t>
+            </a:r>
+          </a:p>
+          <a:p>
+            <a:r>
+              <a:rPr lang="ja-JP" altLang="en-US" dirty="0"/>
+              <a:t>コントローラー</a:t>
+            </a:r>
+            <a:r>
+              <a:rPr lang="en-US" altLang="ja-JP" dirty="0"/>
+              <a:t>	</a:t>
+            </a:r>
+            <a:r>
+              <a:rPr lang="ja-JP" altLang="en-US" dirty="0"/>
+              <a:t>→</a:t>
+            </a:r>
+            <a:r>
+              <a:rPr lang="en-US" altLang="ja-JP" dirty="0"/>
+              <a:t>RB</a:t>
             </a:r>
             <a:endParaRPr kumimoji="1" lang="ja-JP" altLang="en-US" dirty="0"/>
           </a:p>
@@ -5284,90 +5406,12 @@
           <a:chExt cx="0" cy="0"/>
         </a:xfrm>
       </p:grpSpPr>
-      <p:sp>
-        <p:nvSpPr>
-          <p:cNvPr id="4" name="テキスト ボックス 3">
-            <a:extLst>
-              <a:ext uri="{FF2B5EF4-FFF2-40B4-BE49-F238E27FC236}">
-                <a16:creationId xmlns:a16="http://schemas.microsoft.com/office/drawing/2014/main" id="{3FEC7234-B10E-40CD-A03C-F3BB2D062744}"/>
-              </a:ext>
-            </a:extLst>
-          </p:cNvPr>
-          <p:cNvSpPr txBox="1"/>
-          <p:nvPr/>
-        </p:nvSpPr>
-        <p:spPr>
-          <a:xfrm>
-            <a:off x="0" y="0"/>
-            <a:ext cx="3005951" cy="769441"/>
-          </a:xfrm>
-          <a:prstGeom prst="rect">
-            <a:avLst/>
-          </a:prstGeom>
-          <a:noFill/>
-        </p:spPr>
-        <p:txBody>
-          <a:bodyPr wrap="none" rtlCol="0">
-            <a:spAutoFit/>
-          </a:bodyPr>
-          <a:lstStyle/>
-          <a:p>
-            <a:r>
-              <a:rPr kumimoji="1" lang="ja-JP" altLang="en-US" sz="4400" dirty="0"/>
-              <a:t>ー手裏剣ー</a:t>
-            </a:r>
-          </a:p>
-        </p:txBody>
-      </p:sp>
-      <p:sp>
-        <p:nvSpPr>
-          <p:cNvPr id="5" name="テキスト ボックス 4">
-            <a:extLst>
-              <a:ext uri="{FF2B5EF4-FFF2-40B4-BE49-F238E27FC236}">
-                <a16:creationId xmlns:a16="http://schemas.microsoft.com/office/drawing/2014/main" id="{5DDD4A7B-EC46-4FD4-AFC7-28DA10C4B49A}"/>
-              </a:ext>
-            </a:extLst>
-          </p:cNvPr>
-          <p:cNvSpPr txBox="1"/>
-          <p:nvPr/>
-        </p:nvSpPr>
-        <p:spPr>
-          <a:xfrm>
-            <a:off x="0" y="769441"/>
-            <a:ext cx="3877985" cy="646331"/>
-          </a:xfrm>
-          <a:prstGeom prst="rect">
-            <a:avLst/>
-          </a:prstGeom>
-          <a:noFill/>
-        </p:spPr>
-        <p:txBody>
-          <a:bodyPr wrap="none" rtlCol="0">
-            <a:spAutoFit/>
-          </a:bodyPr>
-          <a:lstStyle/>
-          <a:p>
-            <a:r>
-              <a:rPr kumimoji="1" lang="ja-JP" altLang="en-US" dirty="0"/>
-              <a:t>手裏剣を投げて遠くの敵を攻撃する</a:t>
-            </a:r>
-            <a:endParaRPr kumimoji="1" lang="en-US" altLang="ja-JP" dirty="0"/>
-          </a:p>
-          <a:p>
-            <a:r>
-              <a:rPr lang="ja-JP" altLang="en-US" dirty="0"/>
-              <a:t>攻撃力は低い</a:t>
-            </a:r>
-            <a:endParaRPr lang="en-US" altLang="ja-JP" dirty="0"/>
-          </a:p>
-        </p:txBody>
-      </p:sp>
       <p:pic>
         <p:nvPicPr>
-          <p:cNvPr id="7" name="図 6">
-            <a:extLst>
-              <a:ext uri="{FF2B5EF4-FFF2-40B4-BE49-F238E27FC236}">
-                <a16:creationId xmlns:a16="http://schemas.microsoft.com/office/drawing/2014/main" id="{B495BC0D-57CB-4F53-B9C5-A0E99BEA0209}"/>
+          <p:cNvPr id="10" name="図 9">
+            <a:extLst>
+              <a:ext uri="{FF2B5EF4-FFF2-40B4-BE49-F238E27FC236}">
+                <a16:creationId xmlns:a16="http://schemas.microsoft.com/office/drawing/2014/main" id="{9DDFD24E-8583-46A7-8D84-84ECE7CDA1A7}"/>
               </a:ext>
             </a:extLst>
           </p:cNvPr>
@@ -5390,8 +5434,401 @@
         </p:blipFill>
         <p:spPr>
           <a:xfrm>
+            <a:off x="4203335" y="416096"/>
+            <a:ext cx="4315643" cy="4315643"/>
+          </a:xfrm>
+          <a:prstGeom prst="rect">
+            <a:avLst/>
+          </a:prstGeom>
+        </p:spPr>
+      </p:pic>
+      <p:sp>
+        <p:nvSpPr>
+          <p:cNvPr id="4" name="テキスト ボックス 3">
+            <a:extLst>
+              <a:ext uri="{FF2B5EF4-FFF2-40B4-BE49-F238E27FC236}">
+                <a16:creationId xmlns:a16="http://schemas.microsoft.com/office/drawing/2014/main" id="{3FEC7234-B10E-40CD-A03C-F3BB2D062744}"/>
+              </a:ext>
+            </a:extLst>
+          </p:cNvPr>
+          <p:cNvSpPr txBox="1"/>
+          <p:nvPr/>
+        </p:nvSpPr>
+        <p:spPr>
+          <a:xfrm>
+            <a:off x="0" y="0"/>
+            <a:ext cx="3005951" cy="769441"/>
+          </a:xfrm>
+          <a:prstGeom prst="rect">
+            <a:avLst/>
+          </a:prstGeom>
+          <a:noFill/>
+        </p:spPr>
+        <p:txBody>
+          <a:bodyPr wrap="none" rtlCol="0">
+            <a:spAutoFit/>
+          </a:bodyPr>
+          <a:lstStyle/>
+          <a:p>
+            <a:r>
+              <a:rPr kumimoji="1" lang="ja-JP" altLang="en-US" sz="4400" dirty="0"/>
+              <a:t>ー手裏剣ー</a:t>
+            </a:r>
+          </a:p>
+        </p:txBody>
+      </p:sp>
+      <p:sp>
+        <p:nvSpPr>
+          <p:cNvPr id="5" name="テキスト ボックス 4">
+            <a:extLst>
+              <a:ext uri="{FF2B5EF4-FFF2-40B4-BE49-F238E27FC236}">
+                <a16:creationId xmlns:a16="http://schemas.microsoft.com/office/drawing/2014/main" id="{5DDD4A7B-EC46-4FD4-AFC7-28DA10C4B49A}"/>
+              </a:ext>
+            </a:extLst>
+          </p:cNvPr>
+          <p:cNvSpPr txBox="1"/>
+          <p:nvPr/>
+        </p:nvSpPr>
+        <p:spPr>
+          <a:xfrm>
+            <a:off x="0" y="769441"/>
+            <a:ext cx="3877985" cy="646331"/>
+          </a:xfrm>
+          <a:prstGeom prst="rect">
+            <a:avLst/>
+          </a:prstGeom>
+          <a:noFill/>
+        </p:spPr>
+        <p:txBody>
+          <a:bodyPr wrap="none" rtlCol="0">
+            <a:spAutoFit/>
+          </a:bodyPr>
+          <a:lstStyle/>
+          <a:p>
+            <a:r>
+              <a:rPr kumimoji="1" lang="ja-JP" altLang="en-US" dirty="0"/>
+              <a:t>手裏剣を投げて遠くの敵を攻撃する</a:t>
+            </a:r>
+            <a:endParaRPr kumimoji="1" lang="en-US" altLang="ja-JP" dirty="0"/>
+          </a:p>
+          <a:p>
+            <a:r>
+              <a:rPr lang="ja-JP" altLang="en-US" dirty="0"/>
+              <a:t>攻撃力は低い</a:t>
+            </a:r>
+            <a:endParaRPr lang="en-US" altLang="ja-JP" dirty="0"/>
+          </a:p>
+        </p:txBody>
+      </p:sp>
+      <p:pic>
+        <p:nvPicPr>
+          <p:cNvPr id="7" name="図 6">
+            <a:extLst>
+              <a:ext uri="{FF2B5EF4-FFF2-40B4-BE49-F238E27FC236}">
+                <a16:creationId xmlns:a16="http://schemas.microsoft.com/office/drawing/2014/main" id="{B495BC0D-57CB-4F53-B9C5-A0E99BEA0209}"/>
+              </a:ext>
+            </a:extLst>
+          </p:cNvPr>
+          <p:cNvPicPr>
+            <a:picLocks noChangeAspect="1"/>
+          </p:cNvPicPr>
+          <p:nvPr/>
+        </p:nvPicPr>
+        <p:blipFill>
+          <a:blip r:embed="rId3">
+            <a:extLst>
+              <a:ext uri="{28A0092B-C50C-407E-A947-70E740481C1C}">
+                <a14:useLocalDpi xmlns:a14="http://schemas.microsoft.com/office/drawing/2010/main" val="0"/>
+              </a:ext>
+            </a:extLst>
+          </a:blip>
+          <a:stretch>
+            <a:fillRect/>
+          </a:stretch>
+        </p:blipFill>
+        <p:spPr>
+          <a:xfrm>
             <a:off x="-84327" y="1538882"/>
             <a:ext cx="3174603" cy="2603175"/>
+          </a:xfrm>
+          <a:prstGeom prst="rect">
+            <a:avLst/>
+          </a:prstGeom>
+        </p:spPr>
+      </p:pic>
+      <p:sp>
+        <p:nvSpPr>
+          <p:cNvPr id="6" name="テキスト ボックス 5">
+            <a:extLst>
+              <a:ext uri="{FF2B5EF4-FFF2-40B4-BE49-F238E27FC236}">
+                <a16:creationId xmlns:a16="http://schemas.microsoft.com/office/drawing/2014/main" id="{F4DB8799-3ACE-43C4-857D-F3951D29CE9B}"/>
+              </a:ext>
+            </a:extLst>
+          </p:cNvPr>
+          <p:cNvSpPr txBox="1"/>
+          <p:nvPr/>
+        </p:nvSpPr>
+        <p:spPr>
+          <a:xfrm>
+            <a:off x="5181600" y="0"/>
+            <a:ext cx="4698722" cy="769441"/>
+          </a:xfrm>
+          <a:prstGeom prst="rect">
+            <a:avLst/>
+          </a:prstGeom>
+          <a:noFill/>
+        </p:spPr>
+        <p:txBody>
+          <a:bodyPr wrap="none" rtlCol="0">
+            <a:spAutoFit/>
+          </a:bodyPr>
+          <a:lstStyle/>
+          <a:p>
+            <a:r>
+              <a:rPr kumimoji="1" lang="ja-JP" altLang="en-US" sz="4400" dirty="0"/>
+              <a:t>ー身代わりの術ー</a:t>
+            </a:r>
+          </a:p>
+        </p:txBody>
+      </p:sp>
+      <p:sp>
+        <p:nvSpPr>
+          <p:cNvPr id="8" name="テキスト ボックス 7">
+            <a:extLst>
+              <a:ext uri="{FF2B5EF4-FFF2-40B4-BE49-F238E27FC236}">
+                <a16:creationId xmlns:a16="http://schemas.microsoft.com/office/drawing/2014/main" id="{8FE236E7-A9E9-4CE9-9295-5ACC3C98BDBF}"/>
+              </a:ext>
+            </a:extLst>
+          </p:cNvPr>
+          <p:cNvSpPr txBox="1"/>
+          <p:nvPr/>
+        </p:nvSpPr>
+        <p:spPr>
+          <a:xfrm>
+            <a:off x="5181600" y="769441"/>
+            <a:ext cx="7109639" cy="369332"/>
+          </a:xfrm>
+          <a:prstGeom prst="rect">
+            <a:avLst/>
+          </a:prstGeom>
+          <a:noFill/>
+        </p:spPr>
+        <p:txBody>
+          <a:bodyPr wrap="none" rtlCol="0">
+            <a:spAutoFit/>
+          </a:bodyPr>
+          <a:lstStyle/>
+          <a:p>
+            <a:r>
+              <a:rPr kumimoji="1" lang="ja-JP" altLang="en-US" dirty="0"/>
+              <a:t>敵の攻撃に当たるとき、タイミングよくボタンを押すと回避できる</a:t>
+            </a:r>
+            <a:endParaRPr kumimoji="1" lang="en-US" altLang="ja-JP" dirty="0"/>
+          </a:p>
+        </p:txBody>
+      </p:sp>
+      <p:pic>
+        <p:nvPicPr>
+          <p:cNvPr id="3" name="図 2">
+            <a:extLst>
+              <a:ext uri="{FF2B5EF4-FFF2-40B4-BE49-F238E27FC236}">
+                <a16:creationId xmlns:a16="http://schemas.microsoft.com/office/drawing/2014/main" id="{F87A2027-4862-45B4-BC33-D0B8D1D9DBBA}"/>
+              </a:ext>
+            </a:extLst>
+          </p:cNvPr>
+          <p:cNvPicPr>
+            <a:picLocks noChangeAspect="1"/>
+          </p:cNvPicPr>
+          <p:nvPr/>
+        </p:nvPicPr>
+        <p:blipFill>
+          <a:blip r:embed="rId4">
+            <a:extLst>
+              <a:ext uri="{28A0092B-C50C-407E-A947-70E740481C1C}">
+                <a14:useLocalDpi xmlns:a14="http://schemas.microsoft.com/office/drawing/2010/main" val="0"/>
+              </a:ext>
+            </a:extLst>
+          </a:blip>
+          <a:stretch>
+            <a:fillRect/>
+          </a:stretch>
+        </p:blipFill>
+        <p:spPr>
+          <a:xfrm>
+            <a:off x="5151096" y="4497320"/>
+            <a:ext cx="2282182" cy="2438037"/>
+          </a:xfrm>
+          <a:prstGeom prst="rect">
+            <a:avLst/>
+          </a:prstGeom>
+        </p:spPr>
+      </p:pic>
+      <p:sp>
+        <p:nvSpPr>
+          <p:cNvPr id="9" name="正方形/長方形 8">
+            <a:extLst>
+              <a:ext uri="{FF2B5EF4-FFF2-40B4-BE49-F238E27FC236}">
+                <a16:creationId xmlns:a16="http://schemas.microsoft.com/office/drawing/2014/main" id="{EA6F6158-AC87-47C6-9DA1-21E576A29E2C}"/>
+              </a:ext>
+            </a:extLst>
+          </p:cNvPr>
+          <p:cNvSpPr/>
+          <p:nvPr/>
+        </p:nvSpPr>
+        <p:spPr>
+          <a:xfrm>
+            <a:off x="6292187" y="2518290"/>
+            <a:ext cx="4177760" cy="244250"/>
+          </a:xfrm>
+          <a:prstGeom prst="rect">
+            <a:avLst/>
+          </a:prstGeom>
+          <a:solidFill>
+            <a:srgbClr val="C00000">
+              <a:alpha val="70000"/>
+            </a:srgbClr>
+          </a:solidFill>
+          <a:ln>
+            <a:noFill/>
+          </a:ln>
+        </p:spPr>
+        <p:style>
+          <a:lnRef idx="2">
+            <a:schemeClr val="accent1">
+              <a:shade val="50000"/>
+            </a:schemeClr>
+          </a:lnRef>
+          <a:fillRef idx="1">
+            <a:schemeClr val="accent1"/>
+          </a:fillRef>
+          <a:effectRef idx="0">
+            <a:schemeClr val="accent1"/>
+          </a:effectRef>
+          <a:fontRef idx="minor">
+            <a:schemeClr val="lt1"/>
+          </a:fontRef>
+        </p:style>
+        <p:txBody>
+          <a:bodyPr rtlCol="0" anchor="ctr"/>
+          <a:lstStyle/>
+          <a:p>
+            <a:pPr algn="ctr"/>
+            <a:endParaRPr kumimoji="1" lang="ja-JP" altLang="en-US"/>
+          </a:p>
+        </p:txBody>
+      </p:sp>
+      <p:pic>
+        <p:nvPicPr>
+          <p:cNvPr id="11" name="図 10">
+            <a:extLst>
+              <a:ext uri="{FF2B5EF4-FFF2-40B4-BE49-F238E27FC236}">
+                <a16:creationId xmlns:a16="http://schemas.microsoft.com/office/drawing/2014/main" id="{2299AF6C-45DC-43EF-8F4A-7947B647737B}"/>
+              </a:ext>
+            </a:extLst>
+          </p:cNvPr>
+          <p:cNvPicPr>
+            <a:picLocks noChangeAspect="1"/>
+          </p:cNvPicPr>
+          <p:nvPr/>
+        </p:nvPicPr>
+        <p:blipFill>
+          <a:blip r:embed="rId5">
+            <a:extLst>
+              <a:ext uri="{28A0092B-C50C-407E-A947-70E740481C1C}">
+                <a14:useLocalDpi xmlns:a14="http://schemas.microsoft.com/office/drawing/2010/main" val="0"/>
+              </a:ext>
+            </a:extLst>
+          </a:blip>
+          <a:stretch>
+            <a:fillRect/>
+          </a:stretch>
+        </p:blipFill>
+        <p:spPr>
+          <a:xfrm>
+            <a:off x="9372671" y="1629572"/>
+            <a:ext cx="1950969" cy="1724863"/>
+          </a:xfrm>
+          <a:prstGeom prst="rect">
+            <a:avLst/>
+          </a:prstGeom>
+        </p:spPr>
+      </p:pic>
+      <p:sp>
+        <p:nvSpPr>
+          <p:cNvPr id="12" name="矢印: 下 11">
+            <a:extLst>
+              <a:ext uri="{FF2B5EF4-FFF2-40B4-BE49-F238E27FC236}">
+                <a16:creationId xmlns:a16="http://schemas.microsoft.com/office/drawing/2014/main" id="{FA90FD8E-EAB1-4461-B9C7-EBA6DBD17A85}"/>
+              </a:ext>
+            </a:extLst>
+          </p:cNvPr>
+          <p:cNvSpPr/>
+          <p:nvPr/>
+        </p:nvSpPr>
+        <p:spPr>
+          <a:xfrm>
+            <a:off x="7853082" y="3541059"/>
+            <a:ext cx="1389530" cy="860612"/>
+          </a:xfrm>
+          <a:prstGeom prst="downArrow">
+            <a:avLst/>
+          </a:prstGeom>
+        </p:spPr>
+        <p:style>
+          <a:lnRef idx="2">
+            <a:schemeClr val="accent1">
+              <a:shade val="50000"/>
+            </a:schemeClr>
+          </a:lnRef>
+          <a:fillRef idx="1">
+            <a:schemeClr val="accent1"/>
+          </a:fillRef>
+          <a:effectRef idx="0">
+            <a:schemeClr val="accent1"/>
+          </a:effectRef>
+          <a:fontRef idx="minor">
+            <a:schemeClr val="lt1"/>
+          </a:fontRef>
+        </p:style>
+        <p:txBody>
+          <a:bodyPr rtlCol="0" anchor="ctr"/>
+          <a:lstStyle/>
+          <a:p>
+            <a:pPr algn="ctr"/>
+            <a:endParaRPr kumimoji="1" lang="ja-JP" altLang="en-US"/>
+          </a:p>
+        </p:txBody>
+      </p:sp>
+      <p:pic>
+        <p:nvPicPr>
+          <p:cNvPr id="13" name="図 12">
+            <a:extLst>
+              <a:ext uri="{FF2B5EF4-FFF2-40B4-BE49-F238E27FC236}">
+                <a16:creationId xmlns:a16="http://schemas.microsoft.com/office/drawing/2014/main" id="{56B4ED2E-C776-4391-A2EA-0C1BD39AE147}"/>
+              </a:ext>
+            </a:extLst>
+          </p:cNvPr>
+          <p:cNvPicPr>
+            <a:picLocks noChangeAspect="1"/>
+          </p:cNvPicPr>
+          <p:nvPr/>
+        </p:nvPicPr>
+        <p:blipFill>
+          <a:blip r:embed="rId6">
+            <a:extLst>
+              <a:ext uri="{28A0092B-C50C-407E-A947-70E740481C1C}">
+                <a14:useLocalDpi xmlns:a14="http://schemas.microsoft.com/office/drawing/2010/main" val="0"/>
+              </a:ext>
+            </a:extLst>
+          </a:blip>
+          <a:stretch>
+            <a:fillRect/>
+          </a:stretch>
+        </p:blipFill>
+        <p:spPr>
+          <a:xfrm flipH="1">
+            <a:off x="9494462" y="5040702"/>
+            <a:ext cx="1950969" cy="1817298"/>
           </a:xfrm>
           <a:prstGeom prst="rect">
             <a:avLst/>
@@ -5433,7 +5870,7 @@
           <p:cNvPr id="4" name="テキスト ボックス 3">
             <a:extLst>
               <a:ext uri="{FF2B5EF4-FFF2-40B4-BE49-F238E27FC236}">
-                <a16:creationId xmlns:a16="http://schemas.microsoft.com/office/drawing/2014/main" id="{AB1F47F3-02A1-45C6-B72B-8FA921C180CA}"/>
+                <a16:creationId xmlns:a16="http://schemas.microsoft.com/office/drawing/2014/main" id="{40B13EE1-46E8-4190-A176-E9B052C35E9C}"/>
               </a:ext>
             </a:extLst>
           </p:cNvPr>
@@ -5443,7 +5880,7 @@
         <p:spPr>
           <a:xfrm>
             <a:off x="0" y="0"/>
-            <a:ext cx="4698722" cy="769441"/>
+            <a:ext cx="4134465" cy="769441"/>
           </a:xfrm>
           <a:prstGeom prst="rect">
             <a:avLst/>
@@ -5458,7 +5895,7 @@
           <a:p>
             <a:r>
               <a:rPr kumimoji="1" lang="ja-JP" altLang="en-US" sz="4400" dirty="0"/>
-              <a:t>ー身代わりの術ー</a:t>
+              <a:t>ー壁ジャンプー</a:t>
             </a:r>
           </a:p>
         </p:txBody>
@@ -5468,7 +5905,7 @@
           <p:cNvPr id="5" name="テキスト ボックス 4">
             <a:extLst>
               <a:ext uri="{FF2B5EF4-FFF2-40B4-BE49-F238E27FC236}">
-                <a16:creationId xmlns:a16="http://schemas.microsoft.com/office/drawing/2014/main" id="{1F407428-EDC3-441B-8D9F-F07A14138888}"/>
+                <a16:creationId xmlns:a16="http://schemas.microsoft.com/office/drawing/2014/main" id="{FD421848-1DF0-40D7-B032-884FB810EA68}"/>
               </a:ext>
             </a:extLst>
           </p:cNvPr>
@@ -5478,7 +5915,7 @@
         <p:spPr>
           <a:xfrm>
             <a:off x="0" y="769441"/>
-            <a:ext cx="7109639" cy="369332"/>
+            <a:ext cx="9879628" cy="646331"/>
           </a:xfrm>
           <a:prstGeom prst="rect">
             <a:avLst/>
@@ -5492,17 +5929,281 @@
           <a:lstStyle/>
           <a:p>
             <a:r>
+              <a:rPr lang="ja-JP" altLang="en-US" dirty="0"/>
+              <a:t>プレイヤーが壁に接触した状態でジャンプ入力を行うと、壁を蹴って反対方向へ跳び上がる。</a:t>
+            </a:r>
+            <a:endParaRPr lang="en-US" altLang="ja-JP" dirty="0"/>
+          </a:p>
+          <a:p>
+            <a:endParaRPr lang="en-US" altLang="ja-JP" dirty="0"/>
+          </a:p>
+        </p:txBody>
+      </p:sp>
+      <p:sp>
+        <p:nvSpPr>
+          <p:cNvPr id="6" name="正方形/長方形 5">
+            <a:extLst>
+              <a:ext uri="{FF2B5EF4-FFF2-40B4-BE49-F238E27FC236}">
+                <a16:creationId xmlns:a16="http://schemas.microsoft.com/office/drawing/2014/main" id="{80CB0C25-677E-4668-8F2A-611D57B10DBB}"/>
+              </a:ext>
+            </a:extLst>
+          </p:cNvPr>
+          <p:cNvSpPr/>
+          <p:nvPr/>
+        </p:nvSpPr>
+        <p:spPr>
+          <a:xfrm>
+            <a:off x="1" y="1712686"/>
+            <a:ext cx="769256" cy="5145314"/>
+          </a:xfrm>
+          <a:prstGeom prst="rect">
+            <a:avLst/>
+          </a:prstGeom>
+          <a:solidFill>
+            <a:schemeClr val="tx1"/>
+          </a:solidFill>
+          <a:ln>
+            <a:solidFill>
+              <a:schemeClr val="tx1"/>
+            </a:solidFill>
+          </a:ln>
+        </p:spPr>
+        <p:style>
+          <a:lnRef idx="2">
+            <a:schemeClr val="accent1">
+              <a:shade val="50000"/>
+            </a:schemeClr>
+          </a:lnRef>
+          <a:fillRef idx="1">
+            <a:schemeClr val="accent1"/>
+          </a:fillRef>
+          <a:effectRef idx="0">
+            <a:schemeClr val="accent1"/>
+          </a:effectRef>
+          <a:fontRef idx="minor">
+            <a:schemeClr val="lt1"/>
+          </a:fontRef>
+        </p:style>
+        <p:txBody>
+          <a:bodyPr rtlCol="0" anchor="ctr"/>
+          <a:lstStyle/>
+          <a:p>
+            <a:pPr algn="ctr"/>
+            <a:endParaRPr kumimoji="1" lang="ja-JP" altLang="en-US"/>
+          </a:p>
+        </p:txBody>
+      </p:sp>
+      <p:sp>
+        <p:nvSpPr>
+          <p:cNvPr id="9" name="テキスト ボックス 8">
+            <a:extLst>
+              <a:ext uri="{FF2B5EF4-FFF2-40B4-BE49-F238E27FC236}">
+                <a16:creationId xmlns:a16="http://schemas.microsoft.com/office/drawing/2014/main" id="{8C062F06-CEE3-4819-9898-D578CF3225BB}"/>
+              </a:ext>
+            </a:extLst>
+          </p:cNvPr>
+          <p:cNvSpPr txBox="1"/>
+          <p:nvPr/>
+        </p:nvSpPr>
+        <p:spPr>
+          <a:xfrm>
+            <a:off x="705320" y="5145314"/>
+            <a:ext cx="2723823" cy="369332"/>
+          </a:xfrm>
+          <a:prstGeom prst="rect">
+            <a:avLst/>
+          </a:prstGeom>
+          <a:noFill/>
+        </p:spPr>
+        <p:txBody>
+          <a:bodyPr wrap="none" rtlCol="0">
+            <a:spAutoFit/>
+          </a:bodyPr>
+          <a:lstStyle/>
+          <a:p>
+            <a:r>
               <a:rPr kumimoji="1" lang="ja-JP" altLang="en-US" dirty="0"/>
-              <a:t>敵の攻撃に当たるとき、タイミングよくボタンを押すと回避できる</a:t>
-            </a:r>
-            <a:endParaRPr kumimoji="1" lang="en-US" altLang="ja-JP" dirty="0"/>
-          </a:p>
-        </p:txBody>
-      </p:sp>
+              <a:t>この状態でジャンプ入力</a:t>
+            </a:r>
+          </a:p>
+        </p:txBody>
+      </p:sp>
+      <p:sp>
+        <p:nvSpPr>
+          <p:cNvPr id="10" name="矢印: 右 9">
+            <a:extLst>
+              <a:ext uri="{FF2B5EF4-FFF2-40B4-BE49-F238E27FC236}">
+                <a16:creationId xmlns:a16="http://schemas.microsoft.com/office/drawing/2014/main" id="{B2503489-15EE-4CF9-821E-A96A40F9276A}"/>
+              </a:ext>
+            </a:extLst>
+          </p:cNvPr>
+          <p:cNvSpPr/>
+          <p:nvPr/>
+        </p:nvSpPr>
+        <p:spPr>
+          <a:xfrm>
+            <a:off x="3038443" y="3384970"/>
+            <a:ext cx="1901371" cy="1466429"/>
+          </a:xfrm>
+          <a:prstGeom prst="rightArrow">
+            <a:avLst/>
+          </a:prstGeom>
+        </p:spPr>
+        <p:style>
+          <a:lnRef idx="2">
+            <a:schemeClr val="accent1">
+              <a:shade val="50000"/>
+            </a:schemeClr>
+          </a:lnRef>
+          <a:fillRef idx="1">
+            <a:schemeClr val="accent1"/>
+          </a:fillRef>
+          <a:effectRef idx="0">
+            <a:schemeClr val="accent1"/>
+          </a:effectRef>
+          <a:fontRef idx="minor">
+            <a:schemeClr val="lt1"/>
+          </a:fontRef>
+        </p:style>
+        <p:txBody>
+          <a:bodyPr rtlCol="0" anchor="ctr"/>
+          <a:lstStyle/>
+          <a:p>
+            <a:pPr algn="ctr"/>
+            <a:endParaRPr kumimoji="1" lang="ja-JP" altLang="en-US"/>
+          </a:p>
+        </p:txBody>
+      </p:sp>
+      <p:sp>
+        <p:nvSpPr>
+          <p:cNvPr id="11" name="正方形/長方形 10">
+            <a:extLst>
+              <a:ext uri="{FF2B5EF4-FFF2-40B4-BE49-F238E27FC236}">
+                <a16:creationId xmlns:a16="http://schemas.microsoft.com/office/drawing/2014/main" id="{681BAC70-B423-44A0-9114-3914B0E03816}"/>
+              </a:ext>
+            </a:extLst>
+          </p:cNvPr>
+          <p:cNvSpPr/>
+          <p:nvPr/>
+        </p:nvSpPr>
+        <p:spPr>
+          <a:xfrm>
+            <a:off x="5218279" y="1712686"/>
+            <a:ext cx="769256" cy="5145314"/>
+          </a:xfrm>
+          <a:prstGeom prst="rect">
+            <a:avLst/>
+          </a:prstGeom>
+          <a:solidFill>
+            <a:schemeClr val="tx1"/>
+          </a:solidFill>
+          <a:ln>
+            <a:solidFill>
+              <a:schemeClr val="tx1"/>
+            </a:solidFill>
+          </a:ln>
+        </p:spPr>
+        <p:style>
+          <a:lnRef idx="2">
+            <a:schemeClr val="accent1">
+              <a:shade val="50000"/>
+            </a:schemeClr>
+          </a:lnRef>
+          <a:fillRef idx="1">
+            <a:schemeClr val="accent1"/>
+          </a:fillRef>
+          <a:effectRef idx="0">
+            <a:schemeClr val="accent1"/>
+          </a:effectRef>
+          <a:fontRef idx="minor">
+            <a:schemeClr val="lt1"/>
+          </a:fontRef>
+        </p:style>
+        <p:txBody>
+          <a:bodyPr rtlCol="0" anchor="ctr"/>
+          <a:lstStyle/>
+          <a:p>
+            <a:pPr algn="ctr"/>
+            <a:endParaRPr kumimoji="1" lang="ja-JP" altLang="en-US"/>
+          </a:p>
+        </p:txBody>
+      </p:sp>
+      <p:pic>
+        <p:nvPicPr>
+          <p:cNvPr id="15" name="図 14">
+            <a:extLst>
+              <a:ext uri="{FF2B5EF4-FFF2-40B4-BE49-F238E27FC236}">
+                <a16:creationId xmlns:a16="http://schemas.microsoft.com/office/drawing/2014/main" id="{0C1ECDC2-CB10-4DD8-A8DC-A89625E0A6D0}"/>
+              </a:ext>
+            </a:extLst>
+          </p:cNvPr>
+          <p:cNvPicPr>
+            <a:picLocks noChangeAspect="1"/>
+          </p:cNvPicPr>
+          <p:nvPr/>
+        </p:nvPicPr>
+        <p:blipFill>
+          <a:blip r:embed="rId2">
+            <a:extLst>
+              <a:ext uri="{28A0092B-C50C-407E-A947-70E740481C1C}">
+                <a14:useLocalDpi xmlns:a14="http://schemas.microsoft.com/office/drawing/2010/main" val="0"/>
+              </a:ext>
+            </a:extLst>
+          </a:blip>
+          <a:stretch>
+            <a:fillRect/>
+          </a:stretch>
+        </p:blipFill>
+        <p:spPr>
+          <a:xfrm>
+            <a:off x="6584884" y="1857828"/>
+            <a:ext cx="1849529" cy="1951471"/>
+          </a:xfrm>
+          <a:prstGeom prst="rect">
+            <a:avLst/>
+          </a:prstGeom>
+        </p:spPr>
+      </p:pic>
+      <p:pic>
+        <p:nvPicPr>
+          <p:cNvPr id="17" name="図 16">
+            <a:extLst>
+              <a:ext uri="{FF2B5EF4-FFF2-40B4-BE49-F238E27FC236}">
+                <a16:creationId xmlns:a16="http://schemas.microsoft.com/office/drawing/2014/main" id="{831FA3C7-1E1F-4CC3-93D6-47E015317E35}"/>
+              </a:ext>
+            </a:extLst>
+          </p:cNvPr>
+          <p:cNvPicPr>
+            <a:picLocks noChangeAspect="1"/>
+          </p:cNvPicPr>
+          <p:nvPr/>
+        </p:nvPicPr>
+        <p:blipFill>
+          <a:blip r:embed="rId3">
+            <a:extLst>
+              <a:ext uri="{28A0092B-C50C-407E-A947-70E740481C1C}">
+                <a14:useLocalDpi xmlns:a14="http://schemas.microsoft.com/office/drawing/2010/main" val="0"/>
+              </a:ext>
+            </a:extLst>
+          </a:blip>
+          <a:stretch>
+            <a:fillRect/>
+          </a:stretch>
+        </p:blipFill>
+        <p:spPr>
+          <a:xfrm>
+            <a:off x="-439886" y="2556084"/>
+            <a:ext cx="3124200" cy="3124200"/>
+          </a:xfrm>
+          <a:prstGeom prst="rect">
+            <a:avLst/>
+          </a:prstGeom>
+        </p:spPr>
+      </p:pic>
     </p:spTree>
     <p:extLst>
       <p:ext uri="{BB962C8B-B14F-4D97-AF65-F5344CB8AC3E}">
-        <p14:creationId xmlns:p14="http://schemas.microsoft.com/office/powerpoint/2010/main" val="2382912570"/>
+        <p14:creationId xmlns:p14="http://schemas.microsoft.com/office/powerpoint/2010/main" val="1369157224"/>
       </p:ext>
     </p:extLst>
   </p:cSld>
@@ -5534,7 +6235,7 @@
           <p:cNvPr id="4" name="テキスト ボックス 3">
             <a:extLst>
               <a:ext uri="{FF2B5EF4-FFF2-40B4-BE49-F238E27FC236}">
-                <a16:creationId xmlns:a16="http://schemas.microsoft.com/office/drawing/2014/main" id="{40B13EE1-46E8-4190-A176-E9B052C35E9C}"/>
+                <a16:creationId xmlns:a16="http://schemas.microsoft.com/office/drawing/2014/main" id="{663915C1-1EBB-4D3C-B65C-3603D7F4CE41}"/>
               </a:ext>
             </a:extLst>
           </p:cNvPr>
@@ -5544,7 +6245,7 @@
         <p:spPr>
           <a:xfrm>
             <a:off x="0" y="0"/>
-            <a:ext cx="4134465" cy="769441"/>
+            <a:ext cx="4286251" cy="769441"/>
           </a:xfrm>
           <a:prstGeom prst="rect">
             <a:avLst/>
@@ -5552,14 +6253,14 @@
           <a:noFill/>
         </p:spPr>
         <p:txBody>
-          <a:bodyPr wrap="none" rtlCol="0">
+          <a:bodyPr wrap="square" rtlCol="0">
             <a:spAutoFit/>
           </a:bodyPr>
           <a:lstStyle/>
           <a:p>
             <a:r>
               <a:rPr kumimoji="1" lang="ja-JP" altLang="en-US" sz="4400" dirty="0"/>
-              <a:t>ー壁ジャンプー</a:t>
+              <a:t>ー死亡判定ー</a:t>
             </a:r>
           </a:p>
         </p:txBody>
@@ -5569,7 +6270,7 @@
           <p:cNvPr id="5" name="テキスト ボックス 4">
             <a:extLst>
               <a:ext uri="{FF2B5EF4-FFF2-40B4-BE49-F238E27FC236}">
-                <a16:creationId xmlns:a16="http://schemas.microsoft.com/office/drawing/2014/main" id="{FD421848-1DF0-40D7-B032-884FB810EA68}"/>
+                <a16:creationId xmlns:a16="http://schemas.microsoft.com/office/drawing/2014/main" id="{01EE4625-E781-4F5D-B48A-8D3A2E00C530}"/>
               </a:ext>
             </a:extLst>
           </p:cNvPr>
@@ -5578,8 +6279,8 @@
         </p:nvSpPr>
         <p:spPr>
           <a:xfrm>
-            <a:off x="0" y="769441"/>
-            <a:ext cx="9879628" cy="646331"/>
+            <a:off x="204132" y="726758"/>
+            <a:ext cx="5032147" cy="646331"/>
           </a:xfrm>
           <a:prstGeom prst="rect">
             <a:avLst/>
@@ -5593,76 +6294,33 @@
           <a:lstStyle/>
           <a:p>
             <a:r>
+              <a:rPr kumimoji="1" lang="ja-JP" altLang="en-US" dirty="0"/>
+              <a:t>落下死</a:t>
+            </a:r>
+            <a:r>
+              <a:rPr lang="en-US" altLang="ja-JP" dirty="0"/>
+              <a:t>	</a:t>
+            </a:r>
+            <a:r>
               <a:rPr lang="ja-JP" altLang="en-US" dirty="0"/>
-              <a:t>プレイヤーが壁に接触した状態でジャンプ入力を行うと、壁を蹴って反対方向へ跳び上がる。</a:t>
+              <a:t>　トゲ</a:t>
             </a:r>
             <a:endParaRPr lang="en-US" altLang="ja-JP" dirty="0"/>
           </a:p>
           <a:p>
-            <a:endParaRPr lang="en-US" altLang="ja-JP" dirty="0"/>
-          </a:p>
-        </p:txBody>
-      </p:sp>
-      <p:sp>
-        <p:nvSpPr>
-          <p:cNvPr id="6" name="正方形/長方形 5">
-            <a:extLst>
-              <a:ext uri="{FF2B5EF4-FFF2-40B4-BE49-F238E27FC236}">
-                <a16:creationId xmlns:a16="http://schemas.microsoft.com/office/drawing/2014/main" id="{80CB0C25-677E-4668-8F2A-611D57B10DBB}"/>
-              </a:ext>
-            </a:extLst>
-          </p:cNvPr>
-          <p:cNvSpPr/>
-          <p:nvPr/>
-        </p:nvSpPr>
-        <p:spPr>
-          <a:xfrm>
-            <a:off x="1" y="1712686"/>
-            <a:ext cx="769256" cy="5145314"/>
-          </a:xfrm>
-          <a:prstGeom prst="rect">
-            <a:avLst/>
-          </a:prstGeom>
-          <a:solidFill>
-            <a:schemeClr val="tx1"/>
-          </a:solidFill>
-          <a:ln>
-            <a:solidFill>
-              <a:schemeClr val="tx1"/>
-            </a:solidFill>
-          </a:ln>
-        </p:spPr>
-        <p:style>
-          <a:lnRef idx="2">
-            <a:schemeClr val="accent1">
-              <a:shade val="50000"/>
-            </a:schemeClr>
-          </a:lnRef>
-          <a:fillRef idx="1">
-            <a:schemeClr val="accent1"/>
-          </a:fillRef>
-          <a:effectRef idx="0">
-            <a:schemeClr val="accent1"/>
-          </a:effectRef>
-          <a:fontRef idx="minor">
-            <a:schemeClr val="lt1"/>
-          </a:fontRef>
-        </p:style>
-        <p:txBody>
-          <a:bodyPr rtlCol="0" anchor="ctr"/>
-          <a:lstStyle/>
-          <a:p>
-            <a:pPr algn="ctr"/>
-            <a:endParaRPr kumimoji="1" lang="ja-JP" altLang="en-US"/>
-          </a:p>
-        </p:txBody>
-      </p:sp>
-      <p:sp>
-        <p:nvSpPr>
-          <p:cNvPr id="9" name="テキスト ボックス 8">
-            <a:extLst>
-              <a:ext uri="{FF2B5EF4-FFF2-40B4-BE49-F238E27FC236}">
-                <a16:creationId xmlns:a16="http://schemas.microsoft.com/office/drawing/2014/main" id="{8C062F06-CEE3-4819-9898-D578CF3225BB}"/>
+            <a:r>
+              <a:rPr kumimoji="1" lang="ja-JP" altLang="en-US" dirty="0"/>
+              <a:t>敵の攻撃　ダッシュ状態でないときの敵の接触</a:t>
+            </a:r>
+          </a:p>
+        </p:txBody>
+      </p:sp>
+      <p:sp>
+        <p:nvSpPr>
+          <p:cNvPr id="7" name="テキスト ボックス 6">
+            <a:extLst>
+              <a:ext uri="{FF2B5EF4-FFF2-40B4-BE49-F238E27FC236}">
+                <a16:creationId xmlns:a16="http://schemas.microsoft.com/office/drawing/2014/main" id="{A2A67A99-A783-4540-8159-A022FC2423BB}"/>
               </a:ext>
             </a:extLst>
           </p:cNvPr>
@@ -5671,8 +6329,8 @@
         </p:nvSpPr>
         <p:spPr>
           <a:xfrm>
-            <a:off x="705320" y="5145314"/>
-            <a:ext cx="2723823" cy="369332"/>
+            <a:off x="0" y="2099847"/>
+            <a:ext cx="9693679" cy="1200329"/>
           </a:xfrm>
           <a:prstGeom prst="rect">
             <a:avLst/>
@@ -5686,118 +6344,41 @@
           <a:lstStyle/>
           <a:p>
             <a:r>
-              <a:rPr kumimoji="1" lang="ja-JP" altLang="en-US" dirty="0"/>
-              <a:t>この状態でジャンプ入力</a:t>
-            </a:r>
-          </a:p>
-        </p:txBody>
-      </p:sp>
-      <p:sp>
-        <p:nvSpPr>
-          <p:cNvPr id="10" name="矢印: 右 9">
-            <a:extLst>
-              <a:ext uri="{FF2B5EF4-FFF2-40B4-BE49-F238E27FC236}">
-                <a16:creationId xmlns:a16="http://schemas.microsoft.com/office/drawing/2014/main" id="{B2503489-15EE-4CF9-821E-A96A40F9276A}"/>
-              </a:ext>
-            </a:extLst>
-          </p:cNvPr>
-          <p:cNvSpPr/>
-          <p:nvPr/>
-        </p:nvSpPr>
-        <p:spPr>
-          <a:xfrm>
-            <a:off x="3038443" y="3384970"/>
-            <a:ext cx="1901371" cy="1466429"/>
-          </a:xfrm>
-          <a:prstGeom prst="rightArrow">
-            <a:avLst/>
-          </a:prstGeom>
-        </p:spPr>
-        <p:style>
-          <a:lnRef idx="2">
-            <a:schemeClr val="accent1">
-              <a:shade val="50000"/>
-            </a:schemeClr>
-          </a:lnRef>
-          <a:fillRef idx="1">
-            <a:schemeClr val="accent1"/>
-          </a:fillRef>
-          <a:effectRef idx="0">
-            <a:schemeClr val="accent1"/>
-          </a:effectRef>
-          <a:fontRef idx="minor">
-            <a:schemeClr val="lt1"/>
-          </a:fontRef>
-        </p:style>
-        <p:txBody>
-          <a:bodyPr rtlCol="0" anchor="ctr"/>
-          <a:lstStyle/>
-          <a:p>
-            <a:pPr algn="ctr"/>
-            <a:endParaRPr kumimoji="1" lang="ja-JP" altLang="en-US"/>
-          </a:p>
-        </p:txBody>
-      </p:sp>
-      <p:sp>
-        <p:nvSpPr>
-          <p:cNvPr id="11" name="正方形/長方形 10">
-            <a:extLst>
-              <a:ext uri="{FF2B5EF4-FFF2-40B4-BE49-F238E27FC236}">
-                <a16:creationId xmlns:a16="http://schemas.microsoft.com/office/drawing/2014/main" id="{681BAC70-B423-44A0-9114-3914B0E03816}"/>
-              </a:ext>
-            </a:extLst>
-          </p:cNvPr>
-          <p:cNvSpPr/>
-          <p:nvPr/>
-        </p:nvSpPr>
-        <p:spPr>
-          <a:xfrm>
-            <a:off x="5218279" y="1712686"/>
-            <a:ext cx="769256" cy="5145314"/>
-          </a:xfrm>
-          <a:prstGeom prst="rect">
-            <a:avLst/>
-          </a:prstGeom>
-          <a:solidFill>
-            <a:schemeClr val="tx1"/>
-          </a:solidFill>
-          <a:ln>
-            <a:solidFill>
-              <a:schemeClr val="tx1"/>
-            </a:solidFill>
-          </a:ln>
-        </p:spPr>
-        <p:style>
-          <a:lnRef idx="2">
-            <a:schemeClr val="accent1">
-              <a:shade val="50000"/>
-            </a:schemeClr>
-          </a:lnRef>
-          <a:fillRef idx="1">
-            <a:schemeClr val="accent1"/>
-          </a:fillRef>
-          <a:effectRef idx="0">
-            <a:schemeClr val="accent1"/>
-          </a:effectRef>
-          <a:fontRef idx="minor">
-            <a:schemeClr val="lt1"/>
-          </a:fontRef>
-        </p:style>
-        <p:txBody>
-          <a:bodyPr rtlCol="0" anchor="ctr"/>
-          <a:lstStyle/>
-          <a:p>
-            <a:pPr algn="ctr"/>
-            <a:endParaRPr kumimoji="1" lang="ja-JP" altLang="en-US"/>
+              <a:rPr kumimoji="1" lang="ja-JP" altLang="en-US" sz="2400" dirty="0"/>
+              <a:t>ダッシュ状態の</a:t>
+            </a:r>
+            <a:r>
+              <a:rPr kumimoji="1" lang="en-US" altLang="ja-JP" sz="2400" dirty="0"/>
+              <a:t>Player</a:t>
+            </a:r>
+            <a:r>
+              <a:rPr kumimoji="1" lang="ja-JP" altLang="en-US" sz="2400" dirty="0"/>
+              <a:t>が敵と接触することで「行動待機状態」になる</a:t>
+            </a:r>
+            <a:endParaRPr kumimoji="1" lang="en-US" altLang="ja-JP" sz="2400" dirty="0"/>
+          </a:p>
+          <a:p>
+            <a:r>
+              <a:rPr kumimoji="1" lang="ja-JP" altLang="en-US" sz="2400" dirty="0"/>
+              <a:t>この「行動待機状態」になるともう一度ダッシュが可能になる</a:t>
+            </a:r>
+            <a:endParaRPr kumimoji="1" lang="en-US" altLang="ja-JP" sz="2400" dirty="0"/>
+          </a:p>
+          <a:p>
+            <a:r>
+              <a:rPr lang="ja-JP" altLang="en-US" sz="2400" dirty="0"/>
+              <a:t>「行動待機状態」でダッシュをすることで敵が死ぬ</a:t>
+            </a:r>
+            <a:endParaRPr lang="en-US" altLang="ja-JP" sz="2400" dirty="0"/>
           </a:p>
         </p:txBody>
       </p:sp>
       <p:pic>
         <p:nvPicPr>
-          <p:cNvPr id="15" name="図 14">
-            <a:extLst>
-              <a:ext uri="{FF2B5EF4-FFF2-40B4-BE49-F238E27FC236}">
-                <a16:creationId xmlns:a16="http://schemas.microsoft.com/office/drawing/2014/main" id="{0C1ECDC2-CB10-4DD8-A8DC-A89625E0A6D0}"/>
+          <p:cNvPr id="8" name="図 7">
+            <a:extLst>
+              <a:ext uri="{FF2B5EF4-FFF2-40B4-BE49-F238E27FC236}">
+                <a16:creationId xmlns:a16="http://schemas.microsoft.com/office/drawing/2014/main" id="{82524A84-6215-4ACB-B1B5-5C1CF7030C3D}"/>
               </a:ext>
             </a:extLst>
           </p:cNvPr>
@@ -5820,8 +6401,8 @@
         </p:blipFill>
         <p:spPr>
           <a:xfrm>
-            <a:off x="6584884" y="1857828"/>
-            <a:ext cx="1849529" cy="1951471"/>
+            <a:off x="1306135" y="3713248"/>
+            <a:ext cx="2720880" cy="2048662"/>
           </a:xfrm>
           <a:prstGeom prst="rect">
             <a:avLst/>
@@ -5830,10 +6411,10 @@
       </p:pic>
       <p:pic>
         <p:nvPicPr>
-          <p:cNvPr id="17" name="図 16">
-            <a:extLst>
-              <a:ext uri="{FF2B5EF4-FFF2-40B4-BE49-F238E27FC236}">
-                <a16:creationId xmlns:a16="http://schemas.microsoft.com/office/drawing/2014/main" id="{831FA3C7-1E1F-4CC3-93D6-47E015317E35}"/>
+          <p:cNvPr id="9" name="図 8">
+            <a:extLst>
+              <a:ext uri="{FF2B5EF4-FFF2-40B4-BE49-F238E27FC236}">
+                <a16:creationId xmlns:a16="http://schemas.microsoft.com/office/drawing/2014/main" id="{64EBB7A2-7005-4711-9C94-8EACC6CF336E}"/>
               </a:ext>
             </a:extLst>
           </p:cNvPr>
@@ -5856,193 +6437,20 @@
         </p:blipFill>
         <p:spPr>
           <a:xfrm>
-            <a:off x="-439886" y="2556084"/>
-            <a:ext cx="3124200" cy="3124200"/>
+            <a:off x="441789" y="4106753"/>
+            <a:ext cx="1728692" cy="1554769"/>
           </a:xfrm>
           <a:prstGeom prst="rect">
             <a:avLst/>
           </a:prstGeom>
         </p:spPr>
       </p:pic>
-    </p:spTree>
-    <p:extLst>
-      <p:ext uri="{BB962C8B-B14F-4D97-AF65-F5344CB8AC3E}">
-        <p14:creationId xmlns:p14="http://schemas.microsoft.com/office/powerpoint/2010/main" val="1369157224"/>
-      </p:ext>
-    </p:extLst>
-  </p:cSld>
-  <p:clrMapOvr>
-    <a:masterClrMapping/>
-  </p:clrMapOvr>
-</p:sld>
-</file>
-
-<file path=ppt/slides/slide6.xml><?xml version="1.0" encoding="utf-8"?>
-<p:sld xmlns:a="http://schemas.openxmlformats.org/drawingml/2006/main" xmlns:r="http://schemas.openxmlformats.org/officeDocument/2006/relationships" xmlns:p="http://schemas.openxmlformats.org/presentationml/2006/main">
-  <p:cSld>
-    <p:spTree>
-      <p:nvGrpSpPr>
-        <p:cNvPr id="1" name=""/>
-        <p:cNvGrpSpPr/>
-        <p:nvPr/>
-      </p:nvGrpSpPr>
-      <p:grpSpPr>
-        <a:xfrm>
-          <a:off x="0" y="0"/>
-          <a:ext cx="0" cy="0"/>
-          <a:chOff x="0" y="0"/>
-          <a:chExt cx="0" cy="0"/>
-        </a:xfrm>
-      </p:grpSpPr>
-      <p:sp>
-        <p:nvSpPr>
-          <p:cNvPr id="4" name="テキスト ボックス 3">
-            <a:extLst>
-              <a:ext uri="{FF2B5EF4-FFF2-40B4-BE49-F238E27FC236}">
-                <a16:creationId xmlns:a16="http://schemas.microsoft.com/office/drawing/2014/main" id="{663915C1-1EBB-4D3C-B65C-3603D7F4CE41}"/>
-              </a:ext>
-            </a:extLst>
-          </p:cNvPr>
-          <p:cNvSpPr txBox="1"/>
-          <p:nvPr/>
-        </p:nvSpPr>
-        <p:spPr>
-          <a:xfrm>
-            <a:off x="0" y="0"/>
-            <a:ext cx="4286251" cy="769441"/>
-          </a:xfrm>
-          <a:prstGeom prst="rect">
-            <a:avLst/>
-          </a:prstGeom>
-          <a:noFill/>
-        </p:spPr>
-        <p:txBody>
-          <a:bodyPr wrap="square" rtlCol="0">
-            <a:spAutoFit/>
-          </a:bodyPr>
-          <a:lstStyle/>
-          <a:p>
-            <a:r>
-              <a:rPr kumimoji="1" lang="ja-JP" altLang="en-US" sz="4400" dirty="0"/>
-              <a:t>ー死亡判定ー</a:t>
-            </a:r>
-          </a:p>
-        </p:txBody>
-      </p:sp>
-      <p:sp>
-        <p:nvSpPr>
-          <p:cNvPr id="5" name="テキスト ボックス 4">
-            <a:extLst>
-              <a:ext uri="{FF2B5EF4-FFF2-40B4-BE49-F238E27FC236}">
-                <a16:creationId xmlns:a16="http://schemas.microsoft.com/office/drawing/2014/main" id="{01EE4625-E781-4F5D-B48A-8D3A2E00C530}"/>
-              </a:ext>
-            </a:extLst>
-          </p:cNvPr>
-          <p:cNvSpPr txBox="1"/>
-          <p:nvPr/>
-        </p:nvSpPr>
-        <p:spPr>
-          <a:xfrm>
-            <a:off x="204132" y="726758"/>
-            <a:ext cx="5032147" cy="646331"/>
-          </a:xfrm>
-          <a:prstGeom prst="rect">
-            <a:avLst/>
-          </a:prstGeom>
-          <a:noFill/>
-        </p:spPr>
-        <p:txBody>
-          <a:bodyPr wrap="none" rtlCol="0">
-            <a:spAutoFit/>
-          </a:bodyPr>
-          <a:lstStyle/>
-          <a:p>
-            <a:r>
-              <a:rPr kumimoji="1" lang="ja-JP" altLang="en-US" dirty="0"/>
-              <a:t>落下死</a:t>
-            </a:r>
-            <a:r>
-              <a:rPr lang="en-US" altLang="ja-JP" dirty="0"/>
-              <a:t>	</a:t>
-            </a:r>
-            <a:r>
-              <a:rPr lang="ja-JP" altLang="en-US" dirty="0"/>
-              <a:t>　トゲ</a:t>
-            </a:r>
-            <a:endParaRPr lang="en-US" altLang="ja-JP" dirty="0"/>
-          </a:p>
-          <a:p>
-            <a:r>
-              <a:rPr kumimoji="1" lang="ja-JP" altLang="en-US" dirty="0"/>
-              <a:t>敵の攻撃　ダッシュ状態でないときの敵の接触</a:t>
-            </a:r>
-          </a:p>
-        </p:txBody>
-      </p:sp>
-      <p:sp>
-        <p:nvSpPr>
-          <p:cNvPr id="7" name="テキスト ボックス 6">
-            <a:extLst>
-              <a:ext uri="{FF2B5EF4-FFF2-40B4-BE49-F238E27FC236}">
-                <a16:creationId xmlns:a16="http://schemas.microsoft.com/office/drawing/2014/main" id="{A2A67A99-A783-4540-8159-A022FC2423BB}"/>
-              </a:ext>
-            </a:extLst>
-          </p:cNvPr>
-          <p:cNvSpPr txBox="1"/>
-          <p:nvPr/>
-        </p:nvSpPr>
-        <p:spPr>
-          <a:xfrm>
-            <a:off x="0" y="2099847"/>
-            <a:ext cx="9693679" cy="1200329"/>
-          </a:xfrm>
-          <a:prstGeom prst="rect">
-            <a:avLst/>
-          </a:prstGeom>
-          <a:noFill/>
-        </p:spPr>
-        <p:txBody>
-          <a:bodyPr wrap="none" rtlCol="0">
-            <a:spAutoFit/>
-          </a:bodyPr>
-          <a:lstStyle/>
-          <a:p>
-            <a:r>
-              <a:rPr kumimoji="1" lang="ja-JP" altLang="en-US" sz="2400" dirty="0"/>
-              <a:t>ダッシュ状態の</a:t>
-            </a:r>
-            <a:r>
-              <a:rPr kumimoji="1" lang="en-US" altLang="ja-JP" sz="2400" dirty="0"/>
-              <a:t>Player</a:t>
-            </a:r>
-            <a:r>
-              <a:rPr kumimoji="1" lang="ja-JP" altLang="en-US" sz="2400" dirty="0"/>
-              <a:t>が敵と接触することで「行動待機状態」になる</a:t>
-            </a:r>
-            <a:endParaRPr kumimoji="1" lang="en-US" altLang="ja-JP" sz="2400" dirty="0"/>
-          </a:p>
-          <a:p>
-            <a:r>
-              <a:rPr kumimoji="1" lang="ja-JP" altLang="en-US" sz="2400" dirty="0"/>
-              <a:t>この「行動待機状態」になるともう一度ダッシュが可能になる</a:t>
-            </a:r>
-            <a:endParaRPr kumimoji="1" lang="en-US" altLang="ja-JP" sz="2400" dirty="0"/>
-          </a:p>
-          <a:p>
-            <a:r>
-              <a:rPr lang="ja-JP" altLang="en-US" sz="2400" dirty="0"/>
-              <a:t>「行動待機状態」でダッシュをすることで敵が死ぬ</a:t>
-            </a:r>
-            <a:endParaRPr kumimoji="1" lang="ja-JP" altLang="en-US" sz="2400" dirty="0"/>
-          </a:p>
-        </p:txBody>
-      </p:sp>
       <p:pic>
         <p:nvPicPr>
-          <p:cNvPr id="8" name="図 7">
-            <a:extLst>
-              <a:ext uri="{FF2B5EF4-FFF2-40B4-BE49-F238E27FC236}">
-                <a16:creationId xmlns:a16="http://schemas.microsoft.com/office/drawing/2014/main" id="{82524A84-6215-4ACB-B1B5-5C1CF7030C3D}"/>
+          <p:cNvPr id="10" name="図 9">
+            <a:extLst>
+              <a:ext uri="{FF2B5EF4-FFF2-40B4-BE49-F238E27FC236}">
+                <a16:creationId xmlns:a16="http://schemas.microsoft.com/office/drawing/2014/main" id="{3BF96E96-784E-4097-92CF-1B60C7AB4F8D}"/>
               </a:ext>
             </a:extLst>
           </p:cNvPr>
@@ -6065,7 +6473,7 @@
         </p:blipFill>
         <p:spPr>
           <a:xfrm>
-            <a:off x="1456742" y="2923658"/>
+            <a:off x="4194198" y="3713248"/>
             <a:ext cx="2720880" cy="2048662"/>
           </a:xfrm>
           <a:prstGeom prst="rect">
@@ -6075,10 +6483,100 @@
       </p:pic>
       <p:pic>
         <p:nvPicPr>
-          <p:cNvPr id="9" name="図 8">
-            <a:extLst>
-              <a:ext uri="{FF2B5EF4-FFF2-40B4-BE49-F238E27FC236}">
-                <a16:creationId xmlns:a16="http://schemas.microsoft.com/office/drawing/2014/main" id="{64EBB7A2-7005-4711-9C94-8EACC6CF336E}"/>
+          <p:cNvPr id="11" name="図 10">
+            <a:extLst>
+              <a:ext uri="{FF2B5EF4-FFF2-40B4-BE49-F238E27FC236}">
+                <a16:creationId xmlns:a16="http://schemas.microsoft.com/office/drawing/2014/main" id="{E435A3E7-E9FC-4AD5-8F6F-43EDDBC7C4DA}"/>
+              </a:ext>
+            </a:extLst>
+          </p:cNvPr>
+          <p:cNvPicPr>
+            <a:picLocks noChangeAspect="1"/>
+          </p:cNvPicPr>
+          <p:nvPr/>
+        </p:nvPicPr>
+        <p:blipFill>
+          <a:blip r:embed="rId4">
+            <a:extLst>
+              <a:ext uri="{28A0092B-C50C-407E-A947-70E740481C1C}">
+                <a14:useLocalDpi xmlns:a14="http://schemas.microsoft.com/office/drawing/2010/main" val="0"/>
+              </a:ext>
+            </a:extLst>
+          </a:blip>
+          <a:stretch>
+            <a:fillRect/>
+          </a:stretch>
+        </p:blipFill>
+        <p:spPr>
+          <a:xfrm>
+            <a:off x="4027015" y="3656635"/>
+            <a:ext cx="2460811" cy="2460811"/>
+          </a:xfrm>
+          <a:prstGeom prst="rect">
+            <a:avLst/>
+          </a:prstGeom>
+        </p:spPr>
+      </p:pic>
+      <p:sp>
+        <p:nvSpPr>
+          <p:cNvPr id="12" name="テキスト ボックス 11">
+            <a:extLst>
+              <a:ext uri="{FF2B5EF4-FFF2-40B4-BE49-F238E27FC236}">
+                <a16:creationId xmlns:a16="http://schemas.microsoft.com/office/drawing/2014/main" id="{AD1F8E21-7F40-42C8-B398-ADD7CC411B63}"/>
+              </a:ext>
+            </a:extLst>
+          </p:cNvPr>
+          <p:cNvSpPr txBox="1"/>
+          <p:nvPr/>
+        </p:nvSpPr>
+        <p:spPr>
+          <a:xfrm>
+            <a:off x="4468094" y="5531077"/>
+            <a:ext cx="4185761" cy="1200329"/>
+          </a:xfrm>
+          <a:prstGeom prst="rect">
+            <a:avLst/>
+          </a:prstGeom>
+          <a:noFill/>
+        </p:spPr>
+        <p:txBody>
+          <a:bodyPr wrap="none" rtlCol="0">
+            <a:spAutoFit/>
+          </a:bodyPr>
+          <a:lstStyle/>
+          <a:p>
+            <a:r>
+              <a:rPr lang="ja-JP" altLang="en-US" sz="2400" dirty="0"/>
+              <a:t>行動待機状態</a:t>
+            </a:r>
+            <a:endParaRPr lang="en-US" altLang="ja-JP" sz="2400" dirty="0"/>
+          </a:p>
+          <a:p>
+            <a:r>
+              <a:rPr kumimoji="1" lang="ja-JP" altLang="en-US" sz="2400" dirty="0"/>
+              <a:t>この状態では敵は攻撃しない</a:t>
+            </a:r>
+            <a:endParaRPr kumimoji="1" lang="en-US" altLang="ja-JP" sz="2400" dirty="0"/>
+          </a:p>
+          <a:p>
+            <a:r>
+              <a:rPr lang="en-US" altLang="ja-JP" sz="2400" dirty="0"/>
+              <a:t>Player</a:t>
+            </a:r>
+            <a:r>
+              <a:rPr lang="ja-JP" altLang="en-US" sz="2400" dirty="0"/>
+              <a:t>のダッシュが回復</a:t>
+            </a:r>
+            <a:endParaRPr kumimoji="1" lang="ja-JP" altLang="en-US" sz="2400" dirty="0"/>
+          </a:p>
+        </p:txBody>
+      </p:sp>
+      <p:pic>
+        <p:nvPicPr>
+          <p:cNvPr id="13" name="図 12">
+            <a:extLst>
+              <a:ext uri="{FF2B5EF4-FFF2-40B4-BE49-F238E27FC236}">
+                <a16:creationId xmlns:a16="http://schemas.microsoft.com/office/drawing/2014/main" id="{B550E5D0-44E5-4322-8EB6-5E831CDF1C57}"/>
               </a:ext>
             </a:extLst>
           </p:cNvPr>
@@ -6101,169 +6599,7 @@
         </p:blipFill>
         <p:spPr>
           <a:xfrm>
-            <a:off x="592396" y="3317163"/>
-            <a:ext cx="1728692" cy="1554769"/>
-          </a:xfrm>
-          <a:prstGeom prst="rect">
-            <a:avLst/>
-          </a:prstGeom>
-        </p:spPr>
-      </p:pic>
-      <p:pic>
-        <p:nvPicPr>
-          <p:cNvPr id="10" name="図 9">
-            <a:extLst>
-              <a:ext uri="{FF2B5EF4-FFF2-40B4-BE49-F238E27FC236}">
-                <a16:creationId xmlns:a16="http://schemas.microsoft.com/office/drawing/2014/main" id="{3BF96E96-784E-4097-92CF-1B60C7AB4F8D}"/>
-              </a:ext>
-            </a:extLst>
-          </p:cNvPr>
-          <p:cNvPicPr>
-            <a:picLocks noChangeAspect="1"/>
-          </p:cNvPicPr>
-          <p:nvPr/>
-        </p:nvPicPr>
-        <p:blipFill>
-          <a:blip r:embed="rId2">
-            <a:extLst>
-              <a:ext uri="{28A0092B-C50C-407E-A947-70E740481C1C}">
-                <a14:useLocalDpi xmlns:a14="http://schemas.microsoft.com/office/drawing/2010/main" val="0"/>
-              </a:ext>
-            </a:extLst>
-          </a:blip>
-          <a:stretch>
-            <a:fillRect/>
-          </a:stretch>
-        </p:blipFill>
-        <p:spPr>
-          <a:xfrm>
-            <a:off x="4344805" y="2923658"/>
-            <a:ext cx="2720880" cy="2048662"/>
-          </a:xfrm>
-          <a:prstGeom prst="rect">
-            <a:avLst/>
-          </a:prstGeom>
-        </p:spPr>
-      </p:pic>
-      <p:pic>
-        <p:nvPicPr>
-          <p:cNvPr id="11" name="図 10">
-            <a:extLst>
-              <a:ext uri="{FF2B5EF4-FFF2-40B4-BE49-F238E27FC236}">
-                <a16:creationId xmlns:a16="http://schemas.microsoft.com/office/drawing/2014/main" id="{E435A3E7-E9FC-4AD5-8F6F-43EDDBC7C4DA}"/>
-              </a:ext>
-            </a:extLst>
-          </p:cNvPr>
-          <p:cNvPicPr>
-            <a:picLocks noChangeAspect="1"/>
-          </p:cNvPicPr>
-          <p:nvPr/>
-        </p:nvPicPr>
-        <p:blipFill>
-          <a:blip r:embed="rId4">
-            <a:extLst>
-              <a:ext uri="{28A0092B-C50C-407E-A947-70E740481C1C}">
-                <a14:useLocalDpi xmlns:a14="http://schemas.microsoft.com/office/drawing/2010/main" val="0"/>
-              </a:ext>
-            </a:extLst>
-          </a:blip>
-          <a:stretch>
-            <a:fillRect/>
-          </a:stretch>
-        </p:blipFill>
-        <p:spPr>
-          <a:xfrm>
-            <a:off x="4177622" y="2867045"/>
-            <a:ext cx="2460811" cy="2460811"/>
-          </a:xfrm>
-          <a:prstGeom prst="rect">
-            <a:avLst/>
-          </a:prstGeom>
-        </p:spPr>
-      </p:pic>
-      <p:sp>
-        <p:nvSpPr>
-          <p:cNvPr id="12" name="テキスト ボックス 11">
-            <a:extLst>
-              <a:ext uri="{FF2B5EF4-FFF2-40B4-BE49-F238E27FC236}">
-                <a16:creationId xmlns:a16="http://schemas.microsoft.com/office/drawing/2014/main" id="{AD1F8E21-7F40-42C8-B398-ADD7CC411B63}"/>
-              </a:ext>
-            </a:extLst>
-          </p:cNvPr>
-          <p:cNvSpPr txBox="1"/>
-          <p:nvPr/>
-        </p:nvSpPr>
-        <p:spPr>
-          <a:xfrm>
-            <a:off x="4618701" y="4741487"/>
-            <a:ext cx="4185761" cy="1200329"/>
-          </a:xfrm>
-          <a:prstGeom prst="rect">
-            <a:avLst/>
-          </a:prstGeom>
-          <a:noFill/>
-        </p:spPr>
-        <p:txBody>
-          <a:bodyPr wrap="none" rtlCol="0">
-            <a:spAutoFit/>
-          </a:bodyPr>
-          <a:lstStyle/>
-          <a:p>
-            <a:r>
-              <a:rPr lang="ja-JP" altLang="en-US" sz="2400" dirty="0"/>
-              <a:t>行動待機状態</a:t>
-            </a:r>
-            <a:endParaRPr lang="en-US" altLang="ja-JP" sz="2400" dirty="0"/>
-          </a:p>
-          <a:p>
-            <a:r>
-              <a:rPr kumimoji="1" lang="ja-JP" altLang="en-US" sz="2400" dirty="0"/>
-              <a:t>この状態では敵は攻撃しない</a:t>
-            </a:r>
-            <a:endParaRPr kumimoji="1" lang="en-US" altLang="ja-JP" sz="2400" dirty="0"/>
-          </a:p>
-          <a:p>
-            <a:r>
-              <a:rPr lang="en-US" altLang="ja-JP" sz="2400" dirty="0"/>
-              <a:t>Player</a:t>
-            </a:r>
-            <a:r>
-              <a:rPr lang="ja-JP" altLang="en-US" sz="2400" dirty="0"/>
-              <a:t>のダッシュが回復</a:t>
-            </a:r>
-            <a:endParaRPr kumimoji="1" lang="ja-JP" altLang="en-US" sz="2400" dirty="0"/>
-          </a:p>
-        </p:txBody>
-      </p:sp>
-      <p:pic>
-        <p:nvPicPr>
-          <p:cNvPr id="13" name="図 12">
-            <a:extLst>
-              <a:ext uri="{FF2B5EF4-FFF2-40B4-BE49-F238E27FC236}">
-                <a16:creationId xmlns:a16="http://schemas.microsoft.com/office/drawing/2014/main" id="{B550E5D0-44E5-4322-8EB6-5E831CDF1C57}"/>
-              </a:ext>
-            </a:extLst>
-          </p:cNvPr>
-          <p:cNvPicPr>
-            <a:picLocks noChangeAspect="1"/>
-          </p:cNvPicPr>
-          <p:nvPr/>
-        </p:nvPicPr>
-        <p:blipFill>
-          <a:blip r:embed="rId3">
-            <a:extLst>
-              <a:ext uri="{28A0092B-C50C-407E-A947-70E740481C1C}">
-                <a14:useLocalDpi xmlns:a14="http://schemas.microsoft.com/office/drawing/2010/main" val="0"/>
-              </a:ext>
-            </a:extLst>
-          </a:blip>
-          <a:stretch>
-            <a:fillRect/>
-          </a:stretch>
-        </p:blipFill>
-        <p:spPr>
-          <a:xfrm>
-            <a:off x="10156847" y="3170604"/>
+            <a:off x="10006240" y="3960194"/>
             <a:ext cx="1728692" cy="1554769"/>
           </a:xfrm>
           <a:prstGeom prst="rect">
@@ -6299,7 +6635,7 @@
         </p:blipFill>
         <p:spPr>
           <a:xfrm>
-            <a:off x="8339785" y="3225636"/>
+            <a:off x="8189178" y="4015226"/>
             <a:ext cx="1921011" cy="1499737"/>
           </a:xfrm>
           <a:prstGeom prst="rect">
@@ -6307,6 +6643,49 @@
           </a:prstGeom>
         </p:spPr>
       </p:pic>
+      <p:sp>
+        <p:nvSpPr>
+          <p:cNvPr id="15" name="テキスト ボックス 14">
+            <a:extLst>
+              <a:ext uri="{FF2B5EF4-FFF2-40B4-BE49-F238E27FC236}">
+                <a16:creationId xmlns:a16="http://schemas.microsoft.com/office/drawing/2014/main" id="{A88430D7-C0A0-4A86-89C2-B99B0208DD2C}"/>
+              </a:ext>
+            </a:extLst>
+          </p:cNvPr>
+          <p:cNvSpPr txBox="1"/>
+          <p:nvPr/>
+        </p:nvSpPr>
+        <p:spPr>
+          <a:xfrm>
+            <a:off x="-108629" y="1390076"/>
+            <a:ext cx="5702605" cy="769441"/>
+          </a:xfrm>
+          <a:prstGeom prst="rect">
+            <a:avLst/>
+          </a:prstGeom>
+          <a:noFill/>
+        </p:spPr>
+        <p:txBody>
+          <a:bodyPr wrap="square" rtlCol="0">
+            <a:spAutoFit/>
+          </a:bodyPr>
+          <a:lstStyle/>
+          <a:p>
+            <a:r>
+              <a:rPr kumimoji="1" lang="ja-JP" altLang="en-US" sz="4400" dirty="0"/>
+              <a:t>ー</a:t>
+            </a:r>
+            <a:r>
+              <a:rPr lang="ja-JP" altLang="en-US" sz="4400" dirty="0"/>
+              <a:t>ダッシュ攻撃</a:t>
+            </a:r>
+            <a:r>
+              <a:rPr kumimoji="1" lang="ja-JP" altLang="en-US" sz="4400" dirty="0"/>
+              <a:t>ー</a:t>
+            </a:r>
+          </a:p>
+        </p:txBody>
+      </p:sp>
     </p:spTree>
     <p:extLst>
       <p:ext uri="{BB962C8B-B14F-4D97-AF65-F5344CB8AC3E}">

--- a/仕様書/Ninja.pptx
+++ b/仕様書/Ninja.pptx
@@ -6,10 +6,11 @@
   </p:sldMasterIdLst>
   <p:sldIdLst>
     <p:sldId id="256" r:id="rId2"/>
-    <p:sldId id="258" r:id="rId3"/>
+    <p:sldId id="261" r:id="rId3"/>
     <p:sldId id="260" r:id="rId4"/>
     <p:sldId id="259" r:id="rId5"/>
     <p:sldId id="257" r:id="rId6"/>
+    <p:sldId id="258" r:id="rId7"/>
   </p:sldIdLst>
   <p:sldSz cx="12192000" cy="6858000"/>
   <p:notesSz cx="6858000" cy="9144000"/>
@@ -263,7 +264,7 @@
           <a:p>
             <a:fld id="{A56489B6-1740-4A5C-B8C9-33805F9AA650}" type="datetimeFigureOut">
               <a:rPr kumimoji="1" lang="ja-JP" altLang="en-US" smtClean="0"/>
-              <a:t>2026/6/11</a:t>
+              <a:t>2026/6/18</a:t>
             </a:fld>
             <a:endParaRPr kumimoji="1" lang="ja-JP" altLang="en-US"/>
           </a:p>
@@ -493,7 +494,7 @@
           <a:p>
             <a:fld id="{A56489B6-1740-4A5C-B8C9-33805F9AA650}" type="datetimeFigureOut">
               <a:rPr kumimoji="1" lang="ja-JP" altLang="en-US" smtClean="0"/>
-              <a:t>2026/6/11</a:t>
+              <a:t>2026/6/18</a:t>
             </a:fld>
             <a:endParaRPr kumimoji="1" lang="ja-JP" altLang="en-US"/>
           </a:p>
@@ -733,7 +734,7 @@
           <a:p>
             <a:fld id="{A56489B6-1740-4A5C-B8C9-33805F9AA650}" type="datetimeFigureOut">
               <a:rPr kumimoji="1" lang="ja-JP" altLang="en-US" smtClean="0"/>
-              <a:t>2026/6/11</a:t>
+              <a:t>2026/6/18</a:t>
             </a:fld>
             <a:endParaRPr kumimoji="1" lang="ja-JP" altLang="en-US"/>
           </a:p>
@@ -963,7 +964,7 @@
           <a:p>
             <a:fld id="{A56489B6-1740-4A5C-B8C9-33805F9AA650}" type="datetimeFigureOut">
               <a:rPr kumimoji="1" lang="ja-JP" altLang="en-US" smtClean="0"/>
-              <a:t>2026/6/11</a:t>
+              <a:t>2026/6/18</a:t>
             </a:fld>
             <a:endParaRPr kumimoji="1" lang="ja-JP" altLang="en-US"/>
           </a:p>
@@ -1238,7 +1239,7 @@
           <a:p>
             <a:fld id="{A56489B6-1740-4A5C-B8C9-33805F9AA650}" type="datetimeFigureOut">
               <a:rPr kumimoji="1" lang="ja-JP" altLang="en-US" smtClean="0"/>
-              <a:t>2026/6/11</a:t>
+              <a:t>2026/6/18</a:t>
             </a:fld>
             <a:endParaRPr kumimoji="1" lang="ja-JP" altLang="en-US"/>
           </a:p>
@@ -1567,7 +1568,7 @@
           <a:p>
             <a:fld id="{A56489B6-1740-4A5C-B8C9-33805F9AA650}" type="datetimeFigureOut">
               <a:rPr kumimoji="1" lang="ja-JP" altLang="en-US" smtClean="0"/>
-              <a:t>2026/6/11</a:t>
+              <a:t>2026/6/18</a:t>
             </a:fld>
             <a:endParaRPr kumimoji="1" lang="ja-JP" altLang="en-US"/>
           </a:p>
@@ -2043,7 +2044,7 @@
           <a:p>
             <a:fld id="{A56489B6-1740-4A5C-B8C9-33805F9AA650}" type="datetimeFigureOut">
               <a:rPr kumimoji="1" lang="ja-JP" altLang="en-US" smtClean="0"/>
-              <a:t>2026/6/11</a:t>
+              <a:t>2026/6/18</a:t>
             </a:fld>
             <a:endParaRPr kumimoji="1" lang="ja-JP" altLang="en-US"/>
           </a:p>
@@ -2184,7 +2185,7 @@
           <a:p>
             <a:fld id="{A56489B6-1740-4A5C-B8C9-33805F9AA650}" type="datetimeFigureOut">
               <a:rPr kumimoji="1" lang="ja-JP" altLang="en-US" smtClean="0"/>
-              <a:t>2026/6/11</a:t>
+              <a:t>2026/6/18</a:t>
             </a:fld>
             <a:endParaRPr kumimoji="1" lang="ja-JP" altLang="en-US"/>
           </a:p>
@@ -2297,7 +2298,7 @@
           <a:p>
             <a:fld id="{A56489B6-1740-4A5C-B8C9-33805F9AA650}" type="datetimeFigureOut">
               <a:rPr kumimoji="1" lang="ja-JP" altLang="en-US" smtClean="0"/>
-              <a:t>2026/6/11</a:t>
+              <a:t>2026/6/18</a:t>
             </a:fld>
             <a:endParaRPr kumimoji="1" lang="ja-JP" altLang="en-US"/>
           </a:p>
@@ -2640,7 +2641,7 @@
           <a:p>
             <a:fld id="{A56489B6-1740-4A5C-B8C9-33805F9AA650}" type="datetimeFigureOut">
               <a:rPr kumimoji="1" lang="ja-JP" altLang="en-US" smtClean="0"/>
-              <a:t>2026/6/11</a:t>
+              <a:t>2026/6/18</a:t>
             </a:fld>
             <a:endParaRPr kumimoji="1" lang="ja-JP" altLang="en-US"/>
           </a:p>
@@ -2928,7 +2929,7 @@
           <a:p>
             <a:fld id="{A56489B6-1740-4A5C-B8C9-33805F9AA650}" type="datetimeFigureOut">
               <a:rPr kumimoji="1" lang="ja-JP" altLang="en-US" smtClean="0"/>
-              <a:t>2026/6/11</a:t>
+              <a:t>2026/6/18</a:t>
             </a:fld>
             <a:endParaRPr kumimoji="1" lang="ja-JP" altLang="en-US"/>
           </a:p>
@@ -3201,7 +3202,7 @@
           <a:p>
             <a:fld id="{A56489B6-1740-4A5C-B8C9-33805F9AA650}" type="datetimeFigureOut">
               <a:rPr kumimoji="1" lang="ja-JP" altLang="en-US" smtClean="0"/>
-              <a:t>2026/6/11</a:t>
+              <a:t>2026/6/18</a:t>
             </a:fld>
             <a:endParaRPr kumimoji="1" lang="ja-JP" altLang="en-US"/>
           </a:p>
@@ -4611,6 +4612,1647 @@
           <p:cNvPr id="4" name="テキスト ボックス 3">
             <a:extLst>
               <a:ext uri="{FF2B5EF4-FFF2-40B4-BE49-F238E27FC236}">
+                <a16:creationId xmlns:a16="http://schemas.microsoft.com/office/drawing/2014/main" id="{ED1C0AFD-2AED-4E48-B97D-48D5BC2552FD}"/>
+              </a:ext>
+            </a:extLst>
+          </p:cNvPr>
+          <p:cNvSpPr txBox="1"/>
+          <p:nvPr/>
+        </p:nvSpPr>
+        <p:spPr>
+          <a:xfrm>
+            <a:off x="201707" y="398033"/>
+            <a:ext cx="6790764" cy="369332"/>
+          </a:xfrm>
+          <a:prstGeom prst="rect">
+            <a:avLst/>
+          </a:prstGeom>
+          <a:noFill/>
+        </p:spPr>
+        <p:txBody>
+          <a:bodyPr wrap="square" rtlCol="0">
+            <a:spAutoFit/>
+          </a:bodyPr>
+          <a:lstStyle/>
+          <a:p>
+            <a:r>
+              <a:rPr kumimoji="1" lang="ja-JP" altLang="en-US" dirty="0"/>
+              <a:t>思いつき案</a:t>
+            </a:r>
+          </a:p>
+        </p:txBody>
+      </p:sp>
+      <p:sp>
+        <p:nvSpPr>
+          <p:cNvPr id="5" name="テキスト ボックス 4">
+            <a:extLst>
+              <a:ext uri="{FF2B5EF4-FFF2-40B4-BE49-F238E27FC236}">
+                <a16:creationId xmlns:a16="http://schemas.microsoft.com/office/drawing/2014/main" id="{F83162F3-BF13-4581-84EE-96551690CE1F}"/>
+              </a:ext>
+            </a:extLst>
+          </p:cNvPr>
+          <p:cNvSpPr txBox="1"/>
+          <p:nvPr/>
+        </p:nvSpPr>
+        <p:spPr>
+          <a:xfrm>
+            <a:off x="201707" y="767365"/>
+            <a:ext cx="10728062" cy="1200329"/>
+          </a:xfrm>
+          <a:prstGeom prst="rect">
+            <a:avLst/>
+          </a:prstGeom>
+          <a:noFill/>
+        </p:spPr>
+        <p:txBody>
+          <a:bodyPr wrap="square" rtlCol="0">
+            <a:spAutoFit/>
+          </a:bodyPr>
+          <a:lstStyle/>
+          <a:p>
+            <a:r>
+              <a:rPr kumimoji="1" lang="ja-JP" altLang="en-US" dirty="0"/>
+              <a:t>ボスや雑魚がリポップするのにドロップもの無しじゃしゃばい？→</a:t>
+            </a:r>
+            <a:endParaRPr kumimoji="1" lang="en-US" altLang="ja-JP" dirty="0"/>
+          </a:p>
+          <a:p>
+            <a:r>
+              <a:rPr lang="ja-JP" altLang="en-US" dirty="0"/>
+              <a:t>金とか強化ドリンクの素材などで町で強化素材を獲得可能にする</a:t>
+            </a:r>
+            <a:r>
+              <a:rPr lang="en-US" altLang="ja-JP" dirty="0"/>
+              <a:t>?</a:t>
+            </a:r>
+          </a:p>
+          <a:p>
+            <a:endParaRPr kumimoji="1" lang="en-US" altLang="ja-JP" dirty="0"/>
+          </a:p>
+          <a:p>
+            <a:endParaRPr kumimoji="1" lang="en-US" altLang="ja-JP" dirty="0"/>
+          </a:p>
+        </p:txBody>
+      </p:sp>
+      <p:sp>
+        <p:nvSpPr>
+          <p:cNvPr id="6" name="テキスト ボックス 5">
+            <a:extLst>
+              <a:ext uri="{FF2B5EF4-FFF2-40B4-BE49-F238E27FC236}">
+                <a16:creationId xmlns:a16="http://schemas.microsoft.com/office/drawing/2014/main" id="{1EED269C-249E-435A-B625-51602062F6FD}"/>
+              </a:ext>
+            </a:extLst>
+          </p:cNvPr>
+          <p:cNvSpPr txBox="1"/>
+          <p:nvPr/>
+        </p:nvSpPr>
+        <p:spPr>
+          <a:xfrm>
+            <a:off x="201707" y="1367529"/>
+            <a:ext cx="1338828" cy="369332"/>
+          </a:xfrm>
+          <a:prstGeom prst="rect">
+            <a:avLst/>
+          </a:prstGeom>
+          <a:noFill/>
+        </p:spPr>
+        <p:txBody>
+          <a:bodyPr wrap="none" rtlCol="0">
+            <a:spAutoFit/>
+          </a:bodyPr>
+          <a:lstStyle/>
+          <a:p>
+            <a:r>
+              <a:rPr kumimoji="1" lang="ja-JP" altLang="en-US" dirty="0"/>
+              <a:t>するなら↓</a:t>
+            </a:r>
+          </a:p>
+        </p:txBody>
+      </p:sp>
+      <p:sp>
+        <p:nvSpPr>
+          <p:cNvPr id="7" name="テキスト ボックス 6">
+            <a:extLst>
+              <a:ext uri="{FF2B5EF4-FFF2-40B4-BE49-F238E27FC236}">
+                <a16:creationId xmlns:a16="http://schemas.microsoft.com/office/drawing/2014/main" id="{9EF879EC-E91B-456D-A58B-D6821DA6B51F}"/>
+              </a:ext>
+            </a:extLst>
+          </p:cNvPr>
+          <p:cNvSpPr txBox="1"/>
+          <p:nvPr/>
+        </p:nvSpPr>
+        <p:spPr>
+          <a:xfrm>
+            <a:off x="201707" y="1759945"/>
+            <a:ext cx="9720931" cy="2585323"/>
+          </a:xfrm>
+          <a:prstGeom prst="rect">
+            <a:avLst/>
+          </a:prstGeom>
+          <a:noFill/>
+        </p:spPr>
+        <p:txBody>
+          <a:bodyPr wrap="none" rtlCol="0">
+            <a:spAutoFit/>
+          </a:bodyPr>
+          <a:lstStyle/>
+          <a:p>
+            <a:r>
+              <a:rPr lang="ja-JP" altLang="en-US" dirty="0"/>
+              <a:t>消費物</a:t>
+            </a:r>
+            <a:r>
+              <a:rPr kumimoji="1" lang="en-US" altLang="ja-JP" dirty="0"/>
+              <a:t>(</a:t>
+            </a:r>
+            <a:r>
+              <a:rPr lang="ja-JP" altLang="en-US" dirty="0"/>
+              <a:t>強化素材</a:t>
+            </a:r>
+            <a:r>
+              <a:rPr kumimoji="1" lang="en-US" altLang="ja-JP" dirty="0"/>
+              <a:t>)</a:t>
+            </a:r>
+            <a:r>
+              <a:rPr kumimoji="1" lang="ja-JP" altLang="en-US" dirty="0"/>
+              <a:t>の仕様→</a:t>
+            </a:r>
+            <a:r>
+              <a:rPr kumimoji="1" lang="en-US" altLang="ja-JP" dirty="0"/>
+              <a:t>R</a:t>
+            </a:r>
+          </a:p>
+          <a:p>
+            <a:r>
+              <a:rPr kumimoji="1" lang="en-US" altLang="ja-JP" dirty="0"/>
+              <a:t>		</a:t>
+            </a:r>
+            <a:r>
+              <a:rPr lang="ja-JP" altLang="en-US" dirty="0"/>
+              <a:t>　　　   </a:t>
+            </a:r>
+            <a:r>
+              <a:rPr kumimoji="1" lang="en-US" altLang="ja-JP" dirty="0"/>
+              <a:t>LB</a:t>
+            </a:r>
+          </a:p>
+          <a:p>
+            <a:endParaRPr lang="en-US" altLang="ja-JP" dirty="0"/>
+          </a:p>
+          <a:p>
+            <a:r>
+              <a:rPr kumimoji="1" lang="ja-JP" altLang="en-US" dirty="0"/>
+              <a:t>消費物の仕様</a:t>
+            </a:r>
+            <a:endParaRPr kumimoji="1" lang="en-US" altLang="ja-JP" dirty="0"/>
+          </a:p>
+          <a:p>
+            <a:r>
+              <a:rPr kumimoji="1" lang="ja-JP" altLang="en-US" dirty="0"/>
+              <a:t>速度アップやパワーアップなど何種類かある</a:t>
+            </a:r>
+            <a:endParaRPr kumimoji="1" lang="en-US" altLang="ja-JP" dirty="0"/>
+          </a:p>
+          <a:p>
+            <a:r>
+              <a:rPr lang="ja-JP" altLang="en-US" dirty="0"/>
+              <a:t>町でのみ消費物の切り替えが可能</a:t>
+            </a:r>
+            <a:endParaRPr lang="en-US" altLang="ja-JP" dirty="0"/>
+          </a:p>
+          <a:p>
+            <a:r>
+              <a:rPr lang="ja-JP" altLang="en-US" dirty="0"/>
+              <a:t>使用するときは一種類しか使用できず連続で消費できない、回復以外は</a:t>
+            </a:r>
+            <a:r>
+              <a:rPr lang="en-US" altLang="ja-JP" dirty="0"/>
+              <a:t>CT</a:t>
+            </a:r>
+            <a:r>
+              <a:rPr lang="ja-JP" altLang="en-US" dirty="0"/>
+              <a:t>＞効果時間にする</a:t>
+            </a:r>
+            <a:endParaRPr lang="en-US" altLang="ja-JP" dirty="0"/>
+          </a:p>
+          <a:p>
+            <a:endParaRPr kumimoji="1" lang="en-US" altLang="ja-JP" dirty="0"/>
+          </a:p>
+          <a:p>
+            <a:r>
+              <a:rPr kumimoji="1" lang="ja-JP" altLang="en-US" dirty="0"/>
+              <a:t>消費物の選択用に専用のキーを使う？</a:t>
+            </a:r>
+            <a:r>
+              <a:rPr lang="en-US" altLang="ja-JP" dirty="0"/>
+              <a:t>o</a:t>
+            </a:r>
+            <a:r>
+              <a:rPr kumimoji="1" lang="en-US" altLang="ja-JP" dirty="0"/>
+              <a:t>r</a:t>
+            </a:r>
+            <a:r>
+              <a:rPr kumimoji="1" lang="ja-JP" altLang="en-US" dirty="0"/>
+              <a:t>特定の場所で設定するようにする？</a:t>
+            </a:r>
+          </a:p>
+        </p:txBody>
+      </p:sp>
+      <p:sp>
+        <p:nvSpPr>
+          <p:cNvPr id="8" name="テキスト ボックス 7">
+            <a:extLst>
+              <a:ext uri="{FF2B5EF4-FFF2-40B4-BE49-F238E27FC236}">
+                <a16:creationId xmlns:a16="http://schemas.microsoft.com/office/drawing/2014/main" id="{B476E702-1C56-4401-9EDE-8AF51023ECD3}"/>
+              </a:ext>
+            </a:extLst>
+          </p:cNvPr>
+          <p:cNvSpPr txBox="1"/>
+          <p:nvPr/>
+        </p:nvSpPr>
+        <p:spPr>
+          <a:xfrm>
+            <a:off x="201707" y="4567141"/>
+            <a:ext cx="8032968" cy="923330"/>
+          </a:xfrm>
+          <a:prstGeom prst="rect">
+            <a:avLst/>
+          </a:prstGeom>
+          <a:noFill/>
+        </p:spPr>
+        <p:txBody>
+          <a:bodyPr wrap="none" rtlCol="0">
+            <a:spAutoFit/>
+          </a:bodyPr>
+          <a:lstStyle/>
+          <a:p>
+            <a:r>
+              <a:rPr kumimoji="1" lang="ja-JP" altLang="en-US" dirty="0"/>
+              <a:t>死んだときのペナルティ</a:t>
+            </a:r>
+            <a:endParaRPr kumimoji="1" lang="en-US" altLang="ja-JP" dirty="0"/>
+          </a:p>
+          <a:p>
+            <a:endParaRPr lang="en-US" altLang="ja-JP" dirty="0"/>
+          </a:p>
+          <a:p>
+            <a:r>
+              <a:rPr kumimoji="1" lang="ja-JP" altLang="en-US" dirty="0"/>
+              <a:t>使用した消費物以外はそのステージに入った時の状態に戻る金や素材など</a:t>
+            </a:r>
+            <a:r>
+              <a:rPr kumimoji="1" lang="en-US" altLang="ja-JP" dirty="0"/>
+              <a:t>…</a:t>
+            </a:r>
+            <a:endParaRPr kumimoji="1" lang="ja-JP" altLang="en-US" dirty="0"/>
+          </a:p>
+        </p:txBody>
+      </p:sp>
+    </p:spTree>
+    <p:extLst>
+      <p:ext uri="{BB962C8B-B14F-4D97-AF65-F5344CB8AC3E}">
+        <p14:creationId xmlns:p14="http://schemas.microsoft.com/office/powerpoint/2010/main" val="28562267"/>
+      </p:ext>
+    </p:extLst>
+  </p:cSld>
+  <p:clrMapOvr>
+    <a:masterClrMapping/>
+  </p:clrMapOvr>
+</p:sld>
+</file>
+
+<file path=ppt/slides/slide3.xml><?xml version="1.0" encoding="utf-8"?>
+<p:sld xmlns:a="http://schemas.openxmlformats.org/drawingml/2006/main" xmlns:r="http://schemas.openxmlformats.org/officeDocument/2006/relationships" xmlns:p="http://schemas.openxmlformats.org/presentationml/2006/main">
+  <p:cSld>
+    <p:spTree>
+      <p:nvGrpSpPr>
+        <p:cNvPr id="1" name=""/>
+        <p:cNvGrpSpPr/>
+        <p:nvPr/>
+      </p:nvGrpSpPr>
+      <p:grpSpPr>
+        <a:xfrm>
+          <a:off x="0" y="0"/>
+          <a:ext cx="0" cy="0"/>
+          <a:chOff x="0" y="0"/>
+          <a:chExt cx="0" cy="0"/>
+        </a:xfrm>
+      </p:grpSpPr>
+      <p:pic>
+        <p:nvPicPr>
+          <p:cNvPr id="10" name="図 9">
+            <a:extLst>
+              <a:ext uri="{FF2B5EF4-FFF2-40B4-BE49-F238E27FC236}">
+                <a16:creationId xmlns:a16="http://schemas.microsoft.com/office/drawing/2014/main" id="{9DDFD24E-8583-46A7-8D84-84ECE7CDA1A7}"/>
+              </a:ext>
+            </a:extLst>
+          </p:cNvPr>
+          <p:cNvPicPr>
+            <a:picLocks noChangeAspect="1"/>
+          </p:cNvPicPr>
+          <p:nvPr/>
+        </p:nvPicPr>
+        <p:blipFill>
+          <a:blip r:embed="rId2">
+            <a:extLst>
+              <a:ext uri="{28A0092B-C50C-407E-A947-70E740481C1C}">
+                <a14:useLocalDpi xmlns:a14="http://schemas.microsoft.com/office/drawing/2010/main" val="0"/>
+              </a:ext>
+            </a:extLst>
+          </a:blip>
+          <a:stretch>
+            <a:fillRect/>
+          </a:stretch>
+        </p:blipFill>
+        <p:spPr>
+          <a:xfrm>
+            <a:off x="4203335" y="416096"/>
+            <a:ext cx="4315643" cy="4315643"/>
+          </a:xfrm>
+          <a:prstGeom prst="rect">
+            <a:avLst/>
+          </a:prstGeom>
+        </p:spPr>
+      </p:pic>
+      <p:sp>
+        <p:nvSpPr>
+          <p:cNvPr id="4" name="テキスト ボックス 3">
+            <a:extLst>
+              <a:ext uri="{FF2B5EF4-FFF2-40B4-BE49-F238E27FC236}">
+                <a16:creationId xmlns:a16="http://schemas.microsoft.com/office/drawing/2014/main" id="{3FEC7234-B10E-40CD-A03C-F3BB2D062744}"/>
+              </a:ext>
+            </a:extLst>
+          </p:cNvPr>
+          <p:cNvSpPr txBox="1"/>
+          <p:nvPr/>
+        </p:nvSpPr>
+        <p:spPr>
+          <a:xfrm>
+            <a:off x="0" y="0"/>
+            <a:ext cx="3005951" cy="769441"/>
+          </a:xfrm>
+          <a:prstGeom prst="rect">
+            <a:avLst/>
+          </a:prstGeom>
+          <a:noFill/>
+        </p:spPr>
+        <p:txBody>
+          <a:bodyPr wrap="none" rtlCol="0">
+            <a:spAutoFit/>
+          </a:bodyPr>
+          <a:lstStyle/>
+          <a:p>
+            <a:r>
+              <a:rPr kumimoji="1" lang="ja-JP" altLang="en-US" sz="4400" dirty="0"/>
+              <a:t>ー手裏剣ー</a:t>
+            </a:r>
+          </a:p>
+        </p:txBody>
+      </p:sp>
+      <p:sp>
+        <p:nvSpPr>
+          <p:cNvPr id="5" name="テキスト ボックス 4">
+            <a:extLst>
+              <a:ext uri="{FF2B5EF4-FFF2-40B4-BE49-F238E27FC236}">
+                <a16:creationId xmlns:a16="http://schemas.microsoft.com/office/drawing/2014/main" id="{5DDD4A7B-EC46-4FD4-AFC7-28DA10C4B49A}"/>
+              </a:ext>
+            </a:extLst>
+          </p:cNvPr>
+          <p:cNvSpPr txBox="1"/>
+          <p:nvPr/>
+        </p:nvSpPr>
+        <p:spPr>
+          <a:xfrm>
+            <a:off x="0" y="769441"/>
+            <a:ext cx="3877985" cy="646331"/>
+          </a:xfrm>
+          <a:prstGeom prst="rect">
+            <a:avLst/>
+          </a:prstGeom>
+          <a:noFill/>
+        </p:spPr>
+        <p:txBody>
+          <a:bodyPr wrap="none" rtlCol="0">
+            <a:spAutoFit/>
+          </a:bodyPr>
+          <a:lstStyle/>
+          <a:p>
+            <a:r>
+              <a:rPr kumimoji="1" lang="ja-JP" altLang="en-US" dirty="0"/>
+              <a:t>手裏剣を投げて遠くの敵を攻撃する</a:t>
+            </a:r>
+            <a:endParaRPr kumimoji="1" lang="en-US" altLang="ja-JP" dirty="0"/>
+          </a:p>
+          <a:p>
+            <a:r>
+              <a:rPr lang="ja-JP" altLang="en-US" dirty="0"/>
+              <a:t>攻撃力は低い</a:t>
+            </a:r>
+            <a:endParaRPr lang="en-US" altLang="ja-JP" dirty="0"/>
+          </a:p>
+        </p:txBody>
+      </p:sp>
+      <p:pic>
+        <p:nvPicPr>
+          <p:cNvPr id="7" name="図 6">
+            <a:extLst>
+              <a:ext uri="{FF2B5EF4-FFF2-40B4-BE49-F238E27FC236}">
+                <a16:creationId xmlns:a16="http://schemas.microsoft.com/office/drawing/2014/main" id="{B495BC0D-57CB-4F53-B9C5-A0E99BEA0209}"/>
+              </a:ext>
+            </a:extLst>
+          </p:cNvPr>
+          <p:cNvPicPr>
+            <a:picLocks noChangeAspect="1"/>
+          </p:cNvPicPr>
+          <p:nvPr/>
+        </p:nvPicPr>
+        <p:blipFill>
+          <a:blip r:embed="rId3">
+            <a:extLst>
+              <a:ext uri="{28A0092B-C50C-407E-A947-70E740481C1C}">
+                <a14:useLocalDpi xmlns:a14="http://schemas.microsoft.com/office/drawing/2010/main" val="0"/>
+              </a:ext>
+            </a:extLst>
+          </a:blip>
+          <a:stretch>
+            <a:fillRect/>
+          </a:stretch>
+        </p:blipFill>
+        <p:spPr>
+          <a:xfrm>
+            <a:off x="-84327" y="1538882"/>
+            <a:ext cx="3174603" cy="2603175"/>
+          </a:xfrm>
+          <a:prstGeom prst="rect">
+            <a:avLst/>
+          </a:prstGeom>
+        </p:spPr>
+      </p:pic>
+      <p:sp>
+        <p:nvSpPr>
+          <p:cNvPr id="6" name="テキスト ボックス 5">
+            <a:extLst>
+              <a:ext uri="{FF2B5EF4-FFF2-40B4-BE49-F238E27FC236}">
+                <a16:creationId xmlns:a16="http://schemas.microsoft.com/office/drawing/2014/main" id="{F4DB8799-3ACE-43C4-857D-F3951D29CE9B}"/>
+              </a:ext>
+            </a:extLst>
+          </p:cNvPr>
+          <p:cNvSpPr txBox="1"/>
+          <p:nvPr/>
+        </p:nvSpPr>
+        <p:spPr>
+          <a:xfrm>
+            <a:off x="5181600" y="0"/>
+            <a:ext cx="4698722" cy="769441"/>
+          </a:xfrm>
+          <a:prstGeom prst="rect">
+            <a:avLst/>
+          </a:prstGeom>
+          <a:noFill/>
+        </p:spPr>
+        <p:txBody>
+          <a:bodyPr wrap="none" rtlCol="0">
+            <a:spAutoFit/>
+          </a:bodyPr>
+          <a:lstStyle/>
+          <a:p>
+            <a:r>
+              <a:rPr kumimoji="1" lang="ja-JP" altLang="en-US" sz="4400" dirty="0"/>
+              <a:t>ー身代わりの術ー</a:t>
+            </a:r>
+          </a:p>
+        </p:txBody>
+      </p:sp>
+      <p:sp>
+        <p:nvSpPr>
+          <p:cNvPr id="8" name="テキスト ボックス 7">
+            <a:extLst>
+              <a:ext uri="{FF2B5EF4-FFF2-40B4-BE49-F238E27FC236}">
+                <a16:creationId xmlns:a16="http://schemas.microsoft.com/office/drawing/2014/main" id="{8FE236E7-A9E9-4CE9-9295-5ACC3C98BDBF}"/>
+              </a:ext>
+            </a:extLst>
+          </p:cNvPr>
+          <p:cNvSpPr txBox="1"/>
+          <p:nvPr/>
+        </p:nvSpPr>
+        <p:spPr>
+          <a:xfrm>
+            <a:off x="5181600" y="769441"/>
+            <a:ext cx="7109639" cy="369332"/>
+          </a:xfrm>
+          <a:prstGeom prst="rect">
+            <a:avLst/>
+          </a:prstGeom>
+          <a:noFill/>
+        </p:spPr>
+        <p:txBody>
+          <a:bodyPr wrap="none" rtlCol="0">
+            <a:spAutoFit/>
+          </a:bodyPr>
+          <a:lstStyle/>
+          <a:p>
+            <a:r>
+              <a:rPr kumimoji="1" lang="ja-JP" altLang="en-US" dirty="0"/>
+              <a:t>敵の攻撃に当たるとき、タイミングよくボタンを押すと回避できる</a:t>
+            </a:r>
+            <a:endParaRPr kumimoji="1" lang="en-US" altLang="ja-JP" dirty="0"/>
+          </a:p>
+        </p:txBody>
+      </p:sp>
+      <p:pic>
+        <p:nvPicPr>
+          <p:cNvPr id="3" name="図 2">
+            <a:extLst>
+              <a:ext uri="{FF2B5EF4-FFF2-40B4-BE49-F238E27FC236}">
+                <a16:creationId xmlns:a16="http://schemas.microsoft.com/office/drawing/2014/main" id="{F87A2027-4862-45B4-BC33-D0B8D1D9DBBA}"/>
+              </a:ext>
+            </a:extLst>
+          </p:cNvPr>
+          <p:cNvPicPr>
+            <a:picLocks noChangeAspect="1"/>
+          </p:cNvPicPr>
+          <p:nvPr/>
+        </p:nvPicPr>
+        <p:blipFill>
+          <a:blip r:embed="rId4">
+            <a:extLst>
+              <a:ext uri="{28A0092B-C50C-407E-A947-70E740481C1C}">
+                <a14:useLocalDpi xmlns:a14="http://schemas.microsoft.com/office/drawing/2010/main" val="0"/>
+              </a:ext>
+            </a:extLst>
+          </a:blip>
+          <a:stretch>
+            <a:fillRect/>
+          </a:stretch>
+        </p:blipFill>
+        <p:spPr>
+          <a:xfrm>
+            <a:off x="5151096" y="4497320"/>
+            <a:ext cx="2282182" cy="2438037"/>
+          </a:xfrm>
+          <a:prstGeom prst="rect">
+            <a:avLst/>
+          </a:prstGeom>
+        </p:spPr>
+      </p:pic>
+      <p:sp>
+        <p:nvSpPr>
+          <p:cNvPr id="9" name="正方形/長方形 8">
+            <a:extLst>
+              <a:ext uri="{FF2B5EF4-FFF2-40B4-BE49-F238E27FC236}">
+                <a16:creationId xmlns:a16="http://schemas.microsoft.com/office/drawing/2014/main" id="{EA6F6158-AC87-47C6-9DA1-21E576A29E2C}"/>
+              </a:ext>
+            </a:extLst>
+          </p:cNvPr>
+          <p:cNvSpPr/>
+          <p:nvPr/>
+        </p:nvSpPr>
+        <p:spPr>
+          <a:xfrm>
+            <a:off x="6292187" y="2518290"/>
+            <a:ext cx="4177760" cy="244250"/>
+          </a:xfrm>
+          <a:prstGeom prst="rect">
+            <a:avLst/>
+          </a:prstGeom>
+          <a:solidFill>
+            <a:srgbClr val="C00000">
+              <a:alpha val="70000"/>
+            </a:srgbClr>
+          </a:solidFill>
+          <a:ln>
+            <a:noFill/>
+          </a:ln>
+        </p:spPr>
+        <p:style>
+          <a:lnRef idx="2">
+            <a:schemeClr val="accent1">
+              <a:shade val="50000"/>
+            </a:schemeClr>
+          </a:lnRef>
+          <a:fillRef idx="1">
+            <a:schemeClr val="accent1"/>
+          </a:fillRef>
+          <a:effectRef idx="0">
+            <a:schemeClr val="accent1"/>
+          </a:effectRef>
+          <a:fontRef idx="minor">
+            <a:schemeClr val="lt1"/>
+          </a:fontRef>
+        </p:style>
+        <p:txBody>
+          <a:bodyPr rtlCol="0" anchor="ctr"/>
+          <a:lstStyle/>
+          <a:p>
+            <a:pPr algn="ctr"/>
+            <a:endParaRPr kumimoji="1" lang="ja-JP" altLang="en-US"/>
+          </a:p>
+        </p:txBody>
+      </p:sp>
+      <p:pic>
+        <p:nvPicPr>
+          <p:cNvPr id="11" name="図 10">
+            <a:extLst>
+              <a:ext uri="{FF2B5EF4-FFF2-40B4-BE49-F238E27FC236}">
+                <a16:creationId xmlns:a16="http://schemas.microsoft.com/office/drawing/2014/main" id="{2299AF6C-45DC-43EF-8F4A-7947B647737B}"/>
+              </a:ext>
+            </a:extLst>
+          </p:cNvPr>
+          <p:cNvPicPr>
+            <a:picLocks noChangeAspect="1"/>
+          </p:cNvPicPr>
+          <p:nvPr/>
+        </p:nvPicPr>
+        <p:blipFill>
+          <a:blip r:embed="rId5">
+            <a:extLst>
+              <a:ext uri="{28A0092B-C50C-407E-A947-70E740481C1C}">
+                <a14:useLocalDpi xmlns:a14="http://schemas.microsoft.com/office/drawing/2010/main" val="0"/>
+              </a:ext>
+            </a:extLst>
+          </a:blip>
+          <a:stretch>
+            <a:fillRect/>
+          </a:stretch>
+        </p:blipFill>
+        <p:spPr>
+          <a:xfrm>
+            <a:off x="9372671" y="1629572"/>
+            <a:ext cx="1950969" cy="1724863"/>
+          </a:xfrm>
+          <a:prstGeom prst="rect">
+            <a:avLst/>
+          </a:prstGeom>
+        </p:spPr>
+      </p:pic>
+      <p:sp>
+        <p:nvSpPr>
+          <p:cNvPr id="12" name="矢印: 下 11">
+            <a:extLst>
+              <a:ext uri="{FF2B5EF4-FFF2-40B4-BE49-F238E27FC236}">
+                <a16:creationId xmlns:a16="http://schemas.microsoft.com/office/drawing/2014/main" id="{FA90FD8E-EAB1-4461-B9C7-EBA6DBD17A85}"/>
+              </a:ext>
+            </a:extLst>
+          </p:cNvPr>
+          <p:cNvSpPr/>
+          <p:nvPr/>
+        </p:nvSpPr>
+        <p:spPr>
+          <a:xfrm>
+            <a:off x="7853082" y="3541059"/>
+            <a:ext cx="1389530" cy="860612"/>
+          </a:xfrm>
+          <a:prstGeom prst="downArrow">
+            <a:avLst/>
+          </a:prstGeom>
+        </p:spPr>
+        <p:style>
+          <a:lnRef idx="2">
+            <a:schemeClr val="accent1">
+              <a:shade val="50000"/>
+            </a:schemeClr>
+          </a:lnRef>
+          <a:fillRef idx="1">
+            <a:schemeClr val="accent1"/>
+          </a:fillRef>
+          <a:effectRef idx="0">
+            <a:schemeClr val="accent1"/>
+          </a:effectRef>
+          <a:fontRef idx="minor">
+            <a:schemeClr val="lt1"/>
+          </a:fontRef>
+        </p:style>
+        <p:txBody>
+          <a:bodyPr rtlCol="0" anchor="ctr"/>
+          <a:lstStyle/>
+          <a:p>
+            <a:pPr algn="ctr"/>
+            <a:endParaRPr kumimoji="1" lang="ja-JP" altLang="en-US"/>
+          </a:p>
+        </p:txBody>
+      </p:sp>
+      <p:pic>
+        <p:nvPicPr>
+          <p:cNvPr id="13" name="図 12">
+            <a:extLst>
+              <a:ext uri="{FF2B5EF4-FFF2-40B4-BE49-F238E27FC236}">
+                <a16:creationId xmlns:a16="http://schemas.microsoft.com/office/drawing/2014/main" id="{56B4ED2E-C776-4391-A2EA-0C1BD39AE147}"/>
+              </a:ext>
+            </a:extLst>
+          </p:cNvPr>
+          <p:cNvPicPr>
+            <a:picLocks noChangeAspect="1"/>
+          </p:cNvPicPr>
+          <p:nvPr/>
+        </p:nvPicPr>
+        <p:blipFill>
+          <a:blip r:embed="rId6">
+            <a:extLst>
+              <a:ext uri="{28A0092B-C50C-407E-A947-70E740481C1C}">
+                <a14:useLocalDpi xmlns:a14="http://schemas.microsoft.com/office/drawing/2010/main" val="0"/>
+              </a:ext>
+            </a:extLst>
+          </a:blip>
+          <a:stretch>
+            <a:fillRect/>
+          </a:stretch>
+        </p:blipFill>
+        <p:spPr>
+          <a:xfrm flipH="1">
+            <a:off x="9494462" y="5040702"/>
+            <a:ext cx="1950969" cy="1817298"/>
+          </a:xfrm>
+          <a:prstGeom prst="rect">
+            <a:avLst/>
+          </a:prstGeom>
+        </p:spPr>
+      </p:pic>
+    </p:spTree>
+    <p:extLst>
+      <p:ext uri="{BB962C8B-B14F-4D97-AF65-F5344CB8AC3E}">
+        <p14:creationId xmlns:p14="http://schemas.microsoft.com/office/powerpoint/2010/main" val="472003385"/>
+      </p:ext>
+    </p:extLst>
+  </p:cSld>
+  <p:clrMapOvr>
+    <a:masterClrMapping/>
+  </p:clrMapOvr>
+</p:sld>
+</file>
+
+<file path=ppt/slides/slide4.xml><?xml version="1.0" encoding="utf-8"?>
+<p:sld xmlns:a="http://schemas.openxmlformats.org/drawingml/2006/main" xmlns:r="http://schemas.openxmlformats.org/officeDocument/2006/relationships" xmlns:p="http://schemas.openxmlformats.org/presentationml/2006/main">
+  <p:cSld>
+    <p:spTree>
+      <p:nvGrpSpPr>
+        <p:cNvPr id="1" name=""/>
+        <p:cNvGrpSpPr/>
+        <p:nvPr/>
+      </p:nvGrpSpPr>
+      <p:grpSpPr>
+        <a:xfrm>
+          <a:off x="0" y="0"/>
+          <a:ext cx="0" cy="0"/>
+          <a:chOff x="0" y="0"/>
+          <a:chExt cx="0" cy="0"/>
+        </a:xfrm>
+      </p:grpSpPr>
+      <p:sp>
+        <p:nvSpPr>
+          <p:cNvPr id="4" name="テキスト ボックス 3">
+            <a:extLst>
+              <a:ext uri="{FF2B5EF4-FFF2-40B4-BE49-F238E27FC236}">
+                <a16:creationId xmlns:a16="http://schemas.microsoft.com/office/drawing/2014/main" id="{40B13EE1-46E8-4190-A176-E9B052C35E9C}"/>
+              </a:ext>
+            </a:extLst>
+          </p:cNvPr>
+          <p:cNvSpPr txBox="1"/>
+          <p:nvPr/>
+        </p:nvSpPr>
+        <p:spPr>
+          <a:xfrm>
+            <a:off x="0" y="0"/>
+            <a:ext cx="4134465" cy="769441"/>
+          </a:xfrm>
+          <a:prstGeom prst="rect">
+            <a:avLst/>
+          </a:prstGeom>
+          <a:noFill/>
+        </p:spPr>
+        <p:txBody>
+          <a:bodyPr wrap="none" rtlCol="0">
+            <a:spAutoFit/>
+          </a:bodyPr>
+          <a:lstStyle/>
+          <a:p>
+            <a:r>
+              <a:rPr kumimoji="1" lang="ja-JP" altLang="en-US" sz="4400" dirty="0"/>
+              <a:t>ー壁ジャンプー</a:t>
+            </a:r>
+          </a:p>
+        </p:txBody>
+      </p:sp>
+      <p:sp>
+        <p:nvSpPr>
+          <p:cNvPr id="5" name="テキスト ボックス 4">
+            <a:extLst>
+              <a:ext uri="{FF2B5EF4-FFF2-40B4-BE49-F238E27FC236}">
+                <a16:creationId xmlns:a16="http://schemas.microsoft.com/office/drawing/2014/main" id="{FD421848-1DF0-40D7-B032-884FB810EA68}"/>
+              </a:ext>
+            </a:extLst>
+          </p:cNvPr>
+          <p:cNvSpPr txBox="1"/>
+          <p:nvPr/>
+        </p:nvSpPr>
+        <p:spPr>
+          <a:xfrm>
+            <a:off x="0" y="769441"/>
+            <a:ext cx="9879628" cy="646331"/>
+          </a:xfrm>
+          <a:prstGeom prst="rect">
+            <a:avLst/>
+          </a:prstGeom>
+          <a:noFill/>
+        </p:spPr>
+        <p:txBody>
+          <a:bodyPr wrap="none" rtlCol="0">
+            <a:spAutoFit/>
+          </a:bodyPr>
+          <a:lstStyle/>
+          <a:p>
+            <a:r>
+              <a:rPr lang="ja-JP" altLang="en-US" dirty="0"/>
+              <a:t>プレイヤーが壁に接触した状態でジャンプ入力を行うと、壁を蹴って反対方向へ跳び上がる。</a:t>
+            </a:r>
+            <a:endParaRPr lang="en-US" altLang="ja-JP" dirty="0"/>
+          </a:p>
+          <a:p>
+            <a:endParaRPr lang="en-US" altLang="ja-JP" dirty="0"/>
+          </a:p>
+        </p:txBody>
+      </p:sp>
+      <p:sp>
+        <p:nvSpPr>
+          <p:cNvPr id="6" name="正方形/長方形 5">
+            <a:extLst>
+              <a:ext uri="{FF2B5EF4-FFF2-40B4-BE49-F238E27FC236}">
+                <a16:creationId xmlns:a16="http://schemas.microsoft.com/office/drawing/2014/main" id="{80CB0C25-677E-4668-8F2A-611D57B10DBB}"/>
+              </a:ext>
+            </a:extLst>
+          </p:cNvPr>
+          <p:cNvSpPr/>
+          <p:nvPr/>
+        </p:nvSpPr>
+        <p:spPr>
+          <a:xfrm>
+            <a:off x="1" y="1712686"/>
+            <a:ext cx="769256" cy="5145314"/>
+          </a:xfrm>
+          <a:prstGeom prst="rect">
+            <a:avLst/>
+          </a:prstGeom>
+          <a:solidFill>
+            <a:schemeClr val="tx1"/>
+          </a:solidFill>
+          <a:ln>
+            <a:solidFill>
+              <a:schemeClr val="tx1"/>
+            </a:solidFill>
+          </a:ln>
+        </p:spPr>
+        <p:style>
+          <a:lnRef idx="2">
+            <a:schemeClr val="accent1">
+              <a:shade val="50000"/>
+            </a:schemeClr>
+          </a:lnRef>
+          <a:fillRef idx="1">
+            <a:schemeClr val="accent1"/>
+          </a:fillRef>
+          <a:effectRef idx="0">
+            <a:schemeClr val="accent1"/>
+          </a:effectRef>
+          <a:fontRef idx="minor">
+            <a:schemeClr val="lt1"/>
+          </a:fontRef>
+        </p:style>
+        <p:txBody>
+          <a:bodyPr rtlCol="0" anchor="ctr"/>
+          <a:lstStyle/>
+          <a:p>
+            <a:pPr algn="ctr"/>
+            <a:endParaRPr kumimoji="1" lang="ja-JP" altLang="en-US"/>
+          </a:p>
+        </p:txBody>
+      </p:sp>
+      <p:sp>
+        <p:nvSpPr>
+          <p:cNvPr id="9" name="テキスト ボックス 8">
+            <a:extLst>
+              <a:ext uri="{FF2B5EF4-FFF2-40B4-BE49-F238E27FC236}">
+                <a16:creationId xmlns:a16="http://schemas.microsoft.com/office/drawing/2014/main" id="{8C062F06-CEE3-4819-9898-D578CF3225BB}"/>
+              </a:ext>
+            </a:extLst>
+          </p:cNvPr>
+          <p:cNvSpPr txBox="1"/>
+          <p:nvPr/>
+        </p:nvSpPr>
+        <p:spPr>
+          <a:xfrm>
+            <a:off x="705320" y="5145314"/>
+            <a:ext cx="2723823" cy="369332"/>
+          </a:xfrm>
+          <a:prstGeom prst="rect">
+            <a:avLst/>
+          </a:prstGeom>
+          <a:noFill/>
+        </p:spPr>
+        <p:txBody>
+          <a:bodyPr wrap="none" rtlCol="0">
+            <a:spAutoFit/>
+          </a:bodyPr>
+          <a:lstStyle/>
+          <a:p>
+            <a:r>
+              <a:rPr kumimoji="1" lang="ja-JP" altLang="en-US" dirty="0"/>
+              <a:t>この状態でジャンプ入力</a:t>
+            </a:r>
+          </a:p>
+        </p:txBody>
+      </p:sp>
+      <p:sp>
+        <p:nvSpPr>
+          <p:cNvPr id="10" name="矢印: 右 9">
+            <a:extLst>
+              <a:ext uri="{FF2B5EF4-FFF2-40B4-BE49-F238E27FC236}">
+                <a16:creationId xmlns:a16="http://schemas.microsoft.com/office/drawing/2014/main" id="{B2503489-15EE-4CF9-821E-A96A40F9276A}"/>
+              </a:ext>
+            </a:extLst>
+          </p:cNvPr>
+          <p:cNvSpPr/>
+          <p:nvPr/>
+        </p:nvSpPr>
+        <p:spPr>
+          <a:xfrm>
+            <a:off x="3038443" y="3384970"/>
+            <a:ext cx="1901371" cy="1466429"/>
+          </a:xfrm>
+          <a:prstGeom prst="rightArrow">
+            <a:avLst/>
+          </a:prstGeom>
+        </p:spPr>
+        <p:style>
+          <a:lnRef idx="2">
+            <a:schemeClr val="accent1">
+              <a:shade val="50000"/>
+            </a:schemeClr>
+          </a:lnRef>
+          <a:fillRef idx="1">
+            <a:schemeClr val="accent1"/>
+          </a:fillRef>
+          <a:effectRef idx="0">
+            <a:schemeClr val="accent1"/>
+          </a:effectRef>
+          <a:fontRef idx="minor">
+            <a:schemeClr val="lt1"/>
+          </a:fontRef>
+        </p:style>
+        <p:txBody>
+          <a:bodyPr rtlCol="0" anchor="ctr"/>
+          <a:lstStyle/>
+          <a:p>
+            <a:pPr algn="ctr"/>
+            <a:endParaRPr kumimoji="1" lang="ja-JP" altLang="en-US"/>
+          </a:p>
+        </p:txBody>
+      </p:sp>
+      <p:sp>
+        <p:nvSpPr>
+          <p:cNvPr id="11" name="正方形/長方形 10">
+            <a:extLst>
+              <a:ext uri="{FF2B5EF4-FFF2-40B4-BE49-F238E27FC236}">
+                <a16:creationId xmlns:a16="http://schemas.microsoft.com/office/drawing/2014/main" id="{681BAC70-B423-44A0-9114-3914B0E03816}"/>
+              </a:ext>
+            </a:extLst>
+          </p:cNvPr>
+          <p:cNvSpPr/>
+          <p:nvPr/>
+        </p:nvSpPr>
+        <p:spPr>
+          <a:xfrm>
+            <a:off x="5218279" y="1712686"/>
+            <a:ext cx="769256" cy="5145314"/>
+          </a:xfrm>
+          <a:prstGeom prst="rect">
+            <a:avLst/>
+          </a:prstGeom>
+          <a:solidFill>
+            <a:schemeClr val="tx1"/>
+          </a:solidFill>
+          <a:ln>
+            <a:solidFill>
+              <a:schemeClr val="tx1"/>
+            </a:solidFill>
+          </a:ln>
+        </p:spPr>
+        <p:style>
+          <a:lnRef idx="2">
+            <a:schemeClr val="accent1">
+              <a:shade val="50000"/>
+            </a:schemeClr>
+          </a:lnRef>
+          <a:fillRef idx="1">
+            <a:schemeClr val="accent1"/>
+          </a:fillRef>
+          <a:effectRef idx="0">
+            <a:schemeClr val="accent1"/>
+          </a:effectRef>
+          <a:fontRef idx="minor">
+            <a:schemeClr val="lt1"/>
+          </a:fontRef>
+        </p:style>
+        <p:txBody>
+          <a:bodyPr rtlCol="0" anchor="ctr"/>
+          <a:lstStyle/>
+          <a:p>
+            <a:pPr algn="ctr"/>
+            <a:endParaRPr kumimoji="1" lang="ja-JP" altLang="en-US"/>
+          </a:p>
+        </p:txBody>
+      </p:sp>
+      <p:pic>
+        <p:nvPicPr>
+          <p:cNvPr id="15" name="図 14">
+            <a:extLst>
+              <a:ext uri="{FF2B5EF4-FFF2-40B4-BE49-F238E27FC236}">
+                <a16:creationId xmlns:a16="http://schemas.microsoft.com/office/drawing/2014/main" id="{0C1ECDC2-CB10-4DD8-A8DC-A89625E0A6D0}"/>
+              </a:ext>
+            </a:extLst>
+          </p:cNvPr>
+          <p:cNvPicPr>
+            <a:picLocks noChangeAspect="1"/>
+          </p:cNvPicPr>
+          <p:nvPr/>
+        </p:nvPicPr>
+        <p:blipFill>
+          <a:blip r:embed="rId2">
+            <a:extLst>
+              <a:ext uri="{28A0092B-C50C-407E-A947-70E740481C1C}">
+                <a14:useLocalDpi xmlns:a14="http://schemas.microsoft.com/office/drawing/2010/main" val="0"/>
+              </a:ext>
+            </a:extLst>
+          </a:blip>
+          <a:stretch>
+            <a:fillRect/>
+          </a:stretch>
+        </p:blipFill>
+        <p:spPr>
+          <a:xfrm>
+            <a:off x="6584884" y="1857828"/>
+            <a:ext cx="1849529" cy="1951471"/>
+          </a:xfrm>
+          <a:prstGeom prst="rect">
+            <a:avLst/>
+          </a:prstGeom>
+        </p:spPr>
+      </p:pic>
+      <p:pic>
+        <p:nvPicPr>
+          <p:cNvPr id="17" name="図 16">
+            <a:extLst>
+              <a:ext uri="{FF2B5EF4-FFF2-40B4-BE49-F238E27FC236}">
+                <a16:creationId xmlns:a16="http://schemas.microsoft.com/office/drawing/2014/main" id="{831FA3C7-1E1F-4CC3-93D6-47E015317E35}"/>
+              </a:ext>
+            </a:extLst>
+          </p:cNvPr>
+          <p:cNvPicPr>
+            <a:picLocks noChangeAspect="1"/>
+          </p:cNvPicPr>
+          <p:nvPr/>
+        </p:nvPicPr>
+        <p:blipFill>
+          <a:blip r:embed="rId3">
+            <a:extLst>
+              <a:ext uri="{28A0092B-C50C-407E-A947-70E740481C1C}">
+                <a14:useLocalDpi xmlns:a14="http://schemas.microsoft.com/office/drawing/2010/main" val="0"/>
+              </a:ext>
+            </a:extLst>
+          </a:blip>
+          <a:stretch>
+            <a:fillRect/>
+          </a:stretch>
+        </p:blipFill>
+        <p:spPr>
+          <a:xfrm>
+            <a:off x="-439886" y="2556084"/>
+            <a:ext cx="3124200" cy="3124200"/>
+          </a:xfrm>
+          <a:prstGeom prst="rect">
+            <a:avLst/>
+          </a:prstGeom>
+        </p:spPr>
+      </p:pic>
+    </p:spTree>
+    <p:extLst>
+      <p:ext uri="{BB962C8B-B14F-4D97-AF65-F5344CB8AC3E}">
+        <p14:creationId xmlns:p14="http://schemas.microsoft.com/office/powerpoint/2010/main" val="1369157224"/>
+      </p:ext>
+    </p:extLst>
+  </p:cSld>
+  <p:clrMapOvr>
+    <a:masterClrMapping/>
+  </p:clrMapOvr>
+</p:sld>
+</file>
+
+<file path=ppt/slides/slide5.xml><?xml version="1.0" encoding="utf-8"?>
+<p:sld xmlns:a="http://schemas.openxmlformats.org/drawingml/2006/main" xmlns:r="http://schemas.openxmlformats.org/officeDocument/2006/relationships" xmlns:p="http://schemas.openxmlformats.org/presentationml/2006/main">
+  <p:cSld>
+    <p:spTree>
+      <p:nvGrpSpPr>
+        <p:cNvPr id="1" name=""/>
+        <p:cNvGrpSpPr/>
+        <p:nvPr/>
+      </p:nvGrpSpPr>
+      <p:grpSpPr>
+        <a:xfrm>
+          <a:off x="0" y="0"/>
+          <a:ext cx="0" cy="0"/>
+          <a:chOff x="0" y="0"/>
+          <a:chExt cx="0" cy="0"/>
+        </a:xfrm>
+      </p:grpSpPr>
+      <p:sp>
+        <p:nvSpPr>
+          <p:cNvPr id="4" name="テキスト ボックス 3">
+            <a:extLst>
+              <a:ext uri="{FF2B5EF4-FFF2-40B4-BE49-F238E27FC236}">
+                <a16:creationId xmlns:a16="http://schemas.microsoft.com/office/drawing/2014/main" id="{663915C1-1EBB-4D3C-B65C-3603D7F4CE41}"/>
+              </a:ext>
+            </a:extLst>
+          </p:cNvPr>
+          <p:cNvSpPr txBox="1"/>
+          <p:nvPr/>
+        </p:nvSpPr>
+        <p:spPr>
+          <a:xfrm>
+            <a:off x="0" y="0"/>
+            <a:ext cx="4286251" cy="769441"/>
+          </a:xfrm>
+          <a:prstGeom prst="rect">
+            <a:avLst/>
+          </a:prstGeom>
+          <a:noFill/>
+        </p:spPr>
+        <p:txBody>
+          <a:bodyPr wrap="square" rtlCol="0">
+            <a:spAutoFit/>
+          </a:bodyPr>
+          <a:lstStyle/>
+          <a:p>
+            <a:r>
+              <a:rPr kumimoji="1" lang="ja-JP" altLang="en-US" sz="4400" dirty="0"/>
+              <a:t>ー死亡判定ー</a:t>
+            </a:r>
+          </a:p>
+        </p:txBody>
+      </p:sp>
+      <p:sp>
+        <p:nvSpPr>
+          <p:cNvPr id="5" name="テキスト ボックス 4">
+            <a:extLst>
+              <a:ext uri="{FF2B5EF4-FFF2-40B4-BE49-F238E27FC236}">
+                <a16:creationId xmlns:a16="http://schemas.microsoft.com/office/drawing/2014/main" id="{01EE4625-E781-4F5D-B48A-8D3A2E00C530}"/>
+              </a:ext>
+            </a:extLst>
+          </p:cNvPr>
+          <p:cNvSpPr txBox="1"/>
+          <p:nvPr/>
+        </p:nvSpPr>
+        <p:spPr>
+          <a:xfrm>
+            <a:off x="204132" y="726758"/>
+            <a:ext cx="5032147" cy="646331"/>
+          </a:xfrm>
+          <a:prstGeom prst="rect">
+            <a:avLst/>
+          </a:prstGeom>
+          <a:noFill/>
+        </p:spPr>
+        <p:txBody>
+          <a:bodyPr wrap="none" rtlCol="0">
+            <a:spAutoFit/>
+          </a:bodyPr>
+          <a:lstStyle/>
+          <a:p>
+            <a:r>
+              <a:rPr kumimoji="1" lang="ja-JP" altLang="en-US" dirty="0"/>
+              <a:t>落下死</a:t>
+            </a:r>
+            <a:r>
+              <a:rPr lang="en-US" altLang="ja-JP" dirty="0"/>
+              <a:t>	</a:t>
+            </a:r>
+            <a:r>
+              <a:rPr lang="ja-JP" altLang="en-US" dirty="0"/>
+              <a:t>　トゲ</a:t>
+            </a:r>
+            <a:endParaRPr lang="en-US" altLang="ja-JP" dirty="0"/>
+          </a:p>
+          <a:p>
+            <a:r>
+              <a:rPr kumimoji="1" lang="ja-JP" altLang="en-US" dirty="0"/>
+              <a:t>敵の攻撃　ダッシュ状態でないときの敵の接触</a:t>
+            </a:r>
+          </a:p>
+        </p:txBody>
+      </p:sp>
+      <p:sp>
+        <p:nvSpPr>
+          <p:cNvPr id="7" name="テキスト ボックス 6">
+            <a:extLst>
+              <a:ext uri="{FF2B5EF4-FFF2-40B4-BE49-F238E27FC236}">
+                <a16:creationId xmlns:a16="http://schemas.microsoft.com/office/drawing/2014/main" id="{A2A67A99-A783-4540-8159-A022FC2423BB}"/>
+              </a:ext>
+            </a:extLst>
+          </p:cNvPr>
+          <p:cNvSpPr txBox="1"/>
+          <p:nvPr/>
+        </p:nvSpPr>
+        <p:spPr>
+          <a:xfrm>
+            <a:off x="0" y="2099847"/>
+            <a:ext cx="9693679" cy="1200329"/>
+          </a:xfrm>
+          <a:prstGeom prst="rect">
+            <a:avLst/>
+          </a:prstGeom>
+          <a:noFill/>
+        </p:spPr>
+        <p:txBody>
+          <a:bodyPr wrap="none" rtlCol="0">
+            <a:spAutoFit/>
+          </a:bodyPr>
+          <a:lstStyle/>
+          <a:p>
+            <a:r>
+              <a:rPr kumimoji="1" lang="ja-JP" altLang="en-US" sz="2400" dirty="0"/>
+              <a:t>ダッシュ状態の</a:t>
+            </a:r>
+            <a:r>
+              <a:rPr kumimoji="1" lang="en-US" altLang="ja-JP" sz="2400" dirty="0"/>
+              <a:t>Player</a:t>
+            </a:r>
+            <a:r>
+              <a:rPr kumimoji="1" lang="ja-JP" altLang="en-US" sz="2400" dirty="0"/>
+              <a:t>が敵と接触することで「行動待機状態」になる</a:t>
+            </a:r>
+            <a:endParaRPr kumimoji="1" lang="en-US" altLang="ja-JP" sz="2400" dirty="0"/>
+          </a:p>
+          <a:p>
+            <a:r>
+              <a:rPr kumimoji="1" lang="ja-JP" altLang="en-US" sz="2400" dirty="0"/>
+              <a:t>この「行動待機状態」になるともう一度ダッシュが可能になる</a:t>
+            </a:r>
+            <a:endParaRPr kumimoji="1" lang="en-US" altLang="ja-JP" sz="2400" dirty="0"/>
+          </a:p>
+          <a:p>
+            <a:r>
+              <a:rPr lang="ja-JP" altLang="en-US" sz="2400" dirty="0"/>
+              <a:t>「行動待機状態」でダッシュをすることで敵が死ぬ</a:t>
+            </a:r>
+            <a:endParaRPr lang="en-US" altLang="ja-JP" sz="2400" dirty="0"/>
+          </a:p>
+        </p:txBody>
+      </p:sp>
+      <p:pic>
+        <p:nvPicPr>
+          <p:cNvPr id="8" name="図 7">
+            <a:extLst>
+              <a:ext uri="{FF2B5EF4-FFF2-40B4-BE49-F238E27FC236}">
+                <a16:creationId xmlns:a16="http://schemas.microsoft.com/office/drawing/2014/main" id="{82524A84-6215-4ACB-B1B5-5C1CF7030C3D}"/>
+              </a:ext>
+            </a:extLst>
+          </p:cNvPr>
+          <p:cNvPicPr>
+            <a:picLocks noChangeAspect="1"/>
+          </p:cNvPicPr>
+          <p:nvPr/>
+        </p:nvPicPr>
+        <p:blipFill>
+          <a:blip r:embed="rId2">
+            <a:extLst>
+              <a:ext uri="{28A0092B-C50C-407E-A947-70E740481C1C}">
+                <a14:useLocalDpi xmlns:a14="http://schemas.microsoft.com/office/drawing/2010/main" val="0"/>
+              </a:ext>
+            </a:extLst>
+          </a:blip>
+          <a:stretch>
+            <a:fillRect/>
+          </a:stretch>
+        </p:blipFill>
+        <p:spPr>
+          <a:xfrm>
+            <a:off x="1306135" y="3713248"/>
+            <a:ext cx="2720880" cy="2048662"/>
+          </a:xfrm>
+          <a:prstGeom prst="rect">
+            <a:avLst/>
+          </a:prstGeom>
+        </p:spPr>
+      </p:pic>
+      <p:pic>
+        <p:nvPicPr>
+          <p:cNvPr id="9" name="図 8">
+            <a:extLst>
+              <a:ext uri="{FF2B5EF4-FFF2-40B4-BE49-F238E27FC236}">
+                <a16:creationId xmlns:a16="http://schemas.microsoft.com/office/drawing/2014/main" id="{64EBB7A2-7005-4711-9C94-8EACC6CF336E}"/>
+              </a:ext>
+            </a:extLst>
+          </p:cNvPr>
+          <p:cNvPicPr>
+            <a:picLocks noChangeAspect="1"/>
+          </p:cNvPicPr>
+          <p:nvPr/>
+        </p:nvPicPr>
+        <p:blipFill>
+          <a:blip r:embed="rId3">
+            <a:extLst>
+              <a:ext uri="{28A0092B-C50C-407E-A947-70E740481C1C}">
+                <a14:useLocalDpi xmlns:a14="http://schemas.microsoft.com/office/drawing/2010/main" val="0"/>
+              </a:ext>
+            </a:extLst>
+          </a:blip>
+          <a:stretch>
+            <a:fillRect/>
+          </a:stretch>
+        </p:blipFill>
+        <p:spPr>
+          <a:xfrm>
+            <a:off x="441789" y="4106753"/>
+            <a:ext cx="1728692" cy="1554769"/>
+          </a:xfrm>
+          <a:prstGeom prst="rect">
+            <a:avLst/>
+          </a:prstGeom>
+        </p:spPr>
+      </p:pic>
+      <p:pic>
+        <p:nvPicPr>
+          <p:cNvPr id="10" name="図 9">
+            <a:extLst>
+              <a:ext uri="{FF2B5EF4-FFF2-40B4-BE49-F238E27FC236}">
+                <a16:creationId xmlns:a16="http://schemas.microsoft.com/office/drawing/2014/main" id="{3BF96E96-784E-4097-92CF-1B60C7AB4F8D}"/>
+              </a:ext>
+            </a:extLst>
+          </p:cNvPr>
+          <p:cNvPicPr>
+            <a:picLocks noChangeAspect="1"/>
+          </p:cNvPicPr>
+          <p:nvPr/>
+        </p:nvPicPr>
+        <p:blipFill>
+          <a:blip r:embed="rId2">
+            <a:extLst>
+              <a:ext uri="{28A0092B-C50C-407E-A947-70E740481C1C}">
+                <a14:useLocalDpi xmlns:a14="http://schemas.microsoft.com/office/drawing/2010/main" val="0"/>
+              </a:ext>
+            </a:extLst>
+          </a:blip>
+          <a:stretch>
+            <a:fillRect/>
+          </a:stretch>
+        </p:blipFill>
+        <p:spPr>
+          <a:xfrm>
+            <a:off x="4194198" y="3713248"/>
+            <a:ext cx="2720880" cy="2048662"/>
+          </a:xfrm>
+          <a:prstGeom prst="rect">
+            <a:avLst/>
+          </a:prstGeom>
+        </p:spPr>
+      </p:pic>
+      <p:pic>
+        <p:nvPicPr>
+          <p:cNvPr id="11" name="図 10">
+            <a:extLst>
+              <a:ext uri="{FF2B5EF4-FFF2-40B4-BE49-F238E27FC236}">
+                <a16:creationId xmlns:a16="http://schemas.microsoft.com/office/drawing/2014/main" id="{E435A3E7-E9FC-4AD5-8F6F-43EDDBC7C4DA}"/>
+              </a:ext>
+            </a:extLst>
+          </p:cNvPr>
+          <p:cNvPicPr>
+            <a:picLocks noChangeAspect="1"/>
+          </p:cNvPicPr>
+          <p:nvPr/>
+        </p:nvPicPr>
+        <p:blipFill>
+          <a:blip r:embed="rId4">
+            <a:extLst>
+              <a:ext uri="{28A0092B-C50C-407E-A947-70E740481C1C}">
+                <a14:useLocalDpi xmlns:a14="http://schemas.microsoft.com/office/drawing/2010/main" val="0"/>
+              </a:ext>
+            </a:extLst>
+          </a:blip>
+          <a:stretch>
+            <a:fillRect/>
+          </a:stretch>
+        </p:blipFill>
+        <p:spPr>
+          <a:xfrm>
+            <a:off x="4027015" y="3656635"/>
+            <a:ext cx="2460811" cy="2460811"/>
+          </a:xfrm>
+          <a:prstGeom prst="rect">
+            <a:avLst/>
+          </a:prstGeom>
+        </p:spPr>
+      </p:pic>
+      <p:sp>
+        <p:nvSpPr>
+          <p:cNvPr id="12" name="テキスト ボックス 11">
+            <a:extLst>
+              <a:ext uri="{FF2B5EF4-FFF2-40B4-BE49-F238E27FC236}">
+                <a16:creationId xmlns:a16="http://schemas.microsoft.com/office/drawing/2014/main" id="{AD1F8E21-7F40-42C8-B398-ADD7CC411B63}"/>
+              </a:ext>
+            </a:extLst>
+          </p:cNvPr>
+          <p:cNvSpPr txBox="1"/>
+          <p:nvPr/>
+        </p:nvSpPr>
+        <p:spPr>
+          <a:xfrm>
+            <a:off x="4468094" y="5531077"/>
+            <a:ext cx="4185761" cy="1200329"/>
+          </a:xfrm>
+          <a:prstGeom prst="rect">
+            <a:avLst/>
+          </a:prstGeom>
+          <a:noFill/>
+        </p:spPr>
+        <p:txBody>
+          <a:bodyPr wrap="none" rtlCol="0">
+            <a:spAutoFit/>
+          </a:bodyPr>
+          <a:lstStyle/>
+          <a:p>
+            <a:r>
+              <a:rPr lang="ja-JP" altLang="en-US" sz="2400" dirty="0"/>
+              <a:t>行動待機状態</a:t>
+            </a:r>
+            <a:endParaRPr lang="en-US" altLang="ja-JP" sz="2400" dirty="0"/>
+          </a:p>
+          <a:p>
+            <a:r>
+              <a:rPr kumimoji="1" lang="ja-JP" altLang="en-US" sz="2400" dirty="0"/>
+              <a:t>この状態では敵は攻撃しない</a:t>
+            </a:r>
+            <a:endParaRPr kumimoji="1" lang="en-US" altLang="ja-JP" sz="2400" dirty="0"/>
+          </a:p>
+          <a:p>
+            <a:r>
+              <a:rPr lang="en-US" altLang="ja-JP" sz="2400" dirty="0"/>
+              <a:t>Player</a:t>
+            </a:r>
+            <a:r>
+              <a:rPr lang="ja-JP" altLang="en-US" sz="2400" dirty="0"/>
+              <a:t>のダッシュが回復</a:t>
+            </a:r>
+            <a:endParaRPr kumimoji="1" lang="ja-JP" altLang="en-US" sz="2400" dirty="0"/>
+          </a:p>
+        </p:txBody>
+      </p:sp>
+      <p:pic>
+        <p:nvPicPr>
+          <p:cNvPr id="13" name="図 12">
+            <a:extLst>
+              <a:ext uri="{FF2B5EF4-FFF2-40B4-BE49-F238E27FC236}">
+                <a16:creationId xmlns:a16="http://schemas.microsoft.com/office/drawing/2014/main" id="{B550E5D0-44E5-4322-8EB6-5E831CDF1C57}"/>
+              </a:ext>
+            </a:extLst>
+          </p:cNvPr>
+          <p:cNvPicPr>
+            <a:picLocks noChangeAspect="1"/>
+          </p:cNvPicPr>
+          <p:nvPr/>
+        </p:nvPicPr>
+        <p:blipFill>
+          <a:blip r:embed="rId3">
+            <a:extLst>
+              <a:ext uri="{28A0092B-C50C-407E-A947-70E740481C1C}">
+                <a14:useLocalDpi xmlns:a14="http://schemas.microsoft.com/office/drawing/2010/main" val="0"/>
+              </a:ext>
+            </a:extLst>
+          </a:blip>
+          <a:stretch>
+            <a:fillRect/>
+          </a:stretch>
+        </p:blipFill>
+        <p:spPr>
+          <a:xfrm>
+            <a:off x="10006240" y="3960194"/>
+            <a:ext cx="1728692" cy="1554769"/>
+          </a:xfrm>
+          <a:prstGeom prst="rect">
+            <a:avLst/>
+          </a:prstGeom>
+        </p:spPr>
+      </p:pic>
+      <p:pic>
+        <p:nvPicPr>
+          <p:cNvPr id="14" name="図 13">
+            <a:extLst>
+              <a:ext uri="{FF2B5EF4-FFF2-40B4-BE49-F238E27FC236}">
+                <a16:creationId xmlns:a16="http://schemas.microsoft.com/office/drawing/2014/main" id="{94CA9B86-1EDE-49DF-B738-803C8EEAE057}"/>
+              </a:ext>
+            </a:extLst>
+          </p:cNvPr>
+          <p:cNvPicPr>
+            <a:picLocks noChangeAspect="1"/>
+          </p:cNvPicPr>
+          <p:nvPr/>
+        </p:nvPicPr>
+        <p:blipFill>
+          <a:blip r:embed="rId5">
+            <a:extLst>
+              <a:ext uri="{28A0092B-C50C-407E-A947-70E740481C1C}">
+                <a14:useLocalDpi xmlns:a14="http://schemas.microsoft.com/office/drawing/2010/main" val="0"/>
+              </a:ext>
+            </a:extLst>
+          </a:blip>
+          <a:stretch>
+            <a:fillRect/>
+          </a:stretch>
+        </p:blipFill>
+        <p:spPr>
+          <a:xfrm>
+            <a:off x="8189178" y="4015226"/>
+            <a:ext cx="1921011" cy="1499737"/>
+          </a:xfrm>
+          <a:prstGeom prst="rect">
+            <a:avLst/>
+          </a:prstGeom>
+        </p:spPr>
+      </p:pic>
+      <p:sp>
+        <p:nvSpPr>
+          <p:cNvPr id="15" name="テキスト ボックス 14">
+            <a:extLst>
+              <a:ext uri="{FF2B5EF4-FFF2-40B4-BE49-F238E27FC236}">
+                <a16:creationId xmlns:a16="http://schemas.microsoft.com/office/drawing/2014/main" id="{A88430D7-C0A0-4A86-89C2-B99B0208DD2C}"/>
+              </a:ext>
+            </a:extLst>
+          </p:cNvPr>
+          <p:cNvSpPr txBox="1"/>
+          <p:nvPr/>
+        </p:nvSpPr>
+        <p:spPr>
+          <a:xfrm>
+            <a:off x="-108629" y="1390076"/>
+            <a:ext cx="5702605" cy="769441"/>
+          </a:xfrm>
+          <a:prstGeom prst="rect">
+            <a:avLst/>
+          </a:prstGeom>
+          <a:noFill/>
+        </p:spPr>
+        <p:txBody>
+          <a:bodyPr wrap="square" rtlCol="0">
+            <a:spAutoFit/>
+          </a:bodyPr>
+          <a:lstStyle/>
+          <a:p>
+            <a:r>
+              <a:rPr kumimoji="1" lang="ja-JP" altLang="en-US" sz="4400" dirty="0"/>
+              <a:t>ー</a:t>
+            </a:r>
+            <a:r>
+              <a:rPr lang="ja-JP" altLang="en-US" sz="4400" dirty="0"/>
+              <a:t>ダッシュ攻撃</a:t>
+            </a:r>
+            <a:r>
+              <a:rPr kumimoji="1" lang="ja-JP" altLang="en-US" sz="4400" dirty="0"/>
+              <a:t>ー</a:t>
+            </a:r>
+          </a:p>
+        </p:txBody>
+      </p:sp>
+    </p:spTree>
+    <p:extLst>
+      <p:ext uri="{BB962C8B-B14F-4D97-AF65-F5344CB8AC3E}">
+        <p14:creationId xmlns:p14="http://schemas.microsoft.com/office/powerpoint/2010/main" val="2024741015"/>
+      </p:ext>
+    </p:extLst>
+  </p:cSld>
+  <p:clrMapOvr>
+    <a:masterClrMapping/>
+  </p:clrMapOvr>
+</p:sld>
+</file>
+
+<file path=ppt/slides/slide6.xml><?xml version="1.0" encoding="utf-8"?>
+<p:sld xmlns:a="http://schemas.openxmlformats.org/drawingml/2006/main" xmlns:r="http://schemas.openxmlformats.org/officeDocument/2006/relationships" xmlns:p="http://schemas.openxmlformats.org/presentationml/2006/main">
+  <p:cSld>
+    <p:spTree>
+      <p:nvGrpSpPr>
+        <p:cNvPr id="1" name=""/>
+        <p:cNvGrpSpPr/>
+        <p:nvPr/>
+      </p:nvGrpSpPr>
+      <p:grpSpPr>
+        <a:xfrm>
+          <a:off x="0" y="0"/>
+          <a:ext cx="0" cy="0"/>
+          <a:chOff x="0" y="0"/>
+          <a:chExt cx="0" cy="0"/>
+        </a:xfrm>
+      </p:grpSpPr>
+      <p:sp>
+        <p:nvSpPr>
+          <p:cNvPr id="4" name="テキスト ボックス 3">
+            <a:extLst>
+              <a:ext uri="{FF2B5EF4-FFF2-40B4-BE49-F238E27FC236}">
                 <a16:creationId xmlns:a16="http://schemas.microsoft.com/office/drawing/2014/main" id="{A4B526FF-7581-4EF9-ADEB-C92A82E941D6}"/>
               </a:ext>
             </a:extLst>
@@ -5380,1316 +7022,6 @@
     <p:extLst>
       <p:ext uri="{BB962C8B-B14F-4D97-AF65-F5344CB8AC3E}">
         <p14:creationId xmlns:p14="http://schemas.microsoft.com/office/powerpoint/2010/main" val="3283254432"/>
-      </p:ext>
-    </p:extLst>
-  </p:cSld>
-  <p:clrMapOvr>
-    <a:masterClrMapping/>
-  </p:clrMapOvr>
-</p:sld>
-</file>
-
-<file path=ppt/slides/slide3.xml><?xml version="1.0" encoding="utf-8"?>
-<p:sld xmlns:a="http://schemas.openxmlformats.org/drawingml/2006/main" xmlns:r="http://schemas.openxmlformats.org/officeDocument/2006/relationships" xmlns:p="http://schemas.openxmlformats.org/presentationml/2006/main">
-  <p:cSld>
-    <p:spTree>
-      <p:nvGrpSpPr>
-        <p:cNvPr id="1" name=""/>
-        <p:cNvGrpSpPr/>
-        <p:nvPr/>
-      </p:nvGrpSpPr>
-      <p:grpSpPr>
-        <a:xfrm>
-          <a:off x="0" y="0"/>
-          <a:ext cx="0" cy="0"/>
-          <a:chOff x="0" y="0"/>
-          <a:chExt cx="0" cy="0"/>
-        </a:xfrm>
-      </p:grpSpPr>
-      <p:pic>
-        <p:nvPicPr>
-          <p:cNvPr id="10" name="図 9">
-            <a:extLst>
-              <a:ext uri="{FF2B5EF4-FFF2-40B4-BE49-F238E27FC236}">
-                <a16:creationId xmlns:a16="http://schemas.microsoft.com/office/drawing/2014/main" id="{9DDFD24E-8583-46A7-8D84-84ECE7CDA1A7}"/>
-              </a:ext>
-            </a:extLst>
-          </p:cNvPr>
-          <p:cNvPicPr>
-            <a:picLocks noChangeAspect="1"/>
-          </p:cNvPicPr>
-          <p:nvPr/>
-        </p:nvPicPr>
-        <p:blipFill>
-          <a:blip r:embed="rId2">
-            <a:extLst>
-              <a:ext uri="{28A0092B-C50C-407E-A947-70E740481C1C}">
-                <a14:useLocalDpi xmlns:a14="http://schemas.microsoft.com/office/drawing/2010/main" val="0"/>
-              </a:ext>
-            </a:extLst>
-          </a:blip>
-          <a:stretch>
-            <a:fillRect/>
-          </a:stretch>
-        </p:blipFill>
-        <p:spPr>
-          <a:xfrm>
-            <a:off x="4203335" y="416096"/>
-            <a:ext cx="4315643" cy="4315643"/>
-          </a:xfrm>
-          <a:prstGeom prst="rect">
-            <a:avLst/>
-          </a:prstGeom>
-        </p:spPr>
-      </p:pic>
-      <p:sp>
-        <p:nvSpPr>
-          <p:cNvPr id="4" name="テキスト ボックス 3">
-            <a:extLst>
-              <a:ext uri="{FF2B5EF4-FFF2-40B4-BE49-F238E27FC236}">
-                <a16:creationId xmlns:a16="http://schemas.microsoft.com/office/drawing/2014/main" id="{3FEC7234-B10E-40CD-A03C-F3BB2D062744}"/>
-              </a:ext>
-            </a:extLst>
-          </p:cNvPr>
-          <p:cNvSpPr txBox="1"/>
-          <p:nvPr/>
-        </p:nvSpPr>
-        <p:spPr>
-          <a:xfrm>
-            <a:off x="0" y="0"/>
-            <a:ext cx="3005951" cy="769441"/>
-          </a:xfrm>
-          <a:prstGeom prst="rect">
-            <a:avLst/>
-          </a:prstGeom>
-          <a:noFill/>
-        </p:spPr>
-        <p:txBody>
-          <a:bodyPr wrap="none" rtlCol="0">
-            <a:spAutoFit/>
-          </a:bodyPr>
-          <a:lstStyle/>
-          <a:p>
-            <a:r>
-              <a:rPr kumimoji="1" lang="ja-JP" altLang="en-US" sz="4400" dirty="0"/>
-              <a:t>ー手裏剣ー</a:t>
-            </a:r>
-          </a:p>
-        </p:txBody>
-      </p:sp>
-      <p:sp>
-        <p:nvSpPr>
-          <p:cNvPr id="5" name="テキスト ボックス 4">
-            <a:extLst>
-              <a:ext uri="{FF2B5EF4-FFF2-40B4-BE49-F238E27FC236}">
-                <a16:creationId xmlns:a16="http://schemas.microsoft.com/office/drawing/2014/main" id="{5DDD4A7B-EC46-4FD4-AFC7-28DA10C4B49A}"/>
-              </a:ext>
-            </a:extLst>
-          </p:cNvPr>
-          <p:cNvSpPr txBox="1"/>
-          <p:nvPr/>
-        </p:nvSpPr>
-        <p:spPr>
-          <a:xfrm>
-            <a:off x="0" y="769441"/>
-            <a:ext cx="3877985" cy="646331"/>
-          </a:xfrm>
-          <a:prstGeom prst="rect">
-            <a:avLst/>
-          </a:prstGeom>
-          <a:noFill/>
-        </p:spPr>
-        <p:txBody>
-          <a:bodyPr wrap="none" rtlCol="0">
-            <a:spAutoFit/>
-          </a:bodyPr>
-          <a:lstStyle/>
-          <a:p>
-            <a:r>
-              <a:rPr kumimoji="1" lang="ja-JP" altLang="en-US" dirty="0"/>
-              <a:t>手裏剣を投げて遠くの敵を攻撃する</a:t>
-            </a:r>
-            <a:endParaRPr kumimoji="1" lang="en-US" altLang="ja-JP" dirty="0"/>
-          </a:p>
-          <a:p>
-            <a:r>
-              <a:rPr lang="ja-JP" altLang="en-US" dirty="0"/>
-              <a:t>攻撃力は低い</a:t>
-            </a:r>
-            <a:endParaRPr lang="en-US" altLang="ja-JP" dirty="0"/>
-          </a:p>
-        </p:txBody>
-      </p:sp>
-      <p:pic>
-        <p:nvPicPr>
-          <p:cNvPr id="7" name="図 6">
-            <a:extLst>
-              <a:ext uri="{FF2B5EF4-FFF2-40B4-BE49-F238E27FC236}">
-                <a16:creationId xmlns:a16="http://schemas.microsoft.com/office/drawing/2014/main" id="{B495BC0D-57CB-4F53-B9C5-A0E99BEA0209}"/>
-              </a:ext>
-            </a:extLst>
-          </p:cNvPr>
-          <p:cNvPicPr>
-            <a:picLocks noChangeAspect="1"/>
-          </p:cNvPicPr>
-          <p:nvPr/>
-        </p:nvPicPr>
-        <p:blipFill>
-          <a:blip r:embed="rId3">
-            <a:extLst>
-              <a:ext uri="{28A0092B-C50C-407E-A947-70E740481C1C}">
-                <a14:useLocalDpi xmlns:a14="http://schemas.microsoft.com/office/drawing/2010/main" val="0"/>
-              </a:ext>
-            </a:extLst>
-          </a:blip>
-          <a:stretch>
-            <a:fillRect/>
-          </a:stretch>
-        </p:blipFill>
-        <p:spPr>
-          <a:xfrm>
-            <a:off x="-84327" y="1538882"/>
-            <a:ext cx="3174603" cy="2603175"/>
-          </a:xfrm>
-          <a:prstGeom prst="rect">
-            <a:avLst/>
-          </a:prstGeom>
-        </p:spPr>
-      </p:pic>
-      <p:sp>
-        <p:nvSpPr>
-          <p:cNvPr id="6" name="テキスト ボックス 5">
-            <a:extLst>
-              <a:ext uri="{FF2B5EF4-FFF2-40B4-BE49-F238E27FC236}">
-                <a16:creationId xmlns:a16="http://schemas.microsoft.com/office/drawing/2014/main" id="{F4DB8799-3ACE-43C4-857D-F3951D29CE9B}"/>
-              </a:ext>
-            </a:extLst>
-          </p:cNvPr>
-          <p:cNvSpPr txBox="1"/>
-          <p:nvPr/>
-        </p:nvSpPr>
-        <p:spPr>
-          <a:xfrm>
-            <a:off x="5181600" y="0"/>
-            <a:ext cx="4698722" cy="769441"/>
-          </a:xfrm>
-          <a:prstGeom prst="rect">
-            <a:avLst/>
-          </a:prstGeom>
-          <a:noFill/>
-        </p:spPr>
-        <p:txBody>
-          <a:bodyPr wrap="none" rtlCol="0">
-            <a:spAutoFit/>
-          </a:bodyPr>
-          <a:lstStyle/>
-          <a:p>
-            <a:r>
-              <a:rPr kumimoji="1" lang="ja-JP" altLang="en-US" sz="4400" dirty="0"/>
-              <a:t>ー身代わりの術ー</a:t>
-            </a:r>
-          </a:p>
-        </p:txBody>
-      </p:sp>
-      <p:sp>
-        <p:nvSpPr>
-          <p:cNvPr id="8" name="テキスト ボックス 7">
-            <a:extLst>
-              <a:ext uri="{FF2B5EF4-FFF2-40B4-BE49-F238E27FC236}">
-                <a16:creationId xmlns:a16="http://schemas.microsoft.com/office/drawing/2014/main" id="{8FE236E7-A9E9-4CE9-9295-5ACC3C98BDBF}"/>
-              </a:ext>
-            </a:extLst>
-          </p:cNvPr>
-          <p:cNvSpPr txBox="1"/>
-          <p:nvPr/>
-        </p:nvSpPr>
-        <p:spPr>
-          <a:xfrm>
-            <a:off x="5181600" y="769441"/>
-            <a:ext cx="7109639" cy="369332"/>
-          </a:xfrm>
-          <a:prstGeom prst="rect">
-            <a:avLst/>
-          </a:prstGeom>
-          <a:noFill/>
-        </p:spPr>
-        <p:txBody>
-          <a:bodyPr wrap="none" rtlCol="0">
-            <a:spAutoFit/>
-          </a:bodyPr>
-          <a:lstStyle/>
-          <a:p>
-            <a:r>
-              <a:rPr kumimoji="1" lang="ja-JP" altLang="en-US" dirty="0"/>
-              <a:t>敵の攻撃に当たるとき、タイミングよくボタンを押すと回避できる</a:t>
-            </a:r>
-            <a:endParaRPr kumimoji="1" lang="en-US" altLang="ja-JP" dirty="0"/>
-          </a:p>
-        </p:txBody>
-      </p:sp>
-      <p:pic>
-        <p:nvPicPr>
-          <p:cNvPr id="3" name="図 2">
-            <a:extLst>
-              <a:ext uri="{FF2B5EF4-FFF2-40B4-BE49-F238E27FC236}">
-                <a16:creationId xmlns:a16="http://schemas.microsoft.com/office/drawing/2014/main" id="{F87A2027-4862-45B4-BC33-D0B8D1D9DBBA}"/>
-              </a:ext>
-            </a:extLst>
-          </p:cNvPr>
-          <p:cNvPicPr>
-            <a:picLocks noChangeAspect="1"/>
-          </p:cNvPicPr>
-          <p:nvPr/>
-        </p:nvPicPr>
-        <p:blipFill>
-          <a:blip r:embed="rId4">
-            <a:extLst>
-              <a:ext uri="{28A0092B-C50C-407E-A947-70E740481C1C}">
-                <a14:useLocalDpi xmlns:a14="http://schemas.microsoft.com/office/drawing/2010/main" val="0"/>
-              </a:ext>
-            </a:extLst>
-          </a:blip>
-          <a:stretch>
-            <a:fillRect/>
-          </a:stretch>
-        </p:blipFill>
-        <p:spPr>
-          <a:xfrm>
-            <a:off x="5151096" y="4497320"/>
-            <a:ext cx="2282182" cy="2438037"/>
-          </a:xfrm>
-          <a:prstGeom prst="rect">
-            <a:avLst/>
-          </a:prstGeom>
-        </p:spPr>
-      </p:pic>
-      <p:sp>
-        <p:nvSpPr>
-          <p:cNvPr id="9" name="正方形/長方形 8">
-            <a:extLst>
-              <a:ext uri="{FF2B5EF4-FFF2-40B4-BE49-F238E27FC236}">
-                <a16:creationId xmlns:a16="http://schemas.microsoft.com/office/drawing/2014/main" id="{EA6F6158-AC87-47C6-9DA1-21E576A29E2C}"/>
-              </a:ext>
-            </a:extLst>
-          </p:cNvPr>
-          <p:cNvSpPr/>
-          <p:nvPr/>
-        </p:nvSpPr>
-        <p:spPr>
-          <a:xfrm>
-            <a:off x="6292187" y="2518290"/>
-            <a:ext cx="4177760" cy="244250"/>
-          </a:xfrm>
-          <a:prstGeom prst="rect">
-            <a:avLst/>
-          </a:prstGeom>
-          <a:solidFill>
-            <a:srgbClr val="C00000">
-              <a:alpha val="70000"/>
-            </a:srgbClr>
-          </a:solidFill>
-          <a:ln>
-            <a:noFill/>
-          </a:ln>
-        </p:spPr>
-        <p:style>
-          <a:lnRef idx="2">
-            <a:schemeClr val="accent1">
-              <a:shade val="50000"/>
-            </a:schemeClr>
-          </a:lnRef>
-          <a:fillRef idx="1">
-            <a:schemeClr val="accent1"/>
-          </a:fillRef>
-          <a:effectRef idx="0">
-            <a:schemeClr val="accent1"/>
-          </a:effectRef>
-          <a:fontRef idx="minor">
-            <a:schemeClr val="lt1"/>
-          </a:fontRef>
-        </p:style>
-        <p:txBody>
-          <a:bodyPr rtlCol="0" anchor="ctr"/>
-          <a:lstStyle/>
-          <a:p>
-            <a:pPr algn="ctr"/>
-            <a:endParaRPr kumimoji="1" lang="ja-JP" altLang="en-US"/>
-          </a:p>
-        </p:txBody>
-      </p:sp>
-      <p:pic>
-        <p:nvPicPr>
-          <p:cNvPr id="11" name="図 10">
-            <a:extLst>
-              <a:ext uri="{FF2B5EF4-FFF2-40B4-BE49-F238E27FC236}">
-                <a16:creationId xmlns:a16="http://schemas.microsoft.com/office/drawing/2014/main" id="{2299AF6C-45DC-43EF-8F4A-7947B647737B}"/>
-              </a:ext>
-            </a:extLst>
-          </p:cNvPr>
-          <p:cNvPicPr>
-            <a:picLocks noChangeAspect="1"/>
-          </p:cNvPicPr>
-          <p:nvPr/>
-        </p:nvPicPr>
-        <p:blipFill>
-          <a:blip r:embed="rId5">
-            <a:extLst>
-              <a:ext uri="{28A0092B-C50C-407E-A947-70E740481C1C}">
-                <a14:useLocalDpi xmlns:a14="http://schemas.microsoft.com/office/drawing/2010/main" val="0"/>
-              </a:ext>
-            </a:extLst>
-          </a:blip>
-          <a:stretch>
-            <a:fillRect/>
-          </a:stretch>
-        </p:blipFill>
-        <p:spPr>
-          <a:xfrm>
-            <a:off x="9372671" y="1629572"/>
-            <a:ext cx="1950969" cy="1724863"/>
-          </a:xfrm>
-          <a:prstGeom prst="rect">
-            <a:avLst/>
-          </a:prstGeom>
-        </p:spPr>
-      </p:pic>
-      <p:sp>
-        <p:nvSpPr>
-          <p:cNvPr id="12" name="矢印: 下 11">
-            <a:extLst>
-              <a:ext uri="{FF2B5EF4-FFF2-40B4-BE49-F238E27FC236}">
-                <a16:creationId xmlns:a16="http://schemas.microsoft.com/office/drawing/2014/main" id="{FA90FD8E-EAB1-4461-B9C7-EBA6DBD17A85}"/>
-              </a:ext>
-            </a:extLst>
-          </p:cNvPr>
-          <p:cNvSpPr/>
-          <p:nvPr/>
-        </p:nvSpPr>
-        <p:spPr>
-          <a:xfrm>
-            <a:off x="7853082" y="3541059"/>
-            <a:ext cx="1389530" cy="860612"/>
-          </a:xfrm>
-          <a:prstGeom prst="downArrow">
-            <a:avLst/>
-          </a:prstGeom>
-        </p:spPr>
-        <p:style>
-          <a:lnRef idx="2">
-            <a:schemeClr val="accent1">
-              <a:shade val="50000"/>
-            </a:schemeClr>
-          </a:lnRef>
-          <a:fillRef idx="1">
-            <a:schemeClr val="accent1"/>
-          </a:fillRef>
-          <a:effectRef idx="0">
-            <a:schemeClr val="accent1"/>
-          </a:effectRef>
-          <a:fontRef idx="minor">
-            <a:schemeClr val="lt1"/>
-          </a:fontRef>
-        </p:style>
-        <p:txBody>
-          <a:bodyPr rtlCol="0" anchor="ctr"/>
-          <a:lstStyle/>
-          <a:p>
-            <a:pPr algn="ctr"/>
-            <a:endParaRPr kumimoji="1" lang="ja-JP" altLang="en-US"/>
-          </a:p>
-        </p:txBody>
-      </p:sp>
-      <p:pic>
-        <p:nvPicPr>
-          <p:cNvPr id="13" name="図 12">
-            <a:extLst>
-              <a:ext uri="{FF2B5EF4-FFF2-40B4-BE49-F238E27FC236}">
-                <a16:creationId xmlns:a16="http://schemas.microsoft.com/office/drawing/2014/main" id="{56B4ED2E-C776-4391-A2EA-0C1BD39AE147}"/>
-              </a:ext>
-            </a:extLst>
-          </p:cNvPr>
-          <p:cNvPicPr>
-            <a:picLocks noChangeAspect="1"/>
-          </p:cNvPicPr>
-          <p:nvPr/>
-        </p:nvPicPr>
-        <p:blipFill>
-          <a:blip r:embed="rId6">
-            <a:extLst>
-              <a:ext uri="{28A0092B-C50C-407E-A947-70E740481C1C}">
-                <a14:useLocalDpi xmlns:a14="http://schemas.microsoft.com/office/drawing/2010/main" val="0"/>
-              </a:ext>
-            </a:extLst>
-          </a:blip>
-          <a:stretch>
-            <a:fillRect/>
-          </a:stretch>
-        </p:blipFill>
-        <p:spPr>
-          <a:xfrm flipH="1">
-            <a:off x="9494462" y="5040702"/>
-            <a:ext cx="1950969" cy="1817298"/>
-          </a:xfrm>
-          <a:prstGeom prst="rect">
-            <a:avLst/>
-          </a:prstGeom>
-        </p:spPr>
-      </p:pic>
-    </p:spTree>
-    <p:extLst>
-      <p:ext uri="{BB962C8B-B14F-4D97-AF65-F5344CB8AC3E}">
-        <p14:creationId xmlns:p14="http://schemas.microsoft.com/office/powerpoint/2010/main" val="472003385"/>
-      </p:ext>
-    </p:extLst>
-  </p:cSld>
-  <p:clrMapOvr>
-    <a:masterClrMapping/>
-  </p:clrMapOvr>
-</p:sld>
-</file>
-
-<file path=ppt/slides/slide4.xml><?xml version="1.0" encoding="utf-8"?>
-<p:sld xmlns:a="http://schemas.openxmlformats.org/drawingml/2006/main" xmlns:r="http://schemas.openxmlformats.org/officeDocument/2006/relationships" xmlns:p="http://schemas.openxmlformats.org/presentationml/2006/main">
-  <p:cSld>
-    <p:spTree>
-      <p:nvGrpSpPr>
-        <p:cNvPr id="1" name=""/>
-        <p:cNvGrpSpPr/>
-        <p:nvPr/>
-      </p:nvGrpSpPr>
-      <p:grpSpPr>
-        <a:xfrm>
-          <a:off x="0" y="0"/>
-          <a:ext cx="0" cy="0"/>
-          <a:chOff x="0" y="0"/>
-          <a:chExt cx="0" cy="0"/>
-        </a:xfrm>
-      </p:grpSpPr>
-      <p:sp>
-        <p:nvSpPr>
-          <p:cNvPr id="4" name="テキスト ボックス 3">
-            <a:extLst>
-              <a:ext uri="{FF2B5EF4-FFF2-40B4-BE49-F238E27FC236}">
-                <a16:creationId xmlns:a16="http://schemas.microsoft.com/office/drawing/2014/main" id="{40B13EE1-46E8-4190-A176-E9B052C35E9C}"/>
-              </a:ext>
-            </a:extLst>
-          </p:cNvPr>
-          <p:cNvSpPr txBox="1"/>
-          <p:nvPr/>
-        </p:nvSpPr>
-        <p:spPr>
-          <a:xfrm>
-            <a:off x="0" y="0"/>
-            <a:ext cx="4134465" cy="769441"/>
-          </a:xfrm>
-          <a:prstGeom prst="rect">
-            <a:avLst/>
-          </a:prstGeom>
-          <a:noFill/>
-        </p:spPr>
-        <p:txBody>
-          <a:bodyPr wrap="none" rtlCol="0">
-            <a:spAutoFit/>
-          </a:bodyPr>
-          <a:lstStyle/>
-          <a:p>
-            <a:r>
-              <a:rPr kumimoji="1" lang="ja-JP" altLang="en-US" sz="4400" dirty="0"/>
-              <a:t>ー壁ジャンプー</a:t>
-            </a:r>
-          </a:p>
-        </p:txBody>
-      </p:sp>
-      <p:sp>
-        <p:nvSpPr>
-          <p:cNvPr id="5" name="テキスト ボックス 4">
-            <a:extLst>
-              <a:ext uri="{FF2B5EF4-FFF2-40B4-BE49-F238E27FC236}">
-                <a16:creationId xmlns:a16="http://schemas.microsoft.com/office/drawing/2014/main" id="{FD421848-1DF0-40D7-B032-884FB810EA68}"/>
-              </a:ext>
-            </a:extLst>
-          </p:cNvPr>
-          <p:cNvSpPr txBox="1"/>
-          <p:nvPr/>
-        </p:nvSpPr>
-        <p:spPr>
-          <a:xfrm>
-            <a:off x="0" y="769441"/>
-            <a:ext cx="9879628" cy="646331"/>
-          </a:xfrm>
-          <a:prstGeom prst="rect">
-            <a:avLst/>
-          </a:prstGeom>
-          <a:noFill/>
-        </p:spPr>
-        <p:txBody>
-          <a:bodyPr wrap="none" rtlCol="0">
-            <a:spAutoFit/>
-          </a:bodyPr>
-          <a:lstStyle/>
-          <a:p>
-            <a:r>
-              <a:rPr lang="ja-JP" altLang="en-US" dirty="0"/>
-              <a:t>プレイヤーが壁に接触した状態でジャンプ入力を行うと、壁を蹴って反対方向へ跳び上がる。</a:t>
-            </a:r>
-            <a:endParaRPr lang="en-US" altLang="ja-JP" dirty="0"/>
-          </a:p>
-          <a:p>
-            <a:endParaRPr lang="en-US" altLang="ja-JP" dirty="0"/>
-          </a:p>
-        </p:txBody>
-      </p:sp>
-      <p:sp>
-        <p:nvSpPr>
-          <p:cNvPr id="6" name="正方形/長方形 5">
-            <a:extLst>
-              <a:ext uri="{FF2B5EF4-FFF2-40B4-BE49-F238E27FC236}">
-                <a16:creationId xmlns:a16="http://schemas.microsoft.com/office/drawing/2014/main" id="{80CB0C25-677E-4668-8F2A-611D57B10DBB}"/>
-              </a:ext>
-            </a:extLst>
-          </p:cNvPr>
-          <p:cNvSpPr/>
-          <p:nvPr/>
-        </p:nvSpPr>
-        <p:spPr>
-          <a:xfrm>
-            <a:off x="1" y="1712686"/>
-            <a:ext cx="769256" cy="5145314"/>
-          </a:xfrm>
-          <a:prstGeom prst="rect">
-            <a:avLst/>
-          </a:prstGeom>
-          <a:solidFill>
-            <a:schemeClr val="tx1"/>
-          </a:solidFill>
-          <a:ln>
-            <a:solidFill>
-              <a:schemeClr val="tx1"/>
-            </a:solidFill>
-          </a:ln>
-        </p:spPr>
-        <p:style>
-          <a:lnRef idx="2">
-            <a:schemeClr val="accent1">
-              <a:shade val="50000"/>
-            </a:schemeClr>
-          </a:lnRef>
-          <a:fillRef idx="1">
-            <a:schemeClr val="accent1"/>
-          </a:fillRef>
-          <a:effectRef idx="0">
-            <a:schemeClr val="accent1"/>
-          </a:effectRef>
-          <a:fontRef idx="minor">
-            <a:schemeClr val="lt1"/>
-          </a:fontRef>
-        </p:style>
-        <p:txBody>
-          <a:bodyPr rtlCol="0" anchor="ctr"/>
-          <a:lstStyle/>
-          <a:p>
-            <a:pPr algn="ctr"/>
-            <a:endParaRPr kumimoji="1" lang="ja-JP" altLang="en-US"/>
-          </a:p>
-        </p:txBody>
-      </p:sp>
-      <p:sp>
-        <p:nvSpPr>
-          <p:cNvPr id="9" name="テキスト ボックス 8">
-            <a:extLst>
-              <a:ext uri="{FF2B5EF4-FFF2-40B4-BE49-F238E27FC236}">
-                <a16:creationId xmlns:a16="http://schemas.microsoft.com/office/drawing/2014/main" id="{8C062F06-CEE3-4819-9898-D578CF3225BB}"/>
-              </a:ext>
-            </a:extLst>
-          </p:cNvPr>
-          <p:cNvSpPr txBox="1"/>
-          <p:nvPr/>
-        </p:nvSpPr>
-        <p:spPr>
-          <a:xfrm>
-            <a:off x="705320" y="5145314"/>
-            <a:ext cx="2723823" cy="369332"/>
-          </a:xfrm>
-          <a:prstGeom prst="rect">
-            <a:avLst/>
-          </a:prstGeom>
-          <a:noFill/>
-        </p:spPr>
-        <p:txBody>
-          <a:bodyPr wrap="none" rtlCol="0">
-            <a:spAutoFit/>
-          </a:bodyPr>
-          <a:lstStyle/>
-          <a:p>
-            <a:r>
-              <a:rPr kumimoji="1" lang="ja-JP" altLang="en-US" dirty="0"/>
-              <a:t>この状態でジャンプ入力</a:t>
-            </a:r>
-          </a:p>
-        </p:txBody>
-      </p:sp>
-      <p:sp>
-        <p:nvSpPr>
-          <p:cNvPr id="10" name="矢印: 右 9">
-            <a:extLst>
-              <a:ext uri="{FF2B5EF4-FFF2-40B4-BE49-F238E27FC236}">
-                <a16:creationId xmlns:a16="http://schemas.microsoft.com/office/drawing/2014/main" id="{B2503489-15EE-4CF9-821E-A96A40F9276A}"/>
-              </a:ext>
-            </a:extLst>
-          </p:cNvPr>
-          <p:cNvSpPr/>
-          <p:nvPr/>
-        </p:nvSpPr>
-        <p:spPr>
-          <a:xfrm>
-            <a:off x="3038443" y="3384970"/>
-            <a:ext cx="1901371" cy="1466429"/>
-          </a:xfrm>
-          <a:prstGeom prst="rightArrow">
-            <a:avLst/>
-          </a:prstGeom>
-        </p:spPr>
-        <p:style>
-          <a:lnRef idx="2">
-            <a:schemeClr val="accent1">
-              <a:shade val="50000"/>
-            </a:schemeClr>
-          </a:lnRef>
-          <a:fillRef idx="1">
-            <a:schemeClr val="accent1"/>
-          </a:fillRef>
-          <a:effectRef idx="0">
-            <a:schemeClr val="accent1"/>
-          </a:effectRef>
-          <a:fontRef idx="minor">
-            <a:schemeClr val="lt1"/>
-          </a:fontRef>
-        </p:style>
-        <p:txBody>
-          <a:bodyPr rtlCol="0" anchor="ctr"/>
-          <a:lstStyle/>
-          <a:p>
-            <a:pPr algn="ctr"/>
-            <a:endParaRPr kumimoji="1" lang="ja-JP" altLang="en-US"/>
-          </a:p>
-        </p:txBody>
-      </p:sp>
-      <p:sp>
-        <p:nvSpPr>
-          <p:cNvPr id="11" name="正方形/長方形 10">
-            <a:extLst>
-              <a:ext uri="{FF2B5EF4-FFF2-40B4-BE49-F238E27FC236}">
-                <a16:creationId xmlns:a16="http://schemas.microsoft.com/office/drawing/2014/main" id="{681BAC70-B423-44A0-9114-3914B0E03816}"/>
-              </a:ext>
-            </a:extLst>
-          </p:cNvPr>
-          <p:cNvSpPr/>
-          <p:nvPr/>
-        </p:nvSpPr>
-        <p:spPr>
-          <a:xfrm>
-            <a:off x="5218279" y="1712686"/>
-            <a:ext cx="769256" cy="5145314"/>
-          </a:xfrm>
-          <a:prstGeom prst="rect">
-            <a:avLst/>
-          </a:prstGeom>
-          <a:solidFill>
-            <a:schemeClr val="tx1"/>
-          </a:solidFill>
-          <a:ln>
-            <a:solidFill>
-              <a:schemeClr val="tx1"/>
-            </a:solidFill>
-          </a:ln>
-        </p:spPr>
-        <p:style>
-          <a:lnRef idx="2">
-            <a:schemeClr val="accent1">
-              <a:shade val="50000"/>
-            </a:schemeClr>
-          </a:lnRef>
-          <a:fillRef idx="1">
-            <a:schemeClr val="accent1"/>
-          </a:fillRef>
-          <a:effectRef idx="0">
-            <a:schemeClr val="accent1"/>
-          </a:effectRef>
-          <a:fontRef idx="minor">
-            <a:schemeClr val="lt1"/>
-          </a:fontRef>
-        </p:style>
-        <p:txBody>
-          <a:bodyPr rtlCol="0" anchor="ctr"/>
-          <a:lstStyle/>
-          <a:p>
-            <a:pPr algn="ctr"/>
-            <a:endParaRPr kumimoji="1" lang="ja-JP" altLang="en-US"/>
-          </a:p>
-        </p:txBody>
-      </p:sp>
-      <p:pic>
-        <p:nvPicPr>
-          <p:cNvPr id="15" name="図 14">
-            <a:extLst>
-              <a:ext uri="{FF2B5EF4-FFF2-40B4-BE49-F238E27FC236}">
-                <a16:creationId xmlns:a16="http://schemas.microsoft.com/office/drawing/2014/main" id="{0C1ECDC2-CB10-4DD8-A8DC-A89625E0A6D0}"/>
-              </a:ext>
-            </a:extLst>
-          </p:cNvPr>
-          <p:cNvPicPr>
-            <a:picLocks noChangeAspect="1"/>
-          </p:cNvPicPr>
-          <p:nvPr/>
-        </p:nvPicPr>
-        <p:blipFill>
-          <a:blip r:embed="rId2">
-            <a:extLst>
-              <a:ext uri="{28A0092B-C50C-407E-A947-70E740481C1C}">
-                <a14:useLocalDpi xmlns:a14="http://schemas.microsoft.com/office/drawing/2010/main" val="0"/>
-              </a:ext>
-            </a:extLst>
-          </a:blip>
-          <a:stretch>
-            <a:fillRect/>
-          </a:stretch>
-        </p:blipFill>
-        <p:spPr>
-          <a:xfrm>
-            <a:off x="6584884" y="1857828"/>
-            <a:ext cx="1849529" cy="1951471"/>
-          </a:xfrm>
-          <a:prstGeom prst="rect">
-            <a:avLst/>
-          </a:prstGeom>
-        </p:spPr>
-      </p:pic>
-      <p:pic>
-        <p:nvPicPr>
-          <p:cNvPr id="17" name="図 16">
-            <a:extLst>
-              <a:ext uri="{FF2B5EF4-FFF2-40B4-BE49-F238E27FC236}">
-                <a16:creationId xmlns:a16="http://schemas.microsoft.com/office/drawing/2014/main" id="{831FA3C7-1E1F-4CC3-93D6-47E015317E35}"/>
-              </a:ext>
-            </a:extLst>
-          </p:cNvPr>
-          <p:cNvPicPr>
-            <a:picLocks noChangeAspect="1"/>
-          </p:cNvPicPr>
-          <p:nvPr/>
-        </p:nvPicPr>
-        <p:blipFill>
-          <a:blip r:embed="rId3">
-            <a:extLst>
-              <a:ext uri="{28A0092B-C50C-407E-A947-70E740481C1C}">
-                <a14:useLocalDpi xmlns:a14="http://schemas.microsoft.com/office/drawing/2010/main" val="0"/>
-              </a:ext>
-            </a:extLst>
-          </a:blip>
-          <a:stretch>
-            <a:fillRect/>
-          </a:stretch>
-        </p:blipFill>
-        <p:spPr>
-          <a:xfrm>
-            <a:off x="-439886" y="2556084"/>
-            <a:ext cx="3124200" cy="3124200"/>
-          </a:xfrm>
-          <a:prstGeom prst="rect">
-            <a:avLst/>
-          </a:prstGeom>
-        </p:spPr>
-      </p:pic>
-    </p:spTree>
-    <p:extLst>
-      <p:ext uri="{BB962C8B-B14F-4D97-AF65-F5344CB8AC3E}">
-        <p14:creationId xmlns:p14="http://schemas.microsoft.com/office/powerpoint/2010/main" val="1369157224"/>
-      </p:ext>
-    </p:extLst>
-  </p:cSld>
-  <p:clrMapOvr>
-    <a:masterClrMapping/>
-  </p:clrMapOvr>
-</p:sld>
-</file>
-
-<file path=ppt/slides/slide5.xml><?xml version="1.0" encoding="utf-8"?>
-<p:sld xmlns:a="http://schemas.openxmlformats.org/drawingml/2006/main" xmlns:r="http://schemas.openxmlformats.org/officeDocument/2006/relationships" xmlns:p="http://schemas.openxmlformats.org/presentationml/2006/main">
-  <p:cSld>
-    <p:spTree>
-      <p:nvGrpSpPr>
-        <p:cNvPr id="1" name=""/>
-        <p:cNvGrpSpPr/>
-        <p:nvPr/>
-      </p:nvGrpSpPr>
-      <p:grpSpPr>
-        <a:xfrm>
-          <a:off x="0" y="0"/>
-          <a:ext cx="0" cy="0"/>
-          <a:chOff x="0" y="0"/>
-          <a:chExt cx="0" cy="0"/>
-        </a:xfrm>
-      </p:grpSpPr>
-      <p:sp>
-        <p:nvSpPr>
-          <p:cNvPr id="4" name="テキスト ボックス 3">
-            <a:extLst>
-              <a:ext uri="{FF2B5EF4-FFF2-40B4-BE49-F238E27FC236}">
-                <a16:creationId xmlns:a16="http://schemas.microsoft.com/office/drawing/2014/main" id="{663915C1-1EBB-4D3C-B65C-3603D7F4CE41}"/>
-              </a:ext>
-            </a:extLst>
-          </p:cNvPr>
-          <p:cNvSpPr txBox="1"/>
-          <p:nvPr/>
-        </p:nvSpPr>
-        <p:spPr>
-          <a:xfrm>
-            <a:off x="0" y="0"/>
-            <a:ext cx="4286251" cy="769441"/>
-          </a:xfrm>
-          <a:prstGeom prst="rect">
-            <a:avLst/>
-          </a:prstGeom>
-          <a:noFill/>
-        </p:spPr>
-        <p:txBody>
-          <a:bodyPr wrap="square" rtlCol="0">
-            <a:spAutoFit/>
-          </a:bodyPr>
-          <a:lstStyle/>
-          <a:p>
-            <a:r>
-              <a:rPr kumimoji="1" lang="ja-JP" altLang="en-US" sz="4400" dirty="0"/>
-              <a:t>ー死亡判定ー</a:t>
-            </a:r>
-          </a:p>
-        </p:txBody>
-      </p:sp>
-      <p:sp>
-        <p:nvSpPr>
-          <p:cNvPr id="5" name="テキスト ボックス 4">
-            <a:extLst>
-              <a:ext uri="{FF2B5EF4-FFF2-40B4-BE49-F238E27FC236}">
-                <a16:creationId xmlns:a16="http://schemas.microsoft.com/office/drawing/2014/main" id="{01EE4625-E781-4F5D-B48A-8D3A2E00C530}"/>
-              </a:ext>
-            </a:extLst>
-          </p:cNvPr>
-          <p:cNvSpPr txBox="1"/>
-          <p:nvPr/>
-        </p:nvSpPr>
-        <p:spPr>
-          <a:xfrm>
-            <a:off x="204132" y="726758"/>
-            <a:ext cx="5032147" cy="646331"/>
-          </a:xfrm>
-          <a:prstGeom prst="rect">
-            <a:avLst/>
-          </a:prstGeom>
-          <a:noFill/>
-        </p:spPr>
-        <p:txBody>
-          <a:bodyPr wrap="none" rtlCol="0">
-            <a:spAutoFit/>
-          </a:bodyPr>
-          <a:lstStyle/>
-          <a:p>
-            <a:r>
-              <a:rPr kumimoji="1" lang="ja-JP" altLang="en-US" dirty="0"/>
-              <a:t>落下死</a:t>
-            </a:r>
-            <a:r>
-              <a:rPr lang="en-US" altLang="ja-JP" dirty="0"/>
-              <a:t>	</a:t>
-            </a:r>
-            <a:r>
-              <a:rPr lang="ja-JP" altLang="en-US" dirty="0"/>
-              <a:t>　トゲ</a:t>
-            </a:r>
-            <a:endParaRPr lang="en-US" altLang="ja-JP" dirty="0"/>
-          </a:p>
-          <a:p>
-            <a:r>
-              <a:rPr kumimoji="1" lang="ja-JP" altLang="en-US" dirty="0"/>
-              <a:t>敵の攻撃　ダッシュ状態でないときの敵の接触</a:t>
-            </a:r>
-          </a:p>
-        </p:txBody>
-      </p:sp>
-      <p:sp>
-        <p:nvSpPr>
-          <p:cNvPr id="7" name="テキスト ボックス 6">
-            <a:extLst>
-              <a:ext uri="{FF2B5EF4-FFF2-40B4-BE49-F238E27FC236}">
-                <a16:creationId xmlns:a16="http://schemas.microsoft.com/office/drawing/2014/main" id="{A2A67A99-A783-4540-8159-A022FC2423BB}"/>
-              </a:ext>
-            </a:extLst>
-          </p:cNvPr>
-          <p:cNvSpPr txBox="1"/>
-          <p:nvPr/>
-        </p:nvSpPr>
-        <p:spPr>
-          <a:xfrm>
-            <a:off x="0" y="2099847"/>
-            <a:ext cx="9693679" cy="1200329"/>
-          </a:xfrm>
-          <a:prstGeom prst="rect">
-            <a:avLst/>
-          </a:prstGeom>
-          <a:noFill/>
-        </p:spPr>
-        <p:txBody>
-          <a:bodyPr wrap="none" rtlCol="0">
-            <a:spAutoFit/>
-          </a:bodyPr>
-          <a:lstStyle/>
-          <a:p>
-            <a:r>
-              <a:rPr kumimoji="1" lang="ja-JP" altLang="en-US" sz="2400" dirty="0"/>
-              <a:t>ダッシュ状態の</a:t>
-            </a:r>
-            <a:r>
-              <a:rPr kumimoji="1" lang="en-US" altLang="ja-JP" sz="2400" dirty="0"/>
-              <a:t>Player</a:t>
-            </a:r>
-            <a:r>
-              <a:rPr kumimoji="1" lang="ja-JP" altLang="en-US" sz="2400" dirty="0"/>
-              <a:t>が敵と接触することで「行動待機状態」になる</a:t>
-            </a:r>
-            <a:endParaRPr kumimoji="1" lang="en-US" altLang="ja-JP" sz="2400" dirty="0"/>
-          </a:p>
-          <a:p>
-            <a:r>
-              <a:rPr kumimoji="1" lang="ja-JP" altLang="en-US" sz="2400" dirty="0"/>
-              <a:t>この「行動待機状態」になるともう一度ダッシュが可能になる</a:t>
-            </a:r>
-            <a:endParaRPr kumimoji="1" lang="en-US" altLang="ja-JP" sz="2400" dirty="0"/>
-          </a:p>
-          <a:p>
-            <a:r>
-              <a:rPr lang="ja-JP" altLang="en-US" sz="2400" dirty="0"/>
-              <a:t>「行動待機状態」でダッシュをすることで敵が死ぬ</a:t>
-            </a:r>
-            <a:endParaRPr lang="en-US" altLang="ja-JP" sz="2400" dirty="0"/>
-          </a:p>
-        </p:txBody>
-      </p:sp>
-      <p:pic>
-        <p:nvPicPr>
-          <p:cNvPr id="8" name="図 7">
-            <a:extLst>
-              <a:ext uri="{FF2B5EF4-FFF2-40B4-BE49-F238E27FC236}">
-                <a16:creationId xmlns:a16="http://schemas.microsoft.com/office/drawing/2014/main" id="{82524A84-6215-4ACB-B1B5-5C1CF7030C3D}"/>
-              </a:ext>
-            </a:extLst>
-          </p:cNvPr>
-          <p:cNvPicPr>
-            <a:picLocks noChangeAspect="1"/>
-          </p:cNvPicPr>
-          <p:nvPr/>
-        </p:nvPicPr>
-        <p:blipFill>
-          <a:blip r:embed="rId2">
-            <a:extLst>
-              <a:ext uri="{28A0092B-C50C-407E-A947-70E740481C1C}">
-                <a14:useLocalDpi xmlns:a14="http://schemas.microsoft.com/office/drawing/2010/main" val="0"/>
-              </a:ext>
-            </a:extLst>
-          </a:blip>
-          <a:stretch>
-            <a:fillRect/>
-          </a:stretch>
-        </p:blipFill>
-        <p:spPr>
-          <a:xfrm>
-            <a:off x="1306135" y="3713248"/>
-            <a:ext cx="2720880" cy="2048662"/>
-          </a:xfrm>
-          <a:prstGeom prst="rect">
-            <a:avLst/>
-          </a:prstGeom>
-        </p:spPr>
-      </p:pic>
-      <p:pic>
-        <p:nvPicPr>
-          <p:cNvPr id="9" name="図 8">
-            <a:extLst>
-              <a:ext uri="{FF2B5EF4-FFF2-40B4-BE49-F238E27FC236}">
-                <a16:creationId xmlns:a16="http://schemas.microsoft.com/office/drawing/2014/main" id="{64EBB7A2-7005-4711-9C94-8EACC6CF336E}"/>
-              </a:ext>
-            </a:extLst>
-          </p:cNvPr>
-          <p:cNvPicPr>
-            <a:picLocks noChangeAspect="1"/>
-          </p:cNvPicPr>
-          <p:nvPr/>
-        </p:nvPicPr>
-        <p:blipFill>
-          <a:blip r:embed="rId3">
-            <a:extLst>
-              <a:ext uri="{28A0092B-C50C-407E-A947-70E740481C1C}">
-                <a14:useLocalDpi xmlns:a14="http://schemas.microsoft.com/office/drawing/2010/main" val="0"/>
-              </a:ext>
-            </a:extLst>
-          </a:blip>
-          <a:stretch>
-            <a:fillRect/>
-          </a:stretch>
-        </p:blipFill>
-        <p:spPr>
-          <a:xfrm>
-            <a:off x="441789" y="4106753"/>
-            <a:ext cx="1728692" cy="1554769"/>
-          </a:xfrm>
-          <a:prstGeom prst="rect">
-            <a:avLst/>
-          </a:prstGeom>
-        </p:spPr>
-      </p:pic>
-      <p:pic>
-        <p:nvPicPr>
-          <p:cNvPr id="10" name="図 9">
-            <a:extLst>
-              <a:ext uri="{FF2B5EF4-FFF2-40B4-BE49-F238E27FC236}">
-                <a16:creationId xmlns:a16="http://schemas.microsoft.com/office/drawing/2014/main" id="{3BF96E96-784E-4097-92CF-1B60C7AB4F8D}"/>
-              </a:ext>
-            </a:extLst>
-          </p:cNvPr>
-          <p:cNvPicPr>
-            <a:picLocks noChangeAspect="1"/>
-          </p:cNvPicPr>
-          <p:nvPr/>
-        </p:nvPicPr>
-        <p:blipFill>
-          <a:blip r:embed="rId2">
-            <a:extLst>
-              <a:ext uri="{28A0092B-C50C-407E-A947-70E740481C1C}">
-                <a14:useLocalDpi xmlns:a14="http://schemas.microsoft.com/office/drawing/2010/main" val="0"/>
-              </a:ext>
-            </a:extLst>
-          </a:blip>
-          <a:stretch>
-            <a:fillRect/>
-          </a:stretch>
-        </p:blipFill>
-        <p:spPr>
-          <a:xfrm>
-            <a:off x="4194198" y="3713248"/>
-            <a:ext cx="2720880" cy="2048662"/>
-          </a:xfrm>
-          <a:prstGeom prst="rect">
-            <a:avLst/>
-          </a:prstGeom>
-        </p:spPr>
-      </p:pic>
-      <p:pic>
-        <p:nvPicPr>
-          <p:cNvPr id="11" name="図 10">
-            <a:extLst>
-              <a:ext uri="{FF2B5EF4-FFF2-40B4-BE49-F238E27FC236}">
-                <a16:creationId xmlns:a16="http://schemas.microsoft.com/office/drawing/2014/main" id="{E435A3E7-E9FC-4AD5-8F6F-43EDDBC7C4DA}"/>
-              </a:ext>
-            </a:extLst>
-          </p:cNvPr>
-          <p:cNvPicPr>
-            <a:picLocks noChangeAspect="1"/>
-          </p:cNvPicPr>
-          <p:nvPr/>
-        </p:nvPicPr>
-        <p:blipFill>
-          <a:blip r:embed="rId4">
-            <a:extLst>
-              <a:ext uri="{28A0092B-C50C-407E-A947-70E740481C1C}">
-                <a14:useLocalDpi xmlns:a14="http://schemas.microsoft.com/office/drawing/2010/main" val="0"/>
-              </a:ext>
-            </a:extLst>
-          </a:blip>
-          <a:stretch>
-            <a:fillRect/>
-          </a:stretch>
-        </p:blipFill>
-        <p:spPr>
-          <a:xfrm>
-            <a:off x="4027015" y="3656635"/>
-            <a:ext cx="2460811" cy="2460811"/>
-          </a:xfrm>
-          <a:prstGeom prst="rect">
-            <a:avLst/>
-          </a:prstGeom>
-        </p:spPr>
-      </p:pic>
-      <p:sp>
-        <p:nvSpPr>
-          <p:cNvPr id="12" name="テキスト ボックス 11">
-            <a:extLst>
-              <a:ext uri="{FF2B5EF4-FFF2-40B4-BE49-F238E27FC236}">
-                <a16:creationId xmlns:a16="http://schemas.microsoft.com/office/drawing/2014/main" id="{AD1F8E21-7F40-42C8-B398-ADD7CC411B63}"/>
-              </a:ext>
-            </a:extLst>
-          </p:cNvPr>
-          <p:cNvSpPr txBox="1"/>
-          <p:nvPr/>
-        </p:nvSpPr>
-        <p:spPr>
-          <a:xfrm>
-            <a:off x="4468094" y="5531077"/>
-            <a:ext cx="4185761" cy="1200329"/>
-          </a:xfrm>
-          <a:prstGeom prst="rect">
-            <a:avLst/>
-          </a:prstGeom>
-          <a:noFill/>
-        </p:spPr>
-        <p:txBody>
-          <a:bodyPr wrap="none" rtlCol="0">
-            <a:spAutoFit/>
-          </a:bodyPr>
-          <a:lstStyle/>
-          <a:p>
-            <a:r>
-              <a:rPr lang="ja-JP" altLang="en-US" sz="2400" dirty="0"/>
-              <a:t>行動待機状態</a:t>
-            </a:r>
-            <a:endParaRPr lang="en-US" altLang="ja-JP" sz="2400" dirty="0"/>
-          </a:p>
-          <a:p>
-            <a:r>
-              <a:rPr kumimoji="1" lang="ja-JP" altLang="en-US" sz="2400" dirty="0"/>
-              <a:t>この状態では敵は攻撃しない</a:t>
-            </a:r>
-            <a:endParaRPr kumimoji="1" lang="en-US" altLang="ja-JP" sz="2400" dirty="0"/>
-          </a:p>
-          <a:p>
-            <a:r>
-              <a:rPr lang="en-US" altLang="ja-JP" sz="2400" dirty="0"/>
-              <a:t>Player</a:t>
-            </a:r>
-            <a:r>
-              <a:rPr lang="ja-JP" altLang="en-US" sz="2400" dirty="0"/>
-              <a:t>のダッシュが回復</a:t>
-            </a:r>
-            <a:endParaRPr kumimoji="1" lang="ja-JP" altLang="en-US" sz="2400" dirty="0"/>
-          </a:p>
-        </p:txBody>
-      </p:sp>
-      <p:pic>
-        <p:nvPicPr>
-          <p:cNvPr id="13" name="図 12">
-            <a:extLst>
-              <a:ext uri="{FF2B5EF4-FFF2-40B4-BE49-F238E27FC236}">
-                <a16:creationId xmlns:a16="http://schemas.microsoft.com/office/drawing/2014/main" id="{B550E5D0-44E5-4322-8EB6-5E831CDF1C57}"/>
-              </a:ext>
-            </a:extLst>
-          </p:cNvPr>
-          <p:cNvPicPr>
-            <a:picLocks noChangeAspect="1"/>
-          </p:cNvPicPr>
-          <p:nvPr/>
-        </p:nvPicPr>
-        <p:blipFill>
-          <a:blip r:embed="rId3">
-            <a:extLst>
-              <a:ext uri="{28A0092B-C50C-407E-A947-70E740481C1C}">
-                <a14:useLocalDpi xmlns:a14="http://schemas.microsoft.com/office/drawing/2010/main" val="0"/>
-              </a:ext>
-            </a:extLst>
-          </a:blip>
-          <a:stretch>
-            <a:fillRect/>
-          </a:stretch>
-        </p:blipFill>
-        <p:spPr>
-          <a:xfrm>
-            <a:off x="10006240" y="3960194"/>
-            <a:ext cx="1728692" cy="1554769"/>
-          </a:xfrm>
-          <a:prstGeom prst="rect">
-            <a:avLst/>
-          </a:prstGeom>
-        </p:spPr>
-      </p:pic>
-      <p:pic>
-        <p:nvPicPr>
-          <p:cNvPr id="14" name="図 13">
-            <a:extLst>
-              <a:ext uri="{FF2B5EF4-FFF2-40B4-BE49-F238E27FC236}">
-                <a16:creationId xmlns:a16="http://schemas.microsoft.com/office/drawing/2014/main" id="{94CA9B86-1EDE-49DF-B738-803C8EEAE057}"/>
-              </a:ext>
-            </a:extLst>
-          </p:cNvPr>
-          <p:cNvPicPr>
-            <a:picLocks noChangeAspect="1"/>
-          </p:cNvPicPr>
-          <p:nvPr/>
-        </p:nvPicPr>
-        <p:blipFill>
-          <a:blip r:embed="rId5">
-            <a:extLst>
-              <a:ext uri="{28A0092B-C50C-407E-A947-70E740481C1C}">
-                <a14:useLocalDpi xmlns:a14="http://schemas.microsoft.com/office/drawing/2010/main" val="0"/>
-              </a:ext>
-            </a:extLst>
-          </a:blip>
-          <a:stretch>
-            <a:fillRect/>
-          </a:stretch>
-        </p:blipFill>
-        <p:spPr>
-          <a:xfrm>
-            <a:off x="8189178" y="4015226"/>
-            <a:ext cx="1921011" cy="1499737"/>
-          </a:xfrm>
-          <a:prstGeom prst="rect">
-            <a:avLst/>
-          </a:prstGeom>
-        </p:spPr>
-      </p:pic>
-      <p:sp>
-        <p:nvSpPr>
-          <p:cNvPr id="15" name="テキスト ボックス 14">
-            <a:extLst>
-              <a:ext uri="{FF2B5EF4-FFF2-40B4-BE49-F238E27FC236}">
-                <a16:creationId xmlns:a16="http://schemas.microsoft.com/office/drawing/2014/main" id="{A88430D7-C0A0-4A86-89C2-B99B0208DD2C}"/>
-              </a:ext>
-            </a:extLst>
-          </p:cNvPr>
-          <p:cNvSpPr txBox="1"/>
-          <p:nvPr/>
-        </p:nvSpPr>
-        <p:spPr>
-          <a:xfrm>
-            <a:off x="-108629" y="1390076"/>
-            <a:ext cx="5702605" cy="769441"/>
-          </a:xfrm>
-          <a:prstGeom prst="rect">
-            <a:avLst/>
-          </a:prstGeom>
-          <a:noFill/>
-        </p:spPr>
-        <p:txBody>
-          <a:bodyPr wrap="square" rtlCol="0">
-            <a:spAutoFit/>
-          </a:bodyPr>
-          <a:lstStyle/>
-          <a:p>
-            <a:r>
-              <a:rPr kumimoji="1" lang="ja-JP" altLang="en-US" sz="4400" dirty="0"/>
-              <a:t>ー</a:t>
-            </a:r>
-            <a:r>
-              <a:rPr lang="ja-JP" altLang="en-US" sz="4400" dirty="0"/>
-              <a:t>ダッシュ攻撃</a:t>
-            </a:r>
-            <a:r>
-              <a:rPr kumimoji="1" lang="ja-JP" altLang="en-US" sz="4400" dirty="0"/>
-              <a:t>ー</a:t>
-            </a:r>
-          </a:p>
-        </p:txBody>
-      </p:sp>
-    </p:spTree>
-    <p:extLst>
-      <p:ext uri="{BB962C8B-B14F-4D97-AF65-F5344CB8AC3E}">
-        <p14:creationId xmlns:p14="http://schemas.microsoft.com/office/powerpoint/2010/main" val="2024741015"/>
       </p:ext>
     </p:extLst>
   </p:cSld>
